--- a/google-drive/week05/2Tues/LA'sBest-ClinicalTrials.pptx
+++ b/google-drive/week05/2Tues/LA'sBest-ClinicalTrials.pptx
@@ -2912,10 +2912,10 @@
       </p:sp>
       <p:pic>
         <p:nvPicPr>
-          <p:cNvPr id="8" name="Picture 7">
-            <a:extLst>
-              <a:ext uri="{FF2B5EF4-FFF2-40B4-BE49-F238E27FC236}">
-                <a16:creationId xmlns:a16="http://schemas.microsoft.com/office/drawing/2014/main" id="{6295F194-3BE6-3E48-B05A-E941132D652D}"/>
+          <p:cNvPr id="4" name="Picture 3" descr="A black and red text&#10;&#10;Description automatically generated">
+            <a:extLst>
+              <a:ext uri="{FF2B5EF4-FFF2-40B4-BE49-F238E27FC236}">
+                <a16:creationId xmlns:a16="http://schemas.microsoft.com/office/drawing/2014/main" id="{97CE99BC-7962-FDDF-2939-A728A5EB394B}"/>
               </a:ext>
             </a:extLst>
           </p:cNvPr>
@@ -2932,8 +2932,8 @@
         </p:blipFill>
         <p:spPr>
           <a:xfrm>
-            <a:off x="130179" y="4636001"/>
-            <a:ext cx="981580" cy="460853"/>
+            <a:off x="173025" y="4391948"/>
+            <a:ext cx="778545" cy="683955"/>
           </a:xfrm>
           <a:prstGeom prst="rect">
             <a:avLst/>
@@ -14622,6 +14622,60 @@
           </a:p>
           <a:p>
             <a:endParaRPr lang="en-US" dirty="0"/>
+          </a:p>
+        </p:txBody>
+      </p:sp>
+      <p:sp>
+        <p:nvSpPr>
+          <p:cNvPr id="3" name="Rectangle 2">
+            <a:extLst>
+              <a:ext uri="{FF2B5EF4-FFF2-40B4-BE49-F238E27FC236}">
+                <a16:creationId xmlns:a16="http://schemas.microsoft.com/office/drawing/2014/main" id="{0A77BB9C-6C93-FB94-617C-B61C2C38BF53}"/>
+              </a:ext>
+            </a:extLst>
+          </p:cNvPr>
+          <p:cNvSpPr/>
+          <p:nvPr/>
+        </p:nvSpPr>
+        <p:spPr>
+          <a:xfrm>
+            <a:off x="110359" y="4296103"/>
+            <a:ext cx="930165" cy="788276"/>
+          </a:xfrm>
+          <a:prstGeom prst="rect">
+            <a:avLst/>
+          </a:prstGeom>
+          <a:solidFill>
+            <a:schemeClr val="bg1"/>
+          </a:solidFill>
+          <a:ln>
+            <a:solidFill>
+              <a:schemeClr val="bg1"/>
+            </a:solidFill>
+          </a:ln>
+        </p:spPr>
+        <p:style>
+          <a:lnRef idx="2">
+            <a:schemeClr val="accent1">
+              <a:shade val="15000"/>
+            </a:schemeClr>
+          </a:lnRef>
+          <a:fillRef idx="1">
+            <a:schemeClr val="accent1"/>
+          </a:fillRef>
+          <a:effectRef idx="0">
+            <a:schemeClr val="accent1"/>
+          </a:effectRef>
+          <a:fontRef idx="minor">
+            <a:schemeClr val="lt1"/>
+          </a:fontRef>
+        </p:style>
+        <p:txBody>
+          <a:bodyPr rtlCol="0" anchor="ctr"/>
+          <a:lstStyle/>
+          <a:p>
+            <a:pPr algn="ctr"/>
+            <a:endParaRPr lang="en-US"/>
           </a:p>
         </p:txBody>
       </p:sp>

--- a/google-drive/week05/2Tues/LA'sBest-ClinicalTrials.pptx
+++ b/google-drive/week05/2Tues/LA'sBest-ClinicalTrials.pptx
@@ -5,7 +5,7 @@
     <p:sldMasterId id="2147483674" r:id="rId1"/>
   </p:sldMasterIdLst>
   <p:notesMasterIdLst>
-    <p:notesMasterId r:id="rId47"/>
+    <p:notesMasterId r:id="rId49"/>
   </p:notesMasterIdLst>
   <p:sldIdLst>
     <p:sldId id="256" r:id="rId2"/>
@@ -16,43 +16,45 @@
     <p:sldId id="288" r:id="rId7"/>
     <p:sldId id="276" r:id="rId8"/>
     <p:sldId id="281" r:id="rId9"/>
-    <p:sldId id="294" r:id="rId10"/>
-    <p:sldId id="282" r:id="rId11"/>
-    <p:sldId id="295" r:id="rId12"/>
-    <p:sldId id="283" r:id="rId13"/>
-    <p:sldId id="297" r:id="rId14"/>
-    <p:sldId id="299" r:id="rId15"/>
-    <p:sldId id="284" r:id="rId16"/>
-    <p:sldId id="289" r:id="rId17"/>
-    <p:sldId id="285" r:id="rId18"/>
-    <p:sldId id="291" r:id="rId19"/>
-    <p:sldId id="275" r:id="rId20"/>
-    <p:sldId id="277" r:id="rId21"/>
-    <p:sldId id="290" r:id="rId22"/>
-    <p:sldId id="296" r:id="rId23"/>
-    <p:sldId id="300" r:id="rId24"/>
-    <p:sldId id="274" r:id="rId25"/>
-    <p:sldId id="292" r:id="rId26"/>
+    <p:sldId id="320" r:id="rId10"/>
+    <p:sldId id="294" r:id="rId11"/>
+    <p:sldId id="282" r:id="rId12"/>
+    <p:sldId id="295" r:id="rId13"/>
+    <p:sldId id="283" r:id="rId14"/>
+    <p:sldId id="297" r:id="rId15"/>
+    <p:sldId id="299" r:id="rId16"/>
+    <p:sldId id="284" r:id="rId17"/>
+    <p:sldId id="289" r:id="rId18"/>
+    <p:sldId id="285" r:id="rId19"/>
+    <p:sldId id="291" r:id="rId20"/>
+    <p:sldId id="275" r:id="rId21"/>
+    <p:sldId id="277" r:id="rId22"/>
+    <p:sldId id="290" r:id="rId23"/>
+    <p:sldId id="296" r:id="rId24"/>
+    <p:sldId id="300" r:id="rId25"/>
+    <p:sldId id="274" r:id="rId26"/>
     <p:sldId id="301" r:id="rId27"/>
     <p:sldId id="305" r:id="rId28"/>
     <p:sldId id="302" r:id="rId29"/>
-    <p:sldId id="303" r:id="rId30"/>
-    <p:sldId id="304" r:id="rId31"/>
-    <p:sldId id="307" r:id="rId32"/>
-    <p:sldId id="271" r:id="rId33"/>
-    <p:sldId id="269" r:id="rId34"/>
-    <p:sldId id="270" r:id="rId35"/>
-    <p:sldId id="318" r:id="rId36"/>
-    <p:sldId id="306" r:id="rId37"/>
-    <p:sldId id="309" r:id="rId38"/>
-    <p:sldId id="310" r:id="rId39"/>
-    <p:sldId id="311" r:id="rId40"/>
-    <p:sldId id="319" r:id="rId41"/>
-    <p:sldId id="313" r:id="rId42"/>
-    <p:sldId id="315" r:id="rId43"/>
-    <p:sldId id="316" r:id="rId44"/>
-    <p:sldId id="317" r:id="rId45"/>
-    <p:sldId id="287" r:id="rId46"/>
+    <p:sldId id="321" r:id="rId30"/>
+    <p:sldId id="303" r:id="rId31"/>
+    <p:sldId id="304" r:id="rId32"/>
+    <p:sldId id="307" r:id="rId33"/>
+    <p:sldId id="271" r:id="rId34"/>
+    <p:sldId id="322" r:id="rId35"/>
+    <p:sldId id="269" r:id="rId36"/>
+    <p:sldId id="270" r:id="rId37"/>
+    <p:sldId id="318" r:id="rId38"/>
+    <p:sldId id="306" r:id="rId39"/>
+    <p:sldId id="309" r:id="rId40"/>
+    <p:sldId id="310" r:id="rId41"/>
+    <p:sldId id="311" r:id="rId42"/>
+    <p:sldId id="319" r:id="rId43"/>
+    <p:sldId id="313" r:id="rId44"/>
+    <p:sldId id="315" r:id="rId45"/>
+    <p:sldId id="316" r:id="rId46"/>
+    <p:sldId id="317" r:id="rId47"/>
+    <p:sldId id="287" r:id="rId48"/>
   </p:sldIdLst>
   <p:sldSz cx="9144000" cy="5143500" type="screen16x9"/>
   <p:notesSz cx="6858000" cy="9144000"/>
@@ -244,7 +246,7 @@
           <a:p>
             <a:fld id="{30318094-E052-0447-9DA8-9DE186F5A782}" type="datetimeFigureOut">
               <a:rPr lang="en-US" smtClean="0"/>
-              <a:t>7/7/25</a:t>
+              <a:t>7/14/25</a:t>
             </a:fld>
             <a:endParaRPr lang="en-US"/>
           </a:p>
@@ -600,6 +602,114 @@
   <p:cSld>
     <p:spTree>
       <p:nvGrpSpPr>
+        <p:cNvPr id="1" name="">
+          <a:extLst>
+            <a:ext uri="{FF2B5EF4-FFF2-40B4-BE49-F238E27FC236}">
+              <a16:creationId xmlns:a16="http://schemas.microsoft.com/office/drawing/2014/main" id="{0330AACB-37E5-E5DA-7E52-5165A4B36035}"/>
+            </a:ext>
+          </a:extLst>
+        </p:cNvPr>
+        <p:cNvGrpSpPr/>
+        <p:nvPr/>
+      </p:nvGrpSpPr>
+      <p:grpSpPr>
+        <a:xfrm>
+          <a:off x="0" y="0"/>
+          <a:ext cx="0" cy="0"/>
+          <a:chOff x="0" y="0"/>
+          <a:chExt cx="0" cy="0"/>
+        </a:xfrm>
+      </p:grpSpPr>
+      <p:sp>
+        <p:nvSpPr>
+          <p:cNvPr id="2" name="Slide Image Placeholder 1">
+            <a:extLst>
+              <a:ext uri="{FF2B5EF4-FFF2-40B4-BE49-F238E27FC236}">
+                <a16:creationId xmlns:a16="http://schemas.microsoft.com/office/drawing/2014/main" id="{78E02B58-238D-48BA-0608-B724BC88F006}"/>
+              </a:ext>
+            </a:extLst>
+          </p:cNvPr>
+          <p:cNvSpPr>
+            <a:spLocks noGrp="1" noRot="1" noChangeAspect="1"/>
+          </p:cNvSpPr>
+          <p:nvPr>
+            <p:ph type="sldImg"/>
+          </p:nvPr>
+        </p:nvSpPr>
+        <p:spPr/>
+      </p:sp>
+      <p:sp>
+        <p:nvSpPr>
+          <p:cNvPr id="3" name="Notes Placeholder 2">
+            <a:extLst>
+              <a:ext uri="{FF2B5EF4-FFF2-40B4-BE49-F238E27FC236}">
+                <a16:creationId xmlns:a16="http://schemas.microsoft.com/office/drawing/2014/main" id="{AFC9D626-FFB9-30B1-4E33-56DB24222622}"/>
+              </a:ext>
+            </a:extLst>
+          </p:cNvPr>
+          <p:cNvSpPr>
+            <a:spLocks noGrp="1"/>
+          </p:cNvSpPr>
+          <p:nvPr>
+            <p:ph type="body" idx="1"/>
+          </p:nvPr>
+        </p:nvSpPr>
+        <p:spPr/>
+        <p:txBody>
+          <a:bodyPr/>
+          <a:lstStyle/>
+          <a:p>
+            <a:endParaRPr lang="en-US" dirty="0"/>
+          </a:p>
+        </p:txBody>
+      </p:sp>
+      <p:sp>
+        <p:nvSpPr>
+          <p:cNvPr id="4" name="Slide Number Placeholder 3">
+            <a:extLst>
+              <a:ext uri="{FF2B5EF4-FFF2-40B4-BE49-F238E27FC236}">
+                <a16:creationId xmlns:a16="http://schemas.microsoft.com/office/drawing/2014/main" id="{1CE9143F-919E-6462-B5A3-7A146B70711D}"/>
+              </a:ext>
+            </a:extLst>
+          </p:cNvPr>
+          <p:cNvSpPr>
+            <a:spLocks noGrp="1"/>
+          </p:cNvSpPr>
+          <p:nvPr>
+            <p:ph type="sldNum" sz="quarter" idx="5"/>
+          </p:nvPr>
+        </p:nvSpPr>
+        <p:spPr/>
+        <p:txBody>
+          <a:bodyPr/>
+          <a:lstStyle/>
+          <a:p>
+            <a:fld id="{3BF1954D-7569-3845-B1BD-17B4DC03212A}" type="slidenum">
+              <a:rPr lang="en-US" smtClean="0"/>
+              <a:t>9</a:t>
+            </a:fld>
+            <a:endParaRPr lang="en-US"/>
+          </a:p>
+        </p:txBody>
+      </p:sp>
+    </p:spTree>
+    <p:extLst>
+      <p:ext uri="{BB962C8B-B14F-4D97-AF65-F5344CB8AC3E}">
+        <p14:creationId xmlns:p14="http://schemas.microsoft.com/office/powerpoint/2010/main" val="4151799328"/>
+      </p:ext>
+    </p:extLst>
+  </p:cSld>
+  <p:clrMapOvr>
+    <a:masterClrMapping/>
+  </p:clrMapOvr>
+</p:notes>
+</file>
+
+<file path=ppt/notesSlides/notesSlide3.xml><?xml version="1.0" encoding="utf-8"?>
+<p:notes xmlns:a="http://schemas.openxmlformats.org/drawingml/2006/main" xmlns:r="http://schemas.openxmlformats.org/officeDocument/2006/relationships" xmlns:p="http://schemas.openxmlformats.org/presentationml/2006/main">
+  <p:cSld>
+    <p:spTree>
+      <p:nvGrpSpPr>
         <p:cNvPr id="1" name=""/>
         <p:cNvGrpSpPr/>
         <p:nvPr/>
@@ -660,7 +770,7 @@
           <a:p>
             <a:fld id="{3BF1954D-7569-3845-B1BD-17B4DC03212A}" type="slidenum">
               <a:rPr lang="en-US" smtClean="0"/>
-              <a:t>34</a:t>
+              <a:t>36</a:t>
             </a:fld>
             <a:endParaRPr lang="en-US"/>
           </a:p>
@@ -3280,7 +3390,7 @@
         </p:nvSpPr>
         <p:spPr>
           <a:xfrm>
-            <a:off x="439424" y="2759302"/>
+            <a:off x="2031741" y="1584772"/>
             <a:ext cx="5509071" cy="1131094"/>
           </a:xfrm>
         </p:spPr>
@@ -3311,19 +3421,43 @@
             <p:ph type="subTitle" idx="1"/>
           </p:nvPr>
         </p:nvSpPr>
-        <p:spPr/>
-        <p:txBody>
-          <a:bodyPr/>
-          <a:lstStyle/>
-          <a:p>
-            <a:r>
-              <a:rPr lang="en-US"/>
-              <a:t>Michelle </a:t>
-            </a:r>
-            <a:r>
-              <a:rPr lang="en-US" dirty="0"/>
-              <a:t>M. Nuño, Ph.D.</a:t>
-            </a:r>
+        <p:spPr>
+          <a:xfrm>
+            <a:off x="1817464" y="2571750"/>
+            <a:ext cx="5509071" cy="750143"/>
+          </a:xfrm>
+        </p:spPr>
+        <p:txBody>
+          <a:bodyPr>
+            <a:normAutofit/>
+          </a:bodyPr>
+          <a:lstStyle/>
+          <a:p>
+            <a:pPr algn="ctr"/>
+            <a:r>
+              <a:rPr lang="en-US" dirty="0"/>
+              <a:t>Michelle M. Nuño, Ph.D. </a:t>
+            </a:r>
+          </a:p>
+          <a:p>
+            <a:pPr algn="ctr"/>
+            <a:r>
+              <a:rPr lang="en-US" dirty="0"/>
+              <a:t>Email: </a:t>
+            </a:r>
+            <a:r>
+              <a:rPr lang="en-US" dirty="0">
+                <a:hlinkClick r:id="rId2"/>
+              </a:rPr>
+              <a:t>mnuno@usc.edu</a:t>
+            </a:r>
+            <a:endParaRPr lang="en-US" dirty="0"/>
+          </a:p>
+          <a:p>
+            <a:endParaRPr lang="en-US" dirty="0"/>
+          </a:p>
+          <a:p>
+            <a:endParaRPr lang="en-US" dirty="0"/>
           </a:p>
         </p:txBody>
       </p:sp>
@@ -3359,10 +3493,60 @@
       </p:grpSpPr>
       <p:sp>
         <p:nvSpPr>
+          <p:cNvPr id="2" name="Text Placeholder 1">
+            <a:extLst>
+              <a:ext uri="{FF2B5EF4-FFF2-40B4-BE49-F238E27FC236}">
+                <a16:creationId xmlns:a16="http://schemas.microsoft.com/office/drawing/2014/main" id="{3DE51B2F-CED1-1EDF-E61D-3CD762261A07}"/>
+              </a:ext>
+            </a:extLst>
+          </p:cNvPr>
+          <p:cNvSpPr>
+            <a:spLocks noGrp="1"/>
+          </p:cNvSpPr>
+          <p:nvPr>
+            <p:ph type="body" sz="quarter" idx="10"/>
+          </p:nvPr>
+        </p:nvSpPr>
+        <p:spPr>
+          <a:xfrm>
+            <a:off x="456271" y="1131757"/>
+            <a:ext cx="8231459" cy="3414843"/>
+          </a:xfrm>
+        </p:spPr>
+        <p:txBody>
+          <a:bodyPr/>
+          <a:lstStyle/>
+          <a:p>
+            <a:pPr marL="285750" indent="-285750">
+              <a:buFont typeface="Arial" panose="020B0604020202020204" pitchFamily="34" charset="0"/>
+              <a:buChar char="•"/>
+            </a:pPr>
+            <a:r>
+              <a:rPr lang="en-US" dirty="0"/>
+              <a:t>Recall the first age group that was approved to receive the Pfizer vaccine…</a:t>
+            </a:r>
+          </a:p>
+          <a:p>
+            <a:pPr marL="285750" indent="-285750">
+              <a:buFont typeface="Arial" panose="020B0604020202020204" pitchFamily="34" charset="0"/>
+              <a:buChar char="•"/>
+            </a:pPr>
+            <a:r>
+              <a:rPr lang="en-US" dirty="0"/>
+              <a:t>Why would we limit who can receive the vaccine? </a:t>
+            </a:r>
+          </a:p>
+          <a:p>
+            <a:endParaRPr lang="en-US" dirty="0"/>
+          </a:p>
+        </p:txBody>
+      </p:sp>
+      <p:sp>
+        <p:nvSpPr>
           <p:cNvPr id="3" name="Text Placeholder 2">
             <a:extLst>
               <a:ext uri="{FF2B5EF4-FFF2-40B4-BE49-F238E27FC236}">
-                <a16:creationId xmlns:a16="http://schemas.microsoft.com/office/drawing/2014/main" id="{77B263D9-92D2-464B-471F-911AA353027F}"/>
+                <a16:creationId xmlns:a16="http://schemas.microsoft.com/office/drawing/2014/main" id="{59BBA4F2-6034-306B-0C36-5A6EB741585A}"/>
               </a:ext>
             </a:extLst>
           </p:cNvPr>
@@ -3373,666 +3557,25 @@
             <p:ph type="body" sz="quarter" idx="11"/>
           </p:nvPr>
         </p:nvSpPr>
-        <p:spPr>
-          <a:xfrm>
-            <a:off x="456271" y="101600"/>
-            <a:ext cx="8231459" cy="990600"/>
-          </a:xfrm>
-        </p:spPr>
+        <p:spPr/>
         <p:txBody>
           <a:bodyPr/>
           <a:lstStyle/>
           <a:p>
             <a:r>
               <a:rPr lang="en-US" dirty="0"/>
-              <a:t>Randomized Control Trial</a:t>
-            </a:r>
-          </a:p>
-        </p:txBody>
-      </p:sp>
-      <p:sp>
-        <p:nvSpPr>
-          <p:cNvPr id="4" name="Rounded Rectangle 3">
-            <a:extLst>
-              <a:ext uri="{FF2B5EF4-FFF2-40B4-BE49-F238E27FC236}">
-                <a16:creationId xmlns:a16="http://schemas.microsoft.com/office/drawing/2014/main" id="{82501C78-46FC-CC95-82C5-D976CA756CD1}"/>
-              </a:ext>
-            </a:extLst>
-          </p:cNvPr>
-          <p:cNvSpPr/>
-          <p:nvPr/>
-        </p:nvSpPr>
-        <p:spPr>
-          <a:xfrm>
-            <a:off x="3204308" y="695569"/>
-            <a:ext cx="2000738" cy="609600"/>
-          </a:xfrm>
-          <a:prstGeom prst="roundRect">
-            <a:avLst/>
-          </a:prstGeom>
-          <a:solidFill>
-            <a:srgbClr val="990000"/>
-          </a:solidFill>
-        </p:spPr>
-        <p:style>
-          <a:lnRef idx="2">
-            <a:schemeClr val="accent1">
-              <a:shade val="50000"/>
-            </a:schemeClr>
-          </a:lnRef>
-          <a:fillRef idx="1">
-            <a:schemeClr val="accent1"/>
-          </a:fillRef>
-          <a:effectRef idx="0">
-            <a:schemeClr val="accent1"/>
-          </a:effectRef>
-          <a:fontRef idx="minor">
-            <a:schemeClr val="lt1"/>
-          </a:fontRef>
-        </p:style>
-        <p:txBody>
-          <a:bodyPr rtlCol="0" anchor="ctr"/>
-          <a:lstStyle/>
-          <a:p>
-            <a:pPr algn="ctr"/>
-            <a:r>
-              <a:rPr lang="en-US" dirty="0"/>
-              <a:t>Patients assessed for eligibility</a:t>
-            </a:r>
-          </a:p>
-        </p:txBody>
-      </p:sp>
-      <p:sp>
-        <p:nvSpPr>
-          <p:cNvPr id="5" name="Rounded Rectangle 4">
-            <a:extLst>
-              <a:ext uri="{FF2B5EF4-FFF2-40B4-BE49-F238E27FC236}">
-                <a16:creationId xmlns:a16="http://schemas.microsoft.com/office/drawing/2014/main" id="{661CCA8F-D531-7BBF-64FE-2B290669854D}"/>
-              </a:ext>
-            </a:extLst>
-          </p:cNvPr>
-          <p:cNvSpPr/>
-          <p:nvPr/>
-        </p:nvSpPr>
-        <p:spPr>
-          <a:xfrm>
-            <a:off x="3204308" y="1591013"/>
-            <a:ext cx="2000738" cy="609600"/>
-          </a:xfrm>
-          <a:prstGeom prst="roundRect">
-            <a:avLst/>
-          </a:prstGeom>
-          <a:solidFill>
-            <a:srgbClr val="990000"/>
-          </a:solidFill>
-        </p:spPr>
-        <p:style>
-          <a:lnRef idx="2">
-            <a:schemeClr val="accent1">
-              <a:shade val="50000"/>
-            </a:schemeClr>
-          </a:lnRef>
-          <a:fillRef idx="1">
-            <a:schemeClr val="accent1"/>
-          </a:fillRef>
-          <a:effectRef idx="0">
-            <a:schemeClr val="accent1"/>
-          </a:effectRef>
-          <a:fontRef idx="minor">
-            <a:schemeClr val="lt1"/>
-          </a:fontRef>
-        </p:style>
-        <p:txBody>
-          <a:bodyPr rtlCol="0" anchor="ctr"/>
-          <a:lstStyle/>
-          <a:p>
-            <a:pPr algn="ctr"/>
-            <a:r>
-              <a:rPr lang="en-US" dirty="0"/>
-              <a:t>Eligible patients are enrolled</a:t>
-            </a:r>
-          </a:p>
-        </p:txBody>
-      </p:sp>
-      <p:sp>
-        <p:nvSpPr>
-          <p:cNvPr id="7" name="Rounded Rectangle 6">
-            <a:extLst>
-              <a:ext uri="{FF2B5EF4-FFF2-40B4-BE49-F238E27FC236}">
-                <a16:creationId xmlns:a16="http://schemas.microsoft.com/office/drawing/2014/main" id="{019FA927-7C80-1516-9E09-B71A7F373765}"/>
-              </a:ext>
-            </a:extLst>
-          </p:cNvPr>
-          <p:cNvSpPr/>
-          <p:nvPr/>
-        </p:nvSpPr>
-        <p:spPr>
-          <a:xfrm>
-            <a:off x="4806460" y="2485291"/>
-            <a:ext cx="2532185" cy="794820"/>
-          </a:xfrm>
-          <a:prstGeom prst="roundRect">
-            <a:avLst/>
-          </a:prstGeom>
-          <a:solidFill>
-            <a:srgbClr val="0070C0"/>
-          </a:solidFill>
-        </p:spPr>
-        <p:style>
-          <a:lnRef idx="2">
-            <a:schemeClr val="accent1">
-              <a:shade val="50000"/>
-            </a:schemeClr>
-          </a:lnRef>
-          <a:fillRef idx="1">
-            <a:schemeClr val="accent1"/>
-          </a:fillRef>
-          <a:effectRef idx="0">
-            <a:schemeClr val="accent1"/>
-          </a:effectRef>
-          <a:fontRef idx="minor">
-            <a:schemeClr val="lt1"/>
-          </a:fontRef>
-        </p:style>
-        <p:txBody>
-          <a:bodyPr rtlCol="0" anchor="ctr"/>
-          <a:lstStyle/>
-          <a:p>
-            <a:pPr algn="ctr"/>
-            <a:r>
-              <a:rPr lang="en-US" dirty="0"/>
-              <a:t>Control Arm</a:t>
-            </a:r>
-          </a:p>
-          <a:p>
-            <a:pPr algn="ctr"/>
-            <a:r>
-              <a:rPr lang="en-US" dirty="0"/>
-              <a:t> (standard of care or placebo)</a:t>
-            </a:r>
-          </a:p>
-        </p:txBody>
-      </p:sp>
-      <p:sp>
-        <p:nvSpPr>
-          <p:cNvPr id="8" name="TextBox 7">
-            <a:extLst>
-              <a:ext uri="{FF2B5EF4-FFF2-40B4-BE49-F238E27FC236}">
-                <a16:creationId xmlns:a16="http://schemas.microsoft.com/office/drawing/2014/main" id="{8B80EACC-3B91-FDCD-FF5E-2B36E883E2E2}"/>
-              </a:ext>
-            </a:extLst>
-          </p:cNvPr>
-          <p:cNvSpPr txBox="1"/>
-          <p:nvPr/>
-        </p:nvSpPr>
-        <p:spPr>
-          <a:xfrm>
-            <a:off x="3477846" y="2485291"/>
-            <a:ext cx="1453662" cy="646331"/>
-          </a:xfrm>
-          <a:prstGeom prst="rect">
-            <a:avLst/>
-          </a:prstGeom>
-          <a:noFill/>
-        </p:spPr>
-        <p:txBody>
-          <a:bodyPr wrap="square" rtlCol="0">
-            <a:spAutoFit/>
-          </a:bodyPr>
-          <a:lstStyle/>
-          <a:p>
-            <a:r>
-              <a:rPr lang="en-US" dirty="0">
-                <a:solidFill>
-                  <a:srgbClr val="0070C0"/>
-                </a:solidFill>
-              </a:rPr>
-              <a:t>Patients are randomized </a:t>
-            </a:r>
-          </a:p>
-        </p:txBody>
-      </p:sp>
-      <p:sp>
-        <p:nvSpPr>
-          <p:cNvPr id="9" name="Rounded Rectangle 8">
-            <a:extLst>
-              <a:ext uri="{FF2B5EF4-FFF2-40B4-BE49-F238E27FC236}">
-                <a16:creationId xmlns:a16="http://schemas.microsoft.com/office/drawing/2014/main" id="{A0F552C8-F06E-3BC6-7D3C-4A1A88AD7C23}"/>
-              </a:ext>
-            </a:extLst>
-          </p:cNvPr>
-          <p:cNvSpPr/>
-          <p:nvPr/>
-        </p:nvSpPr>
-        <p:spPr>
-          <a:xfrm>
-            <a:off x="945661" y="2486956"/>
-            <a:ext cx="2532185" cy="794820"/>
-          </a:xfrm>
-          <a:prstGeom prst="roundRect">
-            <a:avLst/>
-          </a:prstGeom>
-          <a:solidFill>
-            <a:srgbClr val="0070C0"/>
-          </a:solidFill>
-        </p:spPr>
-        <p:style>
-          <a:lnRef idx="2">
-            <a:schemeClr val="accent1">
-              <a:shade val="50000"/>
-            </a:schemeClr>
-          </a:lnRef>
-          <a:fillRef idx="1">
-            <a:schemeClr val="accent1"/>
-          </a:fillRef>
-          <a:effectRef idx="0">
-            <a:schemeClr val="accent1"/>
-          </a:effectRef>
-          <a:fontRef idx="minor">
-            <a:schemeClr val="lt1"/>
-          </a:fontRef>
-        </p:style>
-        <p:txBody>
-          <a:bodyPr rtlCol="0" anchor="ctr"/>
-          <a:lstStyle/>
-          <a:p>
-            <a:pPr algn="ctr"/>
-            <a:r>
-              <a:rPr lang="en-US" dirty="0"/>
-              <a:t>Treatment/</a:t>
-            </a:r>
-          </a:p>
-          <a:p>
-            <a:pPr algn="ctr"/>
-            <a:r>
-              <a:rPr lang="en-US" dirty="0"/>
-              <a:t>Experimental Arm</a:t>
-            </a:r>
-          </a:p>
-        </p:txBody>
-      </p:sp>
-      <p:sp>
-        <p:nvSpPr>
-          <p:cNvPr id="10" name="Rounded Rectangle 9">
-            <a:extLst>
-              <a:ext uri="{FF2B5EF4-FFF2-40B4-BE49-F238E27FC236}">
-                <a16:creationId xmlns:a16="http://schemas.microsoft.com/office/drawing/2014/main" id="{554396D2-20EF-2F28-2883-83CDBE5CB817}"/>
-              </a:ext>
-            </a:extLst>
-          </p:cNvPr>
-          <p:cNvSpPr/>
-          <p:nvPr/>
-        </p:nvSpPr>
-        <p:spPr>
-          <a:xfrm>
-            <a:off x="914400" y="3721100"/>
-            <a:ext cx="2563446" cy="726831"/>
-          </a:xfrm>
-          <a:prstGeom prst="roundRect">
-            <a:avLst/>
-          </a:prstGeom>
-          <a:solidFill>
-            <a:srgbClr val="990000"/>
-          </a:solidFill>
-        </p:spPr>
-        <p:style>
-          <a:lnRef idx="2">
-            <a:schemeClr val="accent1">
-              <a:shade val="50000"/>
-            </a:schemeClr>
-          </a:lnRef>
-          <a:fillRef idx="1">
-            <a:schemeClr val="accent1"/>
-          </a:fillRef>
-          <a:effectRef idx="0">
-            <a:schemeClr val="accent1"/>
-          </a:effectRef>
-          <a:fontRef idx="minor">
-            <a:schemeClr val="lt1"/>
-          </a:fontRef>
-        </p:style>
-        <p:txBody>
-          <a:bodyPr rtlCol="0" anchor="ctr"/>
-          <a:lstStyle/>
-          <a:p>
-            <a:pPr algn="ctr"/>
-            <a:r>
-              <a:rPr lang="en-US" dirty="0"/>
-              <a:t>Outcomes Assessed</a:t>
-            </a:r>
-          </a:p>
-        </p:txBody>
-      </p:sp>
-      <p:sp>
-        <p:nvSpPr>
-          <p:cNvPr id="11" name="Rounded Rectangle 10">
-            <a:extLst>
-              <a:ext uri="{FF2B5EF4-FFF2-40B4-BE49-F238E27FC236}">
-                <a16:creationId xmlns:a16="http://schemas.microsoft.com/office/drawing/2014/main" id="{806D1D5E-EB75-8A75-3583-3A69911CCAA8}"/>
-              </a:ext>
-            </a:extLst>
-          </p:cNvPr>
-          <p:cNvSpPr/>
-          <p:nvPr/>
-        </p:nvSpPr>
-        <p:spPr>
-          <a:xfrm>
-            <a:off x="4806460" y="3721099"/>
-            <a:ext cx="2563446" cy="726831"/>
-          </a:xfrm>
-          <a:prstGeom prst="roundRect">
-            <a:avLst/>
-          </a:prstGeom>
-          <a:solidFill>
-            <a:srgbClr val="990000"/>
-          </a:solidFill>
-        </p:spPr>
-        <p:style>
-          <a:lnRef idx="2">
-            <a:schemeClr val="accent1">
-              <a:shade val="50000"/>
-            </a:schemeClr>
-          </a:lnRef>
-          <a:fillRef idx="1">
-            <a:schemeClr val="accent1"/>
-          </a:fillRef>
-          <a:effectRef idx="0">
-            <a:schemeClr val="accent1"/>
-          </a:effectRef>
-          <a:fontRef idx="minor">
-            <a:schemeClr val="lt1"/>
-          </a:fontRef>
-        </p:style>
-        <p:txBody>
-          <a:bodyPr rtlCol="0" anchor="ctr"/>
-          <a:lstStyle/>
-          <a:p>
-            <a:pPr algn="ctr"/>
-            <a:r>
-              <a:rPr lang="en-US" dirty="0"/>
-              <a:t>Outcomes Assessed</a:t>
-            </a:r>
-          </a:p>
-        </p:txBody>
-      </p:sp>
-      <p:cxnSp>
-        <p:nvCxnSpPr>
-          <p:cNvPr id="14" name="Straight Arrow Connector 13">
-            <a:extLst>
-              <a:ext uri="{FF2B5EF4-FFF2-40B4-BE49-F238E27FC236}">
-                <a16:creationId xmlns:a16="http://schemas.microsoft.com/office/drawing/2014/main" id="{E04B3863-A808-17D5-3DF2-1181C7B8E2B9}"/>
-              </a:ext>
-            </a:extLst>
-          </p:cNvPr>
-          <p:cNvCxnSpPr/>
-          <p:nvPr/>
-        </p:nvCxnSpPr>
-        <p:spPr>
-          <a:xfrm>
-            <a:off x="4204677" y="1359877"/>
-            <a:ext cx="0" cy="156308"/>
-          </a:xfrm>
-          <a:prstGeom prst="straightConnector1">
-            <a:avLst/>
-          </a:prstGeom>
-          <a:ln>
-            <a:tailEnd type="triangle"/>
-          </a:ln>
-        </p:spPr>
-        <p:style>
-          <a:lnRef idx="1">
-            <a:schemeClr val="accent1"/>
-          </a:lnRef>
-          <a:fillRef idx="0">
-            <a:schemeClr val="accent1"/>
-          </a:fillRef>
-          <a:effectRef idx="0">
-            <a:schemeClr val="accent1"/>
-          </a:effectRef>
-          <a:fontRef idx="minor">
-            <a:schemeClr val="tx1"/>
-          </a:fontRef>
-        </p:style>
-      </p:cxnSp>
-      <p:cxnSp>
-        <p:nvCxnSpPr>
-          <p:cNvPr id="15" name="Straight Arrow Connector 14">
-            <a:extLst>
-              <a:ext uri="{FF2B5EF4-FFF2-40B4-BE49-F238E27FC236}">
-                <a16:creationId xmlns:a16="http://schemas.microsoft.com/office/drawing/2014/main" id="{B184397A-8540-F708-F0D5-771751F6CE07}"/>
-              </a:ext>
-            </a:extLst>
-          </p:cNvPr>
-          <p:cNvCxnSpPr>
-            <a:cxnSpLocks/>
-          </p:cNvCxnSpPr>
-          <p:nvPr/>
-        </p:nvCxnSpPr>
-        <p:spPr>
-          <a:xfrm flipH="1">
-            <a:off x="3806092" y="2309443"/>
-            <a:ext cx="277448" cy="175848"/>
-          </a:xfrm>
-          <a:prstGeom prst="straightConnector1">
-            <a:avLst/>
-          </a:prstGeom>
-          <a:ln>
-            <a:tailEnd type="triangle"/>
-          </a:ln>
-        </p:spPr>
-        <p:style>
-          <a:lnRef idx="1">
-            <a:schemeClr val="accent1"/>
-          </a:lnRef>
-          <a:fillRef idx="0">
-            <a:schemeClr val="accent1"/>
-          </a:fillRef>
-          <a:effectRef idx="0">
-            <a:schemeClr val="accent1"/>
-          </a:effectRef>
-          <a:fontRef idx="minor">
-            <a:schemeClr val="tx1"/>
-          </a:fontRef>
-        </p:style>
-      </p:cxnSp>
-      <p:cxnSp>
-        <p:nvCxnSpPr>
-          <p:cNvPr id="16" name="Straight Arrow Connector 15">
-            <a:extLst>
-              <a:ext uri="{FF2B5EF4-FFF2-40B4-BE49-F238E27FC236}">
-                <a16:creationId xmlns:a16="http://schemas.microsoft.com/office/drawing/2014/main" id="{54F7D2BF-E6DE-F9DD-C6EA-6C0600BA43D0}"/>
-              </a:ext>
-            </a:extLst>
-          </p:cNvPr>
-          <p:cNvCxnSpPr>
-            <a:cxnSpLocks/>
-          </p:cNvCxnSpPr>
-          <p:nvPr/>
-        </p:nvCxnSpPr>
-        <p:spPr>
-          <a:xfrm>
-            <a:off x="4204677" y="2309443"/>
-            <a:ext cx="367323" cy="175848"/>
-          </a:xfrm>
-          <a:prstGeom prst="straightConnector1">
-            <a:avLst/>
-          </a:prstGeom>
-          <a:ln>
-            <a:tailEnd type="triangle"/>
-          </a:ln>
-        </p:spPr>
-        <p:style>
-          <a:lnRef idx="1">
-            <a:schemeClr val="accent1"/>
-          </a:lnRef>
-          <a:fillRef idx="0">
-            <a:schemeClr val="accent1"/>
-          </a:fillRef>
-          <a:effectRef idx="0">
-            <a:schemeClr val="accent1"/>
-          </a:effectRef>
-          <a:fontRef idx="minor">
-            <a:schemeClr val="tx1"/>
-          </a:fontRef>
-        </p:style>
-      </p:cxnSp>
-      <p:cxnSp>
-        <p:nvCxnSpPr>
-          <p:cNvPr id="19" name="Straight Arrow Connector 18">
-            <a:extLst>
-              <a:ext uri="{FF2B5EF4-FFF2-40B4-BE49-F238E27FC236}">
-                <a16:creationId xmlns:a16="http://schemas.microsoft.com/office/drawing/2014/main" id="{6D005D83-172C-9D13-8389-A3ECAE7759B3}"/>
-              </a:ext>
-            </a:extLst>
-          </p:cNvPr>
-          <p:cNvCxnSpPr>
-            <a:cxnSpLocks/>
-          </p:cNvCxnSpPr>
-          <p:nvPr/>
-        </p:nvCxnSpPr>
-        <p:spPr>
-          <a:xfrm>
-            <a:off x="2086709" y="3392271"/>
-            <a:ext cx="0" cy="234067"/>
-          </a:xfrm>
-          <a:prstGeom prst="straightConnector1">
-            <a:avLst/>
-          </a:prstGeom>
-          <a:ln>
-            <a:tailEnd type="triangle"/>
-          </a:ln>
-        </p:spPr>
-        <p:style>
-          <a:lnRef idx="1">
-            <a:schemeClr val="accent1"/>
-          </a:lnRef>
-          <a:fillRef idx="0">
-            <a:schemeClr val="accent1"/>
-          </a:fillRef>
-          <a:effectRef idx="0">
-            <a:schemeClr val="accent1"/>
-          </a:effectRef>
-          <a:fontRef idx="minor">
-            <a:schemeClr val="tx1"/>
-          </a:fontRef>
-        </p:style>
-      </p:cxnSp>
-      <p:cxnSp>
-        <p:nvCxnSpPr>
-          <p:cNvPr id="21" name="Straight Arrow Connector 20">
-            <a:extLst>
-              <a:ext uri="{FF2B5EF4-FFF2-40B4-BE49-F238E27FC236}">
-                <a16:creationId xmlns:a16="http://schemas.microsoft.com/office/drawing/2014/main" id="{0D1CBE2F-AD8F-E861-1136-3C82B578F794}"/>
-              </a:ext>
-            </a:extLst>
-          </p:cNvPr>
-          <p:cNvCxnSpPr>
-            <a:cxnSpLocks/>
-          </p:cNvCxnSpPr>
-          <p:nvPr/>
-        </p:nvCxnSpPr>
-        <p:spPr>
-          <a:xfrm>
-            <a:off x="6072552" y="3392271"/>
-            <a:ext cx="0" cy="234067"/>
-          </a:xfrm>
-          <a:prstGeom prst="straightConnector1">
-            <a:avLst/>
-          </a:prstGeom>
-          <a:ln>
-            <a:tailEnd type="triangle"/>
-          </a:ln>
-        </p:spPr>
-        <p:style>
-          <a:lnRef idx="1">
-            <a:schemeClr val="accent1"/>
-          </a:lnRef>
-          <a:fillRef idx="0">
-            <a:schemeClr val="accent1"/>
-          </a:fillRef>
-          <a:effectRef idx="0">
-            <a:schemeClr val="accent1"/>
-          </a:effectRef>
-          <a:fontRef idx="minor">
-            <a:schemeClr val="tx1"/>
-          </a:fontRef>
-        </p:style>
-      </p:cxnSp>
-      <p:sp>
-        <p:nvSpPr>
-          <p:cNvPr id="2" name="TextBox 1">
-            <a:extLst>
-              <a:ext uri="{FF2B5EF4-FFF2-40B4-BE49-F238E27FC236}">
-                <a16:creationId xmlns:a16="http://schemas.microsoft.com/office/drawing/2014/main" id="{9FBCAC4F-0B02-B076-E297-2F6DB82F47FE}"/>
-              </a:ext>
-            </a:extLst>
-          </p:cNvPr>
-          <p:cNvSpPr txBox="1"/>
-          <p:nvPr/>
-        </p:nvSpPr>
-        <p:spPr>
-          <a:xfrm>
-            <a:off x="5381469" y="194872"/>
-            <a:ext cx="3425252" cy="2031325"/>
-          </a:xfrm>
-          <a:prstGeom prst="rect">
-            <a:avLst/>
-          </a:prstGeom>
-          <a:noFill/>
-        </p:spPr>
-        <p:txBody>
-          <a:bodyPr wrap="square" rtlCol="0">
-            <a:spAutoFit/>
-          </a:bodyPr>
-          <a:lstStyle/>
-          <a:p>
-            <a:pPr marL="285750" indent="-285750">
-              <a:buFont typeface="Arial" panose="020B0604020202020204" pitchFamily="34" charset="0"/>
-              <a:buChar char="•"/>
-            </a:pPr>
-            <a:r>
-              <a:rPr lang="en-US" dirty="0">
-                <a:solidFill>
-                  <a:srgbClr val="0070C0"/>
-                </a:solidFill>
-              </a:rPr>
-              <a:t>Randomization is used to ensure (theoretically) that potential prognostic factors are balanced between the intervention groups</a:t>
-            </a:r>
-          </a:p>
-          <a:p>
-            <a:pPr marL="285750" indent="-285750">
-              <a:buFont typeface="Arial" panose="020B0604020202020204" pitchFamily="34" charset="0"/>
-              <a:buChar char="•"/>
-            </a:pPr>
-            <a:r>
-              <a:rPr lang="en-US" dirty="0">
-                <a:solidFill>
-                  <a:srgbClr val="0070C0"/>
-                </a:solidFill>
-              </a:rPr>
-              <a:t>Makes comparisons feasible</a:t>
-            </a:r>
-          </a:p>
-          <a:p>
-            <a:pPr marL="285750" indent="-285750">
-              <a:buFont typeface="Arial" panose="020B0604020202020204" pitchFamily="34" charset="0"/>
-              <a:buChar char="•"/>
-            </a:pPr>
-            <a:r>
-              <a:rPr lang="en-US" dirty="0">
-                <a:solidFill>
-                  <a:srgbClr val="0070C0"/>
-                </a:solidFill>
-              </a:rPr>
-              <a:t>“1:1 randomization”</a:t>
-            </a:r>
+              <a:t>Safety and Efficacy of the BNT162b2 mRNA Covid-19 Vaccine</a:t>
+            </a:r>
+          </a:p>
+          <a:p>
+            <a:endParaRPr lang="en-US" dirty="0"/>
           </a:p>
         </p:txBody>
       </p:sp>
     </p:spTree>
     <p:extLst>
       <p:ext uri="{BB962C8B-B14F-4D97-AF65-F5344CB8AC3E}">
-        <p14:creationId xmlns:p14="http://schemas.microsoft.com/office/powerpoint/2010/main" val="352574928"/>
+        <p14:creationId xmlns:p14="http://schemas.microsoft.com/office/powerpoint/2010/main" val="2178431929"/>
       </p:ext>
     </p:extLst>
   </p:cSld>
@@ -4061,60 +3604,10 @@
       </p:grpSpPr>
       <p:sp>
         <p:nvSpPr>
-          <p:cNvPr id="2" name="Text Placeholder 1">
-            <a:extLst>
-              <a:ext uri="{FF2B5EF4-FFF2-40B4-BE49-F238E27FC236}">
-                <a16:creationId xmlns:a16="http://schemas.microsoft.com/office/drawing/2014/main" id="{991E726D-F71E-D2E9-9782-D5198EA1FF43}"/>
-              </a:ext>
-            </a:extLst>
-          </p:cNvPr>
-          <p:cNvSpPr>
-            <a:spLocks noGrp="1"/>
-          </p:cNvSpPr>
-          <p:nvPr>
-            <p:ph type="body" sz="quarter" idx="10"/>
-          </p:nvPr>
-        </p:nvSpPr>
-        <p:spPr>
-          <a:xfrm>
-            <a:off x="456271" y="809469"/>
-            <a:ext cx="8231459" cy="3737131"/>
-          </a:xfrm>
-        </p:spPr>
-        <p:txBody>
-          <a:bodyPr/>
-          <a:lstStyle/>
-          <a:p>
-            <a:r>
-              <a:rPr lang="en-US" dirty="0"/>
-              <a:t>“Participants in the trial were randomly assigned in a 1:1 ratio to receive 30 </a:t>
-            </a:r>
-            <a:r>
-              <a:rPr lang="el-GR" dirty="0"/>
-              <a:t>μ</a:t>
-            </a:r>
-            <a:r>
-              <a:rPr lang="en-US" dirty="0"/>
-              <a:t>g of BNT162b2 (0.3 ml volume per dose) or saline placebo”</a:t>
-            </a:r>
-          </a:p>
-          <a:p>
-            <a:endParaRPr lang="en-US" dirty="0"/>
-          </a:p>
-          <a:p>
-            <a:r>
-              <a:rPr lang="en-US" dirty="0"/>
-              <a:t>Why was placebo used for the control arm? </a:t>
-            </a:r>
-          </a:p>
-        </p:txBody>
-      </p:sp>
-      <p:sp>
-        <p:nvSpPr>
           <p:cNvPr id="3" name="Text Placeholder 2">
             <a:extLst>
               <a:ext uri="{FF2B5EF4-FFF2-40B4-BE49-F238E27FC236}">
-                <a16:creationId xmlns:a16="http://schemas.microsoft.com/office/drawing/2014/main" id="{824D7C6A-E511-21C8-7209-1108A3B3B919}"/>
+                <a16:creationId xmlns:a16="http://schemas.microsoft.com/office/drawing/2014/main" id="{77B263D9-92D2-464B-471F-911AA353027F}"/>
               </a:ext>
             </a:extLst>
           </p:cNvPr>
@@ -4125,14 +3618,658 @@
             <p:ph type="body" sz="quarter" idx="11"/>
           </p:nvPr>
         </p:nvSpPr>
-        <p:spPr/>
+        <p:spPr>
+          <a:xfrm>
+            <a:off x="456271" y="101600"/>
+            <a:ext cx="8231459" cy="990600"/>
+          </a:xfrm>
+        </p:spPr>
         <p:txBody>
           <a:bodyPr/>
           <a:lstStyle/>
           <a:p>
             <a:r>
               <a:rPr lang="en-US" dirty="0"/>
-              <a:t>Placebo or Standard of Care? </a:t>
+              <a:t>Randomized Control Trial</a:t>
+            </a:r>
+          </a:p>
+        </p:txBody>
+      </p:sp>
+      <p:sp>
+        <p:nvSpPr>
+          <p:cNvPr id="4" name="Rounded Rectangle 3">
+            <a:extLst>
+              <a:ext uri="{FF2B5EF4-FFF2-40B4-BE49-F238E27FC236}">
+                <a16:creationId xmlns:a16="http://schemas.microsoft.com/office/drawing/2014/main" id="{82501C78-46FC-CC95-82C5-D976CA756CD1}"/>
+              </a:ext>
+            </a:extLst>
+          </p:cNvPr>
+          <p:cNvSpPr/>
+          <p:nvPr/>
+        </p:nvSpPr>
+        <p:spPr>
+          <a:xfrm>
+            <a:off x="3204308" y="695569"/>
+            <a:ext cx="2000738" cy="609600"/>
+          </a:xfrm>
+          <a:prstGeom prst="roundRect">
+            <a:avLst/>
+          </a:prstGeom>
+          <a:solidFill>
+            <a:srgbClr val="990000"/>
+          </a:solidFill>
+        </p:spPr>
+        <p:style>
+          <a:lnRef idx="2">
+            <a:schemeClr val="accent1">
+              <a:shade val="50000"/>
+            </a:schemeClr>
+          </a:lnRef>
+          <a:fillRef idx="1">
+            <a:schemeClr val="accent1"/>
+          </a:fillRef>
+          <a:effectRef idx="0">
+            <a:schemeClr val="accent1"/>
+          </a:effectRef>
+          <a:fontRef idx="minor">
+            <a:schemeClr val="lt1"/>
+          </a:fontRef>
+        </p:style>
+        <p:txBody>
+          <a:bodyPr rtlCol="0" anchor="ctr"/>
+          <a:lstStyle/>
+          <a:p>
+            <a:pPr algn="ctr"/>
+            <a:r>
+              <a:rPr lang="en-US" dirty="0"/>
+              <a:t>Patients assessed for eligibility</a:t>
+            </a:r>
+          </a:p>
+        </p:txBody>
+      </p:sp>
+      <p:sp>
+        <p:nvSpPr>
+          <p:cNvPr id="5" name="Rounded Rectangle 4">
+            <a:extLst>
+              <a:ext uri="{FF2B5EF4-FFF2-40B4-BE49-F238E27FC236}">
+                <a16:creationId xmlns:a16="http://schemas.microsoft.com/office/drawing/2014/main" id="{661CCA8F-D531-7BBF-64FE-2B290669854D}"/>
+              </a:ext>
+            </a:extLst>
+          </p:cNvPr>
+          <p:cNvSpPr/>
+          <p:nvPr/>
+        </p:nvSpPr>
+        <p:spPr>
+          <a:xfrm>
+            <a:off x="3204308" y="1591013"/>
+            <a:ext cx="2000738" cy="609600"/>
+          </a:xfrm>
+          <a:prstGeom prst="roundRect">
+            <a:avLst/>
+          </a:prstGeom>
+          <a:solidFill>
+            <a:srgbClr val="990000"/>
+          </a:solidFill>
+        </p:spPr>
+        <p:style>
+          <a:lnRef idx="2">
+            <a:schemeClr val="accent1">
+              <a:shade val="50000"/>
+            </a:schemeClr>
+          </a:lnRef>
+          <a:fillRef idx="1">
+            <a:schemeClr val="accent1"/>
+          </a:fillRef>
+          <a:effectRef idx="0">
+            <a:schemeClr val="accent1"/>
+          </a:effectRef>
+          <a:fontRef idx="minor">
+            <a:schemeClr val="lt1"/>
+          </a:fontRef>
+        </p:style>
+        <p:txBody>
+          <a:bodyPr rtlCol="0" anchor="ctr"/>
+          <a:lstStyle/>
+          <a:p>
+            <a:pPr algn="ctr"/>
+            <a:r>
+              <a:rPr lang="en-US" dirty="0"/>
+              <a:t>Eligible patients are enrolled</a:t>
+            </a:r>
+          </a:p>
+        </p:txBody>
+      </p:sp>
+      <p:sp>
+        <p:nvSpPr>
+          <p:cNvPr id="7" name="Rounded Rectangle 6">
+            <a:extLst>
+              <a:ext uri="{FF2B5EF4-FFF2-40B4-BE49-F238E27FC236}">
+                <a16:creationId xmlns:a16="http://schemas.microsoft.com/office/drawing/2014/main" id="{019FA927-7C80-1516-9E09-B71A7F373765}"/>
+              </a:ext>
+            </a:extLst>
+          </p:cNvPr>
+          <p:cNvSpPr/>
+          <p:nvPr/>
+        </p:nvSpPr>
+        <p:spPr>
+          <a:xfrm>
+            <a:off x="4806460" y="2485291"/>
+            <a:ext cx="2532185" cy="794820"/>
+          </a:xfrm>
+          <a:prstGeom prst="roundRect">
+            <a:avLst/>
+          </a:prstGeom>
+          <a:solidFill>
+            <a:srgbClr val="0070C0"/>
+          </a:solidFill>
+        </p:spPr>
+        <p:style>
+          <a:lnRef idx="2">
+            <a:schemeClr val="accent1">
+              <a:shade val="50000"/>
+            </a:schemeClr>
+          </a:lnRef>
+          <a:fillRef idx="1">
+            <a:schemeClr val="accent1"/>
+          </a:fillRef>
+          <a:effectRef idx="0">
+            <a:schemeClr val="accent1"/>
+          </a:effectRef>
+          <a:fontRef idx="minor">
+            <a:schemeClr val="lt1"/>
+          </a:fontRef>
+        </p:style>
+        <p:txBody>
+          <a:bodyPr rtlCol="0" anchor="ctr"/>
+          <a:lstStyle/>
+          <a:p>
+            <a:pPr algn="ctr"/>
+            <a:r>
+              <a:rPr lang="en-US" dirty="0"/>
+              <a:t>Control Arm</a:t>
+            </a:r>
+          </a:p>
+          <a:p>
+            <a:pPr algn="ctr"/>
+            <a:r>
+              <a:rPr lang="en-US" dirty="0"/>
+              <a:t> (standard of care or placebo)</a:t>
+            </a:r>
+          </a:p>
+        </p:txBody>
+      </p:sp>
+      <p:sp>
+        <p:nvSpPr>
+          <p:cNvPr id="8" name="TextBox 7">
+            <a:extLst>
+              <a:ext uri="{FF2B5EF4-FFF2-40B4-BE49-F238E27FC236}">
+                <a16:creationId xmlns:a16="http://schemas.microsoft.com/office/drawing/2014/main" id="{8B80EACC-3B91-FDCD-FF5E-2B36E883E2E2}"/>
+              </a:ext>
+            </a:extLst>
+          </p:cNvPr>
+          <p:cNvSpPr txBox="1"/>
+          <p:nvPr/>
+        </p:nvSpPr>
+        <p:spPr>
+          <a:xfrm>
+            <a:off x="3477846" y="2485291"/>
+            <a:ext cx="1453662" cy="646331"/>
+          </a:xfrm>
+          <a:prstGeom prst="rect">
+            <a:avLst/>
+          </a:prstGeom>
+          <a:noFill/>
+        </p:spPr>
+        <p:txBody>
+          <a:bodyPr wrap="square" rtlCol="0">
+            <a:spAutoFit/>
+          </a:bodyPr>
+          <a:lstStyle/>
+          <a:p>
+            <a:r>
+              <a:rPr lang="en-US" dirty="0">
+                <a:solidFill>
+                  <a:srgbClr val="0070C0"/>
+                </a:solidFill>
+              </a:rPr>
+              <a:t>Patients are randomized </a:t>
+            </a:r>
+          </a:p>
+        </p:txBody>
+      </p:sp>
+      <p:sp>
+        <p:nvSpPr>
+          <p:cNvPr id="9" name="Rounded Rectangle 8">
+            <a:extLst>
+              <a:ext uri="{FF2B5EF4-FFF2-40B4-BE49-F238E27FC236}">
+                <a16:creationId xmlns:a16="http://schemas.microsoft.com/office/drawing/2014/main" id="{A0F552C8-F06E-3BC6-7D3C-4A1A88AD7C23}"/>
+              </a:ext>
+            </a:extLst>
+          </p:cNvPr>
+          <p:cNvSpPr/>
+          <p:nvPr/>
+        </p:nvSpPr>
+        <p:spPr>
+          <a:xfrm>
+            <a:off x="945661" y="2486956"/>
+            <a:ext cx="2532185" cy="794820"/>
+          </a:xfrm>
+          <a:prstGeom prst="roundRect">
+            <a:avLst/>
+          </a:prstGeom>
+          <a:solidFill>
+            <a:srgbClr val="0070C0"/>
+          </a:solidFill>
+        </p:spPr>
+        <p:style>
+          <a:lnRef idx="2">
+            <a:schemeClr val="accent1">
+              <a:shade val="50000"/>
+            </a:schemeClr>
+          </a:lnRef>
+          <a:fillRef idx="1">
+            <a:schemeClr val="accent1"/>
+          </a:fillRef>
+          <a:effectRef idx="0">
+            <a:schemeClr val="accent1"/>
+          </a:effectRef>
+          <a:fontRef idx="minor">
+            <a:schemeClr val="lt1"/>
+          </a:fontRef>
+        </p:style>
+        <p:txBody>
+          <a:bodyPr rtlCol="0" anchor="ctr"/>
+          <a:lstStyle/>
+          <a:p>
+            <a:pPr algn="ctr"/>
+            <a:r>
+              <a:rPr lang="en-US" dirty="0"/>
+              <a:t>Treatment/</a:t>
+            </a:r>
+          </a:p>
+          <a:p>
+            <a:pPr algn="ctr"/>
+            <a:r>
+              <a:rPr lang="en-US" dirty="0"/>
+              <a:t>Experimental Arm</a:t>
+            </a:r>
+          </a:p>
+        </p:txBody>
+      </p:sp>
+      <p:sp>
+        <p:nvSpPr>
+          <p:cNvPr id="10" name="Rounded Rectangle 9">
+            <a:extLst>
+              <a:ext uri="{FF2B5EF4-FFF2-40B4-BE49-F238E27FC236}">
+                <a16:creationId xmlns:a16="http://schemas.microsoft.com/office/drawing/2014/main" id="{554396D2-20EF-2F28-2883-83CDBE5CB817}"/>
+              </a:ext>
+            </a:extLst>
+          </p:cNvPr>
+          <p:cNvSpPr/>
+          <p:nvPr/>
+        </p:nvSpPr>
+        <p:spPr>
+          <a:xfrm>
+            <a:off x="914400" y="3721100"/>
+            <a:ext cx="2563446" cy="726831"/>
+          </a:xfrm>
+          <a:prstGeom prst="roundRect">
+            <a:avLst/>
+          </a:prstGeom>
+          <a:solidFill>
+            <a:srgbClr val="990000"/>
+          </a:solidFill>
+        </p:spPr>
+        <p:style>
+          <a:lnRef idx="2">
+            <a:schemeClr val="accent1">
+              <a:shade val="50000"/>
+            </a:schemeClr>
+          </a:lnRef>
+          <a:fillRef idx="1">
+            <a:schemeClr val="accent1"/>
+          </a:fillRef>
+          <a:effectRef idx="0">
+            <a:schemeClr val="accent1"/>
+          </a:effectRef>
+          <a:fontRef idx="minor">
+            <a:schemeClr val="lt1"/>
+          </a:fontRef>
+        </p:style>
+        <p:txBody>
+          <a:bodyPr rtlCol="0" anchor="ctr"/>
+          <a:lstStyle/>
+          <a:p>
+            <a:pPr algn="ctr"/>
+            <a:r>
+              <a:rPr lang="en-US" dirty="0"/>
+              <a:t>Outcomes Assessed</a:t>
+            </a:r>
+          </a:p>
+        </p:txBody>
+      </p:sp>
+      <p:sp>
+        <p:nvSpPr>
+          <p:cNvPr id="11" name="Rounded Rectangle 10">
+            <a:extLst>
+              <a:ext uri="{FF2B5EF4-FFF2-40B4-BE49-F238E27FC236}">
+                <a16:creationId xmlns:a16="http://schemas.microsoft.com/office/drawing/2014/main" id="{806D1D5E-EB75-8A75-3583-3A69911CCAA8}"/>
+              </a:ext>
+            </a:extLst>
+          </p:cNvPr>
+          <p:cNvSpPr/>
+          <p:nvPr/>
+        </p:nvSpPr>
+        <p:spPr>
+          <a:xfrm>
+            <a:off x="4806460" y="3721099"/>
+            <a:ext cx="2563446" cy="726831"/>
+          </a:xfrm>
+          <a:prstGeom prst="roundRect">
+            <a:avLst/>
+          </a:prstGeom>
+          <a:solidFill>
+            <a:srgbClr val="990000"/>
+          </a:solidFill>
+        </p:spPr>
+        <p:style>
+          <a:lnRef idx="2">
+            <a:schemeClr val="accent1">
+              <a:shade val="50000"/>
+            </a:schemeClr>
+          </a:lnRef>
+          <a:fillRef idx="1">
+            <a:schemeClr val="accent1"/>
+          </a:fillRef>
+          <a:effectRef idx="0">
+            <a:schemeClr val="accent1"/>
+          </a:effectRef>
+          <a:fontRef idx="minor">
+            <a:schemeClr val="lt1"/>
+          </a:fontRef>
+        </p:style>
+        <p:txBody>
+          <a:bodyPr rtlCol="0" anchor="ctr"/>
+          <a:lstStyle/>
+          <a:p>
+            <a:pPr algn="ctr"/>
+            <a:r>
+              <a:rPr lang="en-US" dirty="0"/>
+              <a:t>Outcomes Assessed</a:t>
+            </a:r>
+          </a:p>
+        </p:txBody>
+      </p:sp>
+      <p:cxnSp>
+        <p:nvCxnSpPr>
+          <p:cNvPr id="14" name="Straight Arrow Connector 13">
+            <a:extLst>
+              <a:ext uri="{FF2B5EF4-FFF2-40B4-BE49-F238E27FC236}">
+                <a16:creationId xmlns:a16="http://schemas.microsoft.com/office/drawing/2014/main" id="{E04B3863-A808-17D5-3DF2-1181C7B8E2B9}"/>
+              </a:ext>
+            </a:extLst>
+          </p:cNvPr>
+          <p:cNvCxnSpPr/>
+          <p:nvPr/>
+        </p:nvCxnSpPr>
+        <p:spPr>
+          <a:xfrm>
+            <a:off x="4204677" y="1359877"/>
+            <a:ext cx="0" cy="156308"/>
+          </a:xfrm>
+          <a:prstGeom prst="straightConnector1">
+            <a:avLst/>
+          </a:prstGeom>
+          <a:ln>
+            <a:tailEnd type="triangle"/>
+          </a:ln>
+        </p:spPr>
+        <p:style>
+          <a:lnRef idx="1">
+            <a:schemeClr val="accent1"/>
+          </a:lnRef>
+          <a:fillRef idx="0">
+            <a:schemeClr val="accent1"/>
+          </a:fillRef>
+          <a:effectRef idx="0">
+            <a:schemeClr val="accent1"/>
+          </a:effectRef>
+          <a:fontRef idx="minor">
+            <a:schemeClr val="tx1"/>
+          </a:fontRef>
+        </p:style>
+      </p:cxnSp>
+      <p:cxnSp>
+        <p:nvCxnSpPr>
+          <p:cNvPr id="15" name="Straight Arrow Connector 14">
+            <a:extLst>
+              <a:ext uri="{FF2B5EF4-FFF2-40B4-BE49-F238E27FC236}">
+                <a16:creationId xmlns:a16="http://schemas.microsoft.com/office/drawing/2014/main" id="{B184397A-8540-F708-F0D5-771751F6CE07}"/>
+              </a:ext>
+            </a:extLst>
+          </p:cNvPr>
+          <p:cNvCxnSpPr>
+            <a:cxnSpLocks/>
+          </p:cNvCxnSpPr>
+          <p:nvPr/>
+        </p:nvCxnSpPr>
+        <p:spPr>
+          <a:xfrm flipH="1">
+            <a:off x="3806092" y="2309443"/>
+            <a:ext cx="277448" cy="175848"/>
+          </a:xfrm>
+          <a:prstGeom prst="straightConnector1">
+            <a:avLst/>
+          </a:prstGeom>
+          <a:ln>
+            <a:tailEnd type="triangle"/>
+          </a:ln>
+        </p:spPr>
+        <p:style>
+          <a:lnRef idx="1">
+            <a:schemeClr val="accent1"/>
+          </a:lnRef>
+          <a:fillRef idx="0">
+            <a:schemeClr val="accent1"/>
+          </a:fillRef>
+          <a:effectRef idx="0">
+            <a:schemeClr val="accent1"/>
+          </a:effectRef>
+          <a:fontRef idx="minor">
+            <a:schemeClr val="tx1"/>
+          </a:fontRef>
+        </p:style>
+      </p:cxnSp>
+      <p:cxnSp>
+        <p:nvCxnSpPr>
+          <p:cNvPr id="16" name="Straight Arrow Connector 15">
+            <a:extLst>
+              <a:ext uri="{FF2B5EF4-FFF2-40B4-BE49-F238E27FC236}">
+                <a16:creationId xmlns:a16="http://schemas.microsoft.com/office/drawing/2014/main" id="{54F7D2BF-E6DE-F9DD-C6EA-6C0600BA43D0}"/>
+              </a:ext>
+            </a:extLst>
+          </p:cNvPr>
+          <p:cNvCxnSpPr>
+            <a:cxnSpLocks/>
+          </p:cNvCxnSpPr>
+          <p:nvPr/>
+        </p:nvCxnSpPr>
+        <p:spPr>
+          <a:xfrm>
+            <a:off x="4204677" y="2309443"/>
+            <a:ext cx="367323" cy="175848"/>
+          </a:xfrm>
+          <a:prstGeom prst="straightConnector1">
+            <a:avLst/>
+          </a:prstGeom>
+          <a:ln>
+            <a:tailEnd type="triangle"/>
+          </a:ln>
+        </p:spPr>
+        <p:style>
+          <a:lnRef idx="1">
+            <a:schemeClr val="accent1"/>
+          </a:lnRef>
+          <a:fillRef idx="0">
+            <a:schemeClr val="accent1"/>
+          </a:fillRef>
+          <a:effectRef idx="0">
+            <a:schemeClr val="accent1"/>
+          </a:effectRef>
+          <a:fontRef idx="minor">
+            <a:schemeClr val="tx1"/>
+          </a:fontRef>
+        </p:style>
+      </p:cxnSp>
+      <p:cxnSp>
+        <p:nvCxnSpPr>
+          <p:cNvPr id="19" name="Straight Arrow Connector 18">
+            <a:extLst>
+              <a:ext uri="{FF2B5EF4-FFF2-40B4-BE49-F238E27FC236}">
+                <a16:creationId xmlns:a16="http://schemas.microsoft.com/office/drawing/2014/main" id="{6D005D83-172C-9D13-8389-A3ECAE7759B3}"/>
+              </a:ext>
+            </a:extLst>
+          </p:cNvPr>
+          <p:cNvCxnSpPr>
+            <a:cxnSpLocks/>
+          </p:cNvCxnSpPr>
+          <p:nvPr/>
+        </p:nvCxnSpPr>
+        <p:spPr>
+          <a:xfrm>
+            <a:off x="2086709" y="3392271"/>
+            <a:ext cx="0" cy="234067"/>
+          </a:xfrm>
+          <a:prstGeom prst="straightConnector1">
+            <a:avLst/>
+          </a:prstGeom>
+          <a:ln>
+            <a:tailEnd type="triangle"/>
+          </a:ln>
+        </p:spPr>
+        <p:style>
+          <a:lnRef idx="1">
+            <a:schemeClr val="accent1"/>
+          </a:lnRef>
+          <a:fillRef idx="0">
+            <a:schemeClr val="accent1"/>
+          </a:fillRef>
+          <a:effectRef idx="0">
+            <a:schemeClr val="accent1"/>
+          </a:effectRef>
+          <a:fontRef idx="minor">
+            <a:schemeClr val="tx1"/>
+          </a:fontRef>
+        </p:style>
+      </p:cxnSp>
+      <p:cxnSp>
+        <p:nvCxnSpPr>
+          <p:cNvPr id="21" name="Straight Arrow Connector 20">
+            <a:extLst>
+              <a:ext uri="{FF2B5EF4-FFF2-40B4-BE49-F238E27FC236}">
+                <a16:creationId xmlns:a16="http://schemas.microsoft.com/office/drawing/2014/main" id="{0D1CBE2F-AD8F-E861-1136-3C82B578F794}"/>
+              </a:ext>
+            </a:extLst>
+          </p:cNvPr>
+          <p:cNvCxnSpPr>
+            <a:cxnSpLocks/>
+          </p:cNvCxnSpPr>
+          <p:nvPr/>
+        </p:nvCxnSpPr>
+        <p:spPr>
+          <a:xfrm>
+            <a:off x="6072552" y="3392271"/>
+            <a:ext cx="0" cy="234067"/>
+          </a:xfrm>
+          <a:prstGeom prst="straightConnector1">
+            <a:avLst/>
+          </a:prstGeom>
+          <a:ln>
+            <a:tailEnd type="triangle"/>
+          </a:ln>
+        </p:spPr>
+        <p:style>
+          <a:lnRef idx="1">
+            <a:schemeClr val="accent1"/>
+          </a:lnRef>
+          <a:fillRef idx="0">
+            <a:schemeClr val="accent1"/>
+          </a:fillRef>
+          <a:effectRef idx="0">
+            <a:schemeClr val="accent1"/>
+          </a:effectRef>
+          <a:fontRef idx="minor">
+            <a:schemeClr val="tx1"/>
+          </a:fontRef>
+        </p:style>
+      </p:cxnSp>
+      <p:sp>
+        <p:nvSpPr>
+          <p:cNvPr id="2" name="TextBox 1">
+            <a:extLst>
+              <a:ext uri="{FF2B5EF4-FFF2-40B4-BE49-F238E27FC236}">
+                <a16:creationId xmlns:a16="http://schemas.microsoft.com/office/drawing/2014/main" id="{9FBCAC4F-0B02-B076-E297-2F6DB82F47FE}"/>
+              </a:ext>
+            </a:extLst>
+          </p:cNvPr>
+          <p:cNvSpPr txBox="1"/>
+          <p:nvPr/>
+        </p:nvSpPr>
+        <p:spPr>
+          <a:xfrm>
+            <a:off x="5381469" y="194872"/>
+            <a:ext cx="3425252" cy="2031325"/>
+          </a:xfrm>
+          <a:prstGeom prst="rect">
+            <a:avLst/>
+          </a:prstGeom>
+          <a:noFill/>
+        </p:spPr>
+        <p:txBody>
+          <a:bodyPr wrap="square" rtlCol="0">
+            <a:spAutoFit/>
+          </a:bodyPr>
+          <a:lstStyle/>
+          <a:p>
+            <a:pPr marL="285750" indent="-285750">
+              <a:buFont typeface="Arial" panose="020B0604020202020204" pitchFamily="34" charset="0"/>
+              <a:buChar char="•"/>
+            </a:pPr>
+            <a:r>
+              <a:rPr lang="en-US" dirty="0">
+                <a:solidFill>
+                  <a:srgbClr val="0070C0"/>
+                </a:solidFill>
+              </a:rPr>
+              <a:t>Randomization is used to ensure (theoretically) that potential prognostic factors are balanced between the intervention groups</a:t>
+            </a:r>
+          </a:p>
+          <a:p>
+            <a:pPr marL="285750" indent="-285750">
+              <a:buFont typeface="Arial" panose="020B0604020202020204" pitchFamily="34" charset="0"/>
+              <a:buChar char="•"/>
+            </a:pPr>
+            <a:r>
+              <a:rPr lang="en-US" dirty="0">
+                <a:solidFill>
+                  <a:srgbClr val="0070C0"/>
+                </a:solidFill>
+              </a:rPr>
+              <a:t>Makes comparisons feasible</a:t>
+            </a:r>
+          </a:p>
+          <a:p>
+            <a:pPr marL="285750" indent="-285750">
+              <a:buFont typeface="Arial" panose="020B0604020202020204" pitchFamily="34" charset="0"/>
+              <a:buChar char="•"/>
+            </a:pPr>
+            <a:r>
+              <a:rPr lang="en-US" dirty="0">
+                <a:solidFill>
+                  <a:srgbClr val="0070C0"/>
+                </a:solidFill>
+              </a:rPr>
+              <a:t>“1:1 randomization”</a:t>
             </a:r>
           </a:p>
         </p:txBody>
@@ -4140,7 +4277,7 @@
     </p:spTree>
     <p:extLst>
       <p:ext uri="{BB962C8B-B14F-4D97-AF65-F5344CB8AC3E}">
-        <p14:creationId xmlns:p14="http://schemas.microsoft.com/office/powerpoint/2010/main" val="2484478337"/>
+        <p14:creationId xmlns:p14="http://schemas.microsoft.com/office/powerpoint/2010/main" val="352574928"/>
       </p:ext>
     </p:extLst>
   </p:cSld>
@@ -4172,7 +4309,7 @@
           <p:cNvPr id="2" name="Text Placeholder 1">
             <a:extLst>
               <a:ext uri="{FF2B5EF4-FFF2-40B4-BE49-F238E27FC236}">
-                <a16:creationId xmlns:a16="http://schemas.microsoft.com/office/drawing/2014/main" id="{E75D781C-C396-B921-55A1-494C4BDA22E6}"/>
+                <a16:creationId xmlns:a16="http://schemas.microsoft.com/office/drawing/2014/main" id="{991E726D-F71E-D2E9-9782-D5198EA1FF43}"/>
               </a:ext>
             </a:extLst>
           </p:cNvPr>
@@ -4185,39 +4322,35 @@
         </p:nvSpPr>
         <p:spPr>
           <a:xfrm>
-            <a:off x="456271" y="831954"/>
-            <a:ext cx="8231459" cy="3714646"/>
-          </a:xfrm>
-        </p:spPr>
-        <p:txBody>
-          <a:bodyPr>
-            <a:normAutofit/>
-          </a:bodyPr>
-          <a:lstStyle/>
-          <a:p>
-            <a:pPr marL="285750" indent="-285750">
-              <a:buFont typeface="Arial" panose="020B0604020202020204" pitchFamily="34" charset="0"/>
-              <a:buChar char="•"/>
-            </a:pPr>
-            <a:r>
-              <a:rPr lang="en-US" dirty="0"/>
-              <a:t>Randomization will (theoretically) balance characteristics of patients between intervention groups</a:t>
-            </a:r>
-          </a:p>
-          <a:p>
-            <a:pPr marL="800100" lvl="1" indent="-285750"/>
-            <a:r>
-              <a:rPr lang="en-US" dirty="0">
-                <a:solidFill>
-                  <a:schemeClr val="tx1"/>
-                </a:solidFill>
-              </a:rPr>
-              <a:t>If patients in the intervention groups are similar, can conduct a fair comparison between the intervention groups</a:t>
-            </a:r>
+            <a:off x="456271" y="809469"/>
+            <a:ext cx="8231459" cy="3737131"/>
+          </a:xfrm>
+        </p:spPr>
+        <p:txBody>
+          <a:bodyPr/>
+          <a:lstStyle/>
+          <a:p>
+            <a:r>
+              <a:rPr lang="en-US" dirty="0"/>
+              <a:t>“Participants in the trial were randomly assigned in a 1:1 ratio to receive 30 </a:t>
+            </a:r>
+            <a:r>
+              <a:rPr lang="el-GR" dirty="0"/>
+              <a:t>μ</a:t>
+            </a:r>
+            <a:r>
+              <a:rPr lang="en-US" dirty="0"/>
+              <a:t>g of BNT162b2 (0.3 ml volume per dose) or saline placebo”</a:t>
+            </a:r>
+          </a:p>
+          <a:p>
             <a:endParaRPr lang="en-US" dirty="0"/>
           </a:p>
           <a:p>
-            <a:endParaRPr lang="en-US" dirty="0"/>
+            <a:r>
+              <a:rPr lang="en-US" dirty="0"/>
+              <a:t>Why was placebo used for the control arm? </a:t>
+            </a:r>
           </a:p>
         </p:txBody>
       </p:sp>
@@ -4226,7 +4359,7 @@
           <p:cNvPr id="3" name="Text Placeholder 2">
             <a:extLst>
               <a:ext uri="{FF2B5EF4-FFF2-40B4-BE49-F238E27FC236}">
-                <a16:creationId xmlns:a16="http://schemas.microsoft.com/office/drawing/2014/main" id="{278F58D0-37B1-AA7E-DA0F-665AB346A437}"/>
+                <a16:creationId xmlns:a16="http://schemas.microsoft.com/office/drawing/2014/main" id="{824D7C6A-E511-21C8-7209-1108A3B3B919}"/>
               </a:ext>
             </a:extLst>
           </p:cNvPr>
@@ -4237,19 +4370,14 @@
             <p:ph type="body" sz="quarter" idx="11"/>
           </p:nvPr>
         </p:nvSpPr>
-        <p:spPr>
-          <a:xfrm>
-            <a:off x="456271" y="259556"/>
-            <a:ext cx="8231459" cy="572398"/>
-          </a:xfrm>
-        </p:spPr>
+        <p:spPr/>
         <p:txBody>
           <a:bodyPr/>
           <a:lstStyle/>
           <a:p>
             <a:r>
               <a:rPr lang="en-US" dirty="0"/>
-              <a:t>Randomization</a:t>
+              <a:t>Placebo or Standard of Care? </a:t>
             </a:r>
           </a:p>
         </p:txBody>
@@ -4257,7 +4385,7 @@
     </p:spTree>
     <p:extLst>
       <p:ext uri="{BB962C8B-B14F-4D97-AF65-F5344CB8AC3E}">
-        <p14:creationId xmlns:p14="http://schemas.microsoft.com/office/powerpoint/2010/main" val="3718023576"/>
+        <p14:creationId xmlns:p14="http://schemas.microsoft.com/office/powerpoint/2010/main" val="2484478337"/>
       </p:ext>
     </p:extLst>
   </p:cSld>
@@ -4286,10 +4414,64 @@
       </p:grpSpPr>
       <p:sp>
         <p:nvSpPr>
+          <p:cNvPr id="2" name="Text Placeholder 1">
+            <a:extLst>
+              <a:ext uri="{FF2B5EF4-FFF2-40B4-BE49-F238E27FC236}">
+                <a16:creationId xmlns:a16="http://schemas.microsoft.com/office/drawing/2014/main" id="{E75D781C-C396-B921-55A1-494C4BDA22E6}"/>
+              </a:ext>
+            </a:extLst>
+          </p:cNvPr>
+          <p:cNvSpPr>
+            <a:spLocks noGrp="1"/>
+          </p:cNvSpPr>
+          <p:nvPr>
+            <p:ph type="body" sz="quarter" idx="10"/>
+          </p:nvPr>
+        </p:nvSpPr>
+        <p:spPr>
+          <a:xfrm>
+            <a:off x="456271" y="831954"/>
+            <a:ext cx="8231459" cy="3714646"/>
+          </a:xfrm>
+        </p:spPr>
+        <p:txBody>
+          <a:bodyPr>
+            <a:normAutofit/>
+          </a:bodyPr>
+          <a:lstStyle/>
+          <a:p>
+            <a:pPr marL="285750" indent="-285750">
+              <a:buFont typeface="Arial" panose="020B0604020202020204" pitchFamily="34" charset="0"/>
+              <a:buChar char="•"/>
+            </a:pPr>
+            <a:r>
+              <a:rPr lang="en-US" dirty="0"/>
+              <a:t>Randomization will (theoretically) balance characteristics of patients between intervention groups</a:t>
+            </a:r>
+          </a:p>
+          <a:p>
+            <a:pPr marL="800100" lvl="1" indent="-285750"/>
+            <a:r>
+              <a:rPr lang="en-US" dirty="0">
+                <a:solidFill>
+                  <a:schemeClr val="tx1"/>
+                </a:solidFill>
+              </a:rPr>
+              <a:t>If patients in the intervention groups are similar, can conduct a fair comparison between the intervention groups</a:t>
+            </a:r>
+            <a:endParaRPr lang="en-US" dirty="0"/>
+          </a:p>
+          <a:p>
+            <a:endParaRPr lang="en-US" dirty="0"/>
+          </a:p>
+        </p:txBody>
+      </p:sp>
+      <p:sp>
+        <p:nvSpPr>
           <p:cNvPr id="3" name="Text Placeholder 2">
             <a:extLst>
               <a:ext uri="{FF2B5EF4-FFF2-40B4-BE49-F238E27FC236}">
-                <a16:creationId xmlns:a16="http://schemas.microsoft.com/office/drawing/2014/main" id="{5F035926-BB3A-A1A7-7DC0-DC2B60CC2479}"/>
+                <a16:creationId xmlns:a16="http://schemas.microsoft.com/office/drawing/2014/main" id="{278F58D0-37B1-AA7E-DA0F-665AB346A437}"/>
               </a:ext>
             </a:extLst>
           </p:cNvPr>
@@ -4300,83 +4482,19 @@
             <p:ph type="body" sz="quarter" idx="11"/>
           </p:nvPr>
         </p:nvSpPr>
-        <p:spPr/>
+        <p:spPr>
+          <a:xfrm>
+            <a:off x="456271" y="259556"/>
+            <a:ext cx="8231459" cy="572398"/>
+          </a:xfrm>
+        </p:spPr>
         <p:txBody>
           <a:bodyPr/>
           <a:lstStyle/>
           <a:p>
             <a:r>
               <a:rPr lang="en-US" dirty="0"/>
-              <a:t>Safety and Efficacy of the BNT162b2 mRNA Covid-19 Vaccine</a:t>
-            </a:r>
-          </a:p>
-          <a:p>
-            <a:endParaRPr lang="en-US" dirty="0"/>
-          </a:p>
-        </p:txBody>
-      </p:sp>
-      <p:pic>
-        <p:nvPicPr>
-          <p:cNvPr id="5" name="Picture 4" descr="Table&#10;&#10;Description automatically generated">
-            <a:extLst>
-              <a:ext uri="{FF2B5EF4-FFF2-40B4-BE49-F238E27FC236}">
-                <a16:creationId xmlns:a16="http://schemas.microsoft.com/office/drawing/2014/main" id="{1AC2DA3C-BFCF-A954-AB20-8F4E2D9D6BA1}"/>
-              </a:ext>
-            </a:extLst>
-          </p:cNvPr>
-          <p:cNvPicPr>
-            <a:picLocks noChangeAspect="1"/>
-          </p:cNvPicPr>
-          <p:nvPr/>
-        </p:nvPicPr>
-        <p:blipFill>
-          <a:blip r:embed="rId2"/>
-          <a:stretch>
-            <a:fillRect/>
-          </a:stretch>
-        </p:blipFill>
-        <p:spPr>
-          <a:xfrm>
-            <a:off x="771993" y="880543"/>
-            <a:ext cx="7375161" cy="3818560"/>
-          </a:xfrm>
-          <a:prstGeom prst="rect">
-            <a:avLst/>
-          </a:prstGeom>
-        </p:spPr>
-      </p:pic>
-      <p:sp>
-        <p:nvSpPr>
-          <p:cNvPr id="6" name="TextBox 5">
-            <a:extLst>
-              <a:ext uri="{FF2B5EF4-FFF2-40B4-BE49-F238E27FC236}">
-                <a16:creationId xmlns:a16="http://schemas.microsoft.com/office/drawing/2014/main" id="{1866BE90-3CDA-4AF7-A739-D9F1DF2EFDFB}"/>
-              </a:ext>
-            </a:extLst>
-          </p:cNvPr>
-          <p:cNvSpPr txBox="1"/>
-          <p:nvPr/>
-        </p:nvSpPr>
-        <p:spPr>
-          <a:xfrm>
-            <a:off x="6041035" y="4866501"/>
-            <a:ext cx="3043004" cy="276999"/>
-          </a:xfrm>
-          <a:prstGeom prst="rect">
-            <a:avLst/>
-          </a:prstGeom>
-          <a:noFill/>
-        </p:spPr>
-        <p:txBody>
-          <a:bodyPr wrap="square" rtlCol="0">
-            <a:spAutoFit/>
-          </a:bodyPr>
-          <a:lstStyle/>
-          <a:p>
-            <a:pPr algn="r"/>
-            <a:r>
-              <a:rPr lang="en-US" sz="1200" dirty="0"/>
-              <a:t>(table from Polack et al., 2020)</a:t>
+              <a:t>Randomization</a:t>
             </a:r>
           </a:p>
         </p:txBody>
@@ -4384,7 +4502,7 @@
     </p:spTree>
     <p:extLst>
       <p:ext uri="{BB962C8B-B14F-4D97-AF65-F5344CB8AC3E}">
-        <p14:creationId xmlns:p14="http://schemas.microsoft.com/office/powerpoint/2010/main" val="1034661191"/>
+        <p14:creationId xmlns:p14="http://schemas.microsoft.com/office/powerpoint/2010/main" val="3718023576"/>
       </p:ext>
     </p:extLst>
   </p:cSld>
@@ -4442,6 +4560,133 @@
           </a:p>
         </p:txBody>
       </p:sp>
+      <p:pic>
+        <p:nvPicPr>
+          <p:cNvPr id="5" name="Picture 4" descr="Table&#10;&#10;Description automatically generated">
+            <a:extLst>
+              <a:ext uri="{FF2B5EF4-FFF2-40B4-BE49-F238E27FC236}">
+                <a16:creationId xmlns:a16="http://schemas.microsoft.com/office/drawing/2014/main" id="{1AC2DA3C-BFCF-A954-AB20-8F4E2D9D6BA1}"/>
+              </a:ext>
+            </a:extLst>
+          </p:cNvPr>
+          <p:cNvPicPr>
+            <a:picLocks noChangeAspect="1"/>
+          </p:cNvPicPr>
+          <p:nvPr/>
+        </p:nvPicPr>
+        <p:blipFill>
+          <a:blip r:embed="rId2"/>
+          <a:stretch>
+            <a:fillRect/>
+          </a:stretch>
+        </p:blipFill>
+        <p:spPr>
+          <a:xfrm>
+            <a:off x="771993" y="880543"/>
+            <a:ext cx="7375161" cy="3818560"/>
+          </a:xfrm>
+          <a:prstGeom prst="rect">
+            <a:avLst/>
+          </a:prstGeom>
+        </p:spPr>
+      </p:pic>
+      <p:sp>
+        <p:nvSpPr>
+          <p:cNvPr id="6" name="TextBox 5">
+            <a:extLst>
+              <a:ext uri="{FF2B5EF4-FFF2-40B4-BE49-F238E27FC236}">
+                <a16:creationId xmlns:a16="http://schemas.microsoft.com/office/drawing/2014/main" id="{1866BE90-3CDA-4AF7-A739-D9F1DF2EFDFB}"/>
+              </a:ext>
+            </a:extLst>
+          </p:cNvPr>
+          <p:cNvSpPr txBox="1"/>
+          <p:nvPr/>
+        </p:nvSpPr>
+        <p:spPr>
+          <a:xfrm>
+            <a:off x="6041035" y="4866501"/>
+            <a:ext cx="3043004" cy="276999"/>
+          </a:xfrm>
+          <a:prstGeom prst="rect">
+            <a:avLst/>
+          </a:prstGeom>
+          <a:noFill/>
+        </p:spPr>
+        <p:txBody>
+          <a:bodyPr wrap="square" rtlCol="0">
+            <a:spAutoFit/>
+          </a:bodyPr>
+          <a:lstStyle/>
+          <a:p>
+            <a:pPr algn="r"/>
+            <a:r>
+              <a:rPr lang="en-US" sz="1200" dirty="0"/>
+              <a:t>(table from Polack et al., 2020)</a:t>
+            </a:r>
+          </a:p>
+        </p:txBody>
+      </p:sp>
+    </p:spTree>
+    <p:extLst>
+      <p:ext uri="{BB962C8B-B14F-4D97-AF65-F5344CB8AC3E}">
+        <p14:creationId xmlns:p14="http://schemas.microsoft.com/office/powerpoint/2010/main" val="1034661191"/>
+      </p:ext>
+    </p:extLst>
+  </p:cSld>
+  <p:clrMapOvr>
+    <a:masterClrMapping/>
+  </p:clrMapOvr>
+</p:sld>
+</file>
+
+<file path=ppt/slides/slide15.xml><?xml version="1.0" encoding="utf-8"?>
+<p:sld xmlns:a="http://schemas.openxmlformats.org/drawingml/2006/main" xmlns:r="http://schemas.openxmlformats.org/officeDocument/2006/relationships" xmlns:p="http://schemas.openxmlformats.org/presentationml/2006/main">
+  <p:cSld>
+    <p:spTree>
+      <p:nvGrpSpPr>
+        <p:cNvPr id="1" name=""/>
+        <p:cNvGrpSpPr/>
+        <p:nvPr/>
+      </p:nvGrpSpPr>
+      <p:grpSpPr>
+        <a:xfrm>
+          <a:off x="0" y="0"/>
+          <a:ext cx="0" cy="0"/>
+          <a:chOff x="0" y="0"/>
+          <a:chExt cx="0" cy="0"/>
+        </a:xfrm>
+      </p:grpSpPr>
+      <p:sp>
+        <p:nvSpPr>
+          <p:cNvPr id="3" name="Text Placeholder 2">
+            <a:extLst>
+              <a:ext uri="{FF2B5EF4-FFF2-40B4-BE49-F238E27FC236}">
+                <a16:creationId xmlns:a16="http://schemas.microsoft.com/office/drawing/2014/main" id="{5F035926-BB3A-A1A7-7DC0-DC2B60CC2479}"/>
+              </a:ext>
+            </a:extLst>
+          </p:cNvPr>
+          <p:cNvSpPr>
+            <a:spLocks noGrp="1"/>
+          </p:cNvSpPr>
+          <p:nvPr>
+            <p:ph type="body" sz="quarter" idx="11"/>
+          </p:nvPr>
+        </p:nvSpPr>
+        <p:spPr/>
+        <p:txBody>
+          <a:bodyPr/>
+          <a:lstStyle/>
+          <a:p>
+            <a:r>
+              <a:rPr lang="en-US" dirty="0"/>
+              <a:t>Safety and Efficacy of the BNT162b2 mRNA Covid-19 Vaccine</a:t>
+            </a:r>
+          </a:p>
+          <a:p>
+            <a:endParaRPr lang="en-US" dirty="0"/>
+          </a:p>
+        </p:txBody>
+      </p:sp>
       <p:sp>
         <p:nvSpPr>
           <p:cNvPr id="6" name="TextBox 5">
@@ -4521,7 +4766,7 @@
 </p:sld>
 </file>
 
-<file path=ppt/slides/slide15.xml><?xml version="1.0" encoding="utf-8"?>
+<file path=ppt/slides/slide16.xml><?xml version="1.0" encoding="utf-8"?>
 <p:sld xmlns:a="http://schemas.openxmlformats.org/drawingml/2006/main" xmlns:r="http://schemas.openxmlformats.org/officeDocument/2006/relationships" xmlns:p="http://schemas.openxmlformats.org/presentationml/2006/main">
   <p:cSld>
     <p:spTree>
@@ -8186,7 +8431,7 @@
 </p:sld>
 </file>
 
-<file path=ppt/slides/slide16.xml><?xml version="1.0" encoding="utf-8"?>
+<file path=ppt/slides/slide17.xml><?xml version="1.0" encoding="utf-8"?>
 <p:sld xmlns:a="http://schemas.openxmlformats.org/drawingml/2006/main" xmlns:r="http://schemas.openxmlformats.org/officeDocument/2006/relationships" xmlns:p="http://schemas.openxmlformats.org/presentationml/2006/main">
   <p:cSld>
     <p:spTree>
@@ -8408,7 +8653,7 @@
 </p:sld>
 </file>
 
-<file path=ppt/slides/slide17.xml><?xml version="1.0" encoding="utf-8"?>
+<file path=ppt/slides/slide18.xml><?xml version="1.0" encoding="utf-8"?>
 <p:sld xmlns:a="http://schemas.openxmlformats.org/drawingml/2006/main" xmlns:r="http://schemas.openxmlformats.org/officeDocument/2006/relationships" xmlns:p="http://schemas.openxmlformats.org/presentationml/2006/main">
   <p:cSld>
     <p:spTree>
@@ -9457,147 +9702,6 @@
 </p:sld>
 </file>
 
-<file path=ppt/slides/slide18.xml><?xml version="1.0" encoding="utf-8"?>
-<p:sld xmlns:a="http://schemas.openxmlformats.org/drawingml/2006/main" xmlns:r="http://schemas.openxmlformats.org/officeDocument/2006/relationships" xmlns:p="http://schemas.openxmlformats.org/presentationml/2006/main">
-  <p:cSld>
-    <p:spTree>
-      <p:nvGrpSpPr>
-        <p:cNvPr id="1" name=""/>
-        <p:cNvGrpSpPr/>
-        <p:nvPr/>
-      </p:nvGrpSpPr>
-      <p:grpSpPr>
-        <a:xfrm>
-          <a:off x="0" y="0"/>
-          <a:ext cx="0" cy="0"/>
-          <a:chOff x="0" y="0"/>
-          <a:chExt cx="0" cy="0"/>
-        </a:xfrm>
-      </p:grpSpPr>
-      <p:sp>
-        <p:nvSpPr>
-          <p:cNvPr id="2" name="Text Placeholder 1">
-            <a:extLst>
-              <a:ext uri="{FF2B5EF4-FFF2-40B4-BE49-F238E27FC236}">
-                <a16:creationId xmlns:a16="http://schemas.microsoft.com/office/drawing/2014/main" id="{D1FC1D1E-588F-39C6-1B71-E180D0028B80}"/>
-              </a:ext>
-            </a:extLst>
-          </p:cNvPr>
-          <p:cNvSpPr>
-            <a:spLocks noGrp="1"/>
-          </p:cNvSpPr>
-          <p:nvPr>
-            <p:ph type="body" sz="quarter" idx="10"/>
-          </p:nvPr>
-        </p:nvSpPr>
-        <p:spPr>
-          <a:xfrm>
-            <a:off x="516230" y="1250156"/>
-            <a:ext cx="7878261" cy="3187972"/>
-          </a:xfrm>
-        </p:spPr>
-        <p:txBody>
-          <a:bodyPr>
-            <a:normAutofit/>
-          </a:bodyPr>
-          <a:lstStyle/>
-          <a:p>
-            <a:r>
-              <a:rPr lang="en-US" dirty="0"/>
-              <a:t>“Site staff who were responsible for safety evaluation and were unaware of group assignments observed participants for 30 minutes after vaccination for any acute reactions.”</a:t>
-            </a:r>
-          </a:p>
-          <a:p>
-            <a:endParaRPr lang="en-US" dirty="0"/>
-          </a:p>
-          <a:p>
-            <a:r>
-              <a:rPr lang="en-US" dirty="0"/>
-              <a:t>Why is it important that site staff are blinded? </a:t>
-            </a:r>
-          </a:p>
-        </p:txBody>
-      </p:sp>
-      <p:sp>
-        <p:nvSpPr>
-          <p:cNvPr id="3" name="Text Placeholder 2">
-            <a:extLst>
-              <a:ext uri="{FF2B5EF4-FFF2-40B4-BE49-F238E27FC236}">
-                <a16:creationId xmlns:a16="http://schemas.microsoft.com/office/drawing/2014/main" id="{080FDDE5-3902-34D9-F639-806037A88553}"/>
-              </a:ext>
-            </a:extLst>
-          </p:cNvPr>
-          <p:cNvSpPr>
-            <a:spLocks noGrp="1"/>
-          </p:cNvSpPr>
-          <p:nvPr>
-            <p:ph type="body" sz="quarter" idx="11"/>
-          </p:nvPr>
-        </p:nvSpPr>
-        <p:spPr/>
-        <p:txBody>
-          <a:bodyPr/>
-          <a:lstStyle/>
-          <a:p>
-            <a:r>
-              <a:rPr lang="en-US" dirty="0"/>
-              <a:t>Safety and Efficacy of the BNT162b2 mRNA Covid-19 Vaccine</a:t>
-            </a:r>
-          </a:p>
-          <a:p>
-            <a:endParaRPr lang="en-US" dirty="0"/>
-          </a:p>
-        </p:txBody>
-      </p:sp>
-      <p:sp>
-        <p:nvSpPr>
-          <p:cNvPr id="5" name="TextBox 4">
-            <a:extLst>
-              <a:ext uri="{FF2B5EF4-FFF2-40B4-BE49-F238E27FC236}">
-                <a16:creationId xmlns:a16="http://schemas.microsoft.com/office/drawing/2014/main" id="{D9ABD1DE-F70A-C297-EB3A-EFBE09B312E1}"/>
-              </a:ext>
-            </a:extLst>
-          </p:cNvPr>
-          <p:cNvSpPr txBox="1"/>
-          <p:nvPr/>
-        </p:nvSpPr>
-        <p:spPr>
-          <a:xfrm>
-            <a:off x="4511109" y="4866501"/>
-            <a:ext cx="4632891" cy="276999"/>
-          </a:xfrm>
-          <a:prstGeom prst="rect">
-            <a:avLst/>
-          </a:prstGeom>
-          <a:noFill/>
-        </p:spPr>
-        <p:txBody>
-          <a:bodyPr wrap="square" rtlCol="0">
-            <a:spAutoFit/>
-          </a:bodyPr>
-          <a:lstStyle/>
-          <a:p>
-            <a:pPr algn="r"/>
-            <a:r>
-              <a:rPr lang="en-US" sz="1200" dirty="0"/>
-              <a:t>(Polack et al., 2020)</a:t>
-            </a:r>
-          </a:p>
-        </p:txBody>
-      </p:sp>
-    </p:spTree>
-    <p:extLst>
-      <p:ext uri="{BB962C8B-B14F-4D97-AF65-F5344CB8AC3E}">
-        <p14:creationId xmlns:p14="http://schemas.microsoft.com/office/powerpoint/2010/main" val="1651718299"/>
-      </p:ext>
-    </p:extLst>
-  </p:cSld>
-  <p:clrMapOvr>
-    <a:masterClrMapping/>
-  </p:clrMapOvr>
-</p:sld>
-</file>
-
 <file path=ppt/slides/slide19.xml><?xml version="1.0" encoding="utf-8"?>
 <p:sld xmlns:a="http://schemas.openxmlformats.org/drawingml/2006/main" xmlns:r="http://schemas.openxmlformats.org/officeDocument/2006/relationships" xmlns:p="http://schemas.openxmlformats.org/presentationml/2006/main">
   <p:cSld>
@@ -9620,7 +9724,7 @@
           <p:cNvPr id="2" name="Text Placeholder 1">
             <a:extLst>
               <a:ext uri="{FF2B5EF4-FFF2-40B4-BE49-F238E27FC236}">
-                <a16:creationId xmlns:a16="http://schemas.microsoft.com/office/drawing/2014/main" id="{483A51C0-5A70-D1EF-28CF-0EBEC6DE6E0F}"/>
+                <a16:creationId xmlns:a16="http://schemas.microsoft.com/office/drawing/2014/main" id="{D1FC1D1E-588F-39C6-1B71-E180D0028B80}"/>
               </a:ext>
             </a:extLst>
           </p:cNvPr>
@@ -9633,8 +9737,8 @@
         </p:nvSpPr>
         <p:spPr>
           <a:xfrm>
-            <a:off x="456271" y="783771"/>
-            <a:ext cx="8231460" cy="3762829"/>
+            <a:off x="516230" y="1250156"/>
+            <a:ext cx="7878261" cy="3187972"/>
           </a:xfrm>
         </p:spPr>
         <p:txBody>
@@ -9643,95 +9747,19 @@
           </a:bodyPr>
           <a:lstStyle/>
           <a:p>
-            <a:pPr marL="342900" indent="-342900">
-              <a:buFont typeface="Arial" panose="020B0604020202020204" pitchFamily="34" charset="0"/>
-              <a:buChar char="•"/>
-            </a:pPr>
-            <a:r>
-              <a:rPr lang="en-US" sz="2400" b="1" dirty="0">
-                <a:solidFill>
-                  <a:srgbClr val="990000"/>
-                </a:solidFill>
-              </a:rPr>
-              <a:t>Superiority trial: </a:t>
-            </a:r>
-            <a:r>
-              <a:rPr lang="en-US" sz="2400" dirty="0"/>
-              <a:t>Test the hypothesis that the experimental intervention will provide </a:t>
-            </a:r>
-            <a:r>
-              <a:rPr lang="en-US" sz="2400" dirty="0">
-                <a:solidFill>
-                  <a:srgbClr val="990000"/>
-                </a:solidFill>
-              </a:rPr>
-              <a:t>better</a:t>
-            </a:r>
-            <a:r>
-              <a:rPr lang="en-US" sz="2400" dirty="0"/>
-              <a:t> outcomes than the control </a:t>
-            </a:r>
-          </a:p>
-          <a:p>
-            <a:pPr marL="857250" lvl="1" indent="-342900"/>
-            <a:r>
-              <a:rPr lang="en-US" sz="2400" dirty="0">
-                <a:solidFill>
-                  <a:schemeClr val="tx1"/>
-                </a:solidFill>
-              </a:rPr>
-              <a:t>Want to find a better treatment</a:t>
-            </a:r>
-          </a:p>
-          <a:p>
-            <a:endParaRPr lang="en-US" sz="2400" dirty="0"/>
-          </a:p>
-          <a:p>
-            <a:pPr marL="342900" indent="-342900">
-              <a:buFont typeface="Arial" panose="020B0604020202020204" pitchFamily="34" charset="0"/>
-              <a:buChar char="•"/>
-            </a:pPr>
-            <a:r>
-              <a:rPr lang="en-US" sz="2400" b="1" dirty="0">
-                <a:solidFill>
-                  <a:srgbClr val="990000"/>
-                </a:solidFill>
-              </a:rPr>
-              <a:t>Non-inferiority trial: </a:t>
-            </a:r>
-            <a:r>
-              <a:rPr lang="en-US" sz="2400" dirty="0"/>
-              <a:t>Test the hypothesis that the experimental intervention will provide outcomes that are </a:t>
-            </a:r>
-            <a:r>
-              <a:rPr lang="en-US" sz="2400" dirty="0">
-                <a:solidFill>
-                  <a:srgbClr val="990000"/>
-                </a:solidFill>
-              </a:rPr>
-              <a:t>no worse </a:t>
-            </a:r>
-            <a:r>
-              <a:rPr lang="en-US" sz="2400" dirty="0"/>
-              <a:t>than the control</a:t>
-            </a:r>
-          </a:p>
-          <a:p>
-            <a:pPr marL="800100" lvl="1" indent="-285750"/>
-            <a:r>
-              <a:rPr lang="en-US" sz="2400" dirty="0">
-                <a:solidFill>
-                  <a:schemeClr val="tx1"/>
-                </a:solidFill>
-              </a:rPr>
-              <a:t>Often used when a less expensive, less toxic, or less invasive treatment is needed </a:t>
+            <a:r>
+              <a:rPr lang="en-US" dirty="0"/>
+              <a:t>“Site staff who were responsible for safety evaluation and were unaware of group assignments observed participants for 30 minutes after vaccination for any acute reactions.”</a:t>
             </a:r>
           </a:p>
           <a:p>
             <a:endParaRPr lang="en-US" dirty="0"/>
           </a:p>
           <a:p>
-            <a:endParaRPr lang="en-US" dirty="0"/>
+            <a:r>
+              <a:rPr lang="en-US" dirty="0"/>
+              <a:t>Why is it important that site staff are blinded? </a:t>
+            </a:r>
           </a:p>
         </p:txBody>
       </p:sp>
@@ -9740,7 +9768,7 @@
           <p:cNvPr id="3" name="Text Placeholder 2">
             <a:extLst>
               <a:ext uri="{FF2B5EF4-FFF2-40B4-BE49-F238E27FC236}">
-                <a16:creationId xmlns:a16="http://schemas.microsoft.com/office/drawing/2014/main" id="{66EB6BA6-1021-BA64-C406-B13A992304E5}"/>
+                <a16:creationId xmlns:a16="http://schemas.microsoft.com/office/drawing/2014/main" id="{080FDDE5-3902-34D9-F639-806037A88553}"/>
               </a:ext>
             </a:extLst>
           </p:cNvPr>
@@ -9758,7 +9786,46 @@
           <a:p>
             <a:r>
               <a:rPr lang="en-US" dirty="0"/>
-              <a:t>How will the treatments be compared? </a:t>
+              <a:t>Safety and Efficacy of the BNT162b2 mRNA Covid-19 Vaccine</a:t>
+            </a:r>
+          </a:p>
+          <a:p>
+            <a:endParaRPr lang="en-US" dirty="0"/>
+          </a:p>
+        </p:txBody>
+      </p:sp>
+      <p:sp>
+        <p:nvSpPr>
+          <p:cNvPr id="5" name="TextBox 4">
+            <a:extLst>
+              <a:ext uri="{FF2B5EF4-FFF2-40B4-BE49-F238E27FC236}">
+                <a16:creationId xmlns:a16="http://schemas.microsoft.com/office/drawing/2014/main" id="{D9ABD1DE-F70A-C297-EB3A-EFBE09B312E1}"/>
+              </a:ext>
+            </a:extLst>
+          </p:cNvPr>
+          <p:cNvSpPr txBox="1"/>
+          <p:nvPr/>
+        </p:nvSpPr>
+        <p:spPr>
+          <a:xfrm>
+            <a:off x="4511109" y="4866501"/>
+            <a:ext cx="4632891" cy="276999"/>
+          </a:xfrm>
+          <a:prstGeom prst="rect">
+            <a:avLst/>
+          </a:prstGeom>
+          <a:noFill/>
+        </p:spPr>
+        <p:txBody>
+          <a:bodyPr wrap="square" rtlCol="0">
+            <a:spAutoFit/>
+          </a:bodyPr>
+          <a:lstStyle/>
+          <a:p>
+            <a:pPr algn="r"/>
+            <a:r>
+              <a:rPr lang="en-US" sz="1200" dirty="0"/>
+              <a:t>(Polack et al., 2020)</a:t>
             </a:r>
           </a:p>
         </p:txBody>
@@ -9766,7 +9833,7 @@
     </p:spTree>
     <p:extLst>
       <p:ext uri="{BB962C8B-B14F-4D97-AF65-F5344CB8AC3E}">
-        <p14:creationId xmlns:p14="http://schemas.microsoft.com/office/powerpoint/2010/main" val="1674017371"/>
+        <p14:creationId xmlns:p14="http://schemas.microsoft.com/office/powerpoint/2010/main" val="1651718299"/>
       </p:ext>
     </p:extLst>
   </p:cSld>
@@ -9949,7 +10016,7 @@
           <p:cNvPr id="2" name="Text Placeholder 1">
             <a:extLst>
               <a:ext uri="{FF2B5EF4-FFF2-40B4-BE49-F238E27FC236}">
-                <a16:creationId xmlns:a16="http://schemas.microsoft.com/office/drawing/2014/main" id="{B5064125-A845-CE32-D1FA-1E927FF6DEB0}"/>
+                <a16:creationId xmlns:a16="http://schemas.microsoft.com/office/drawing/2014/main" id="{483A51C0-5A70-D1EF-28CF-0EBEC6DE6E0F}"/>
               </a:ext>
             </a:extLst>
           </p:cNvPr>
@@ -9962,8 +10029,8 @@
         </p:nvSpPr>
         <p:spPr>
           <a:xfrm>
-            <a:off x="456270" y="977702"/>
-            <a:ext cx="8231459" cy="3188096"/>
+            <a:off x="456271" y="783771"/>
+            <a:ext cx="8231460" cy="3762829"/>
           </a:xfrm>
         </p:spPr>
         <p:txBody>
@@ -9972,89 +10039,95 @@
           </a:bodyPr>
           <a:lstStyle/>
           <a:p>
-            <a:r>
-              <a:rPr lang="en-US" dirty="0"/>
-              <a:t>We must carefully select the outcomes of the study to answer our scientific question</a:t>
-            </a:r>
-          </a:p>
-          <a:p>
-            <a:pPr marL="285750" indent="-285750">
+            <a:pPr marL="342900" indent="-342900">
               <a:buFont typeface="Arial" panose="020B0604020202020204" pitchFamily="34" charset="0"/>
               <a:buChar char="•"/>
             </a:pPr>
             <a:r>
-              <a:rPr lang="en-US" b="1" dirty="0">
+              <a:rPr lang="en-US" sz="2400" b="1" dirty="0">
                 <a:solidFill>
                   <a:srgbClr val="990000"/>
                 </a:solidFill>
               </a:rPr>
-              <a:t>Primary endpoints: </a:t>
-            </a:r>
-            <a:r>
-              <a:rPr lang="en-US" dirty="0"/>
-              <a:t>The main outcome used to compare the interventions</a:t>
-            </a:r>
-          </a:p>
-          <a:p>
-            <a:pPr marL="285750" indent="-285750">
-              <a:buFont typeface="Arial" panose="020B0604020202020204" pitchFamily="34" charset="0"/>
-              <a:buChar char="•"/>
-            </a:pPr>
-            <a:r>
-              <a:rPr lang="en-US" b="1" dirty="0">
+              <a:t>Superiority trial: </a:t>
+            </a:r>
+            <a:r>
+              <a:rPr lang="en-US" sz="2400" dirty="0"/>
+              <a:t>Test the hypothesis that the experimental intervention will provide </a:t>
+            </a:r>
+            <a:r>
+              <a:rPr lang="en-US" sz="2400" dirty="0">
                 <a:solidFill>
                   <a:srgbClr val="990000"/>
                 </a:solidFill>
               </a:rPr>
-              <a:t>Secondary endpoints: </a:t>
-            </a:r>
-            <a:r>
-              <a:rPr lang="en-US" dirty="0"/>
-              <a:t>Any other outcomes of interest for comparing the interventions</a:t>
-            </a:r>
-          </a:p>
-          <a:p>
-            <a:pPr marL="285750" indent="-285750">
+              <a:t>better</a:t>
+            </a:r>
+            <a:r>
+              <a:rPr lang="en-US" sz="2400" dirty="0"/>
+              <a:t> outcomes than the control </a:t>
+            </a:r>
+          </a:p>
+          <a:p>
+            <a:pPr marL="857250" lvl="1" indent="-342900"/>
+            <a:r>
+              <a:rPr lang="en-US" sz="2400" dirty="0">
+                <a:solidFill>
+                  <a:schemeClr val="tx1"/>
+                </a:solidFill>
+              </a:rPr>
+              <a:t>Want to find a better treatment</a:t>
+            </a:r>
+          </a:p>
+          <a:p>
+            <a:endParaRPr lang="en-US" sz="2400" dirty="0"/>
+          </a:p>
+          <a:p>
+            <a:pPr marL="342900" indent="-342900">
               <a:buFont typeface="Arial" panose="020B0604020202020204" pitchFamily="34" charset="0"/>
               <a:buChar char="•"/>
             </a:pPr>
             <a:r>
-              <a:rPr lang="en-US" b="1" dirty="0">
+              <a:rPr lang="en-US" sz="2400" b="1" dirty="0">
                 <a:solidFill>
                   <a:srgbClr val="990000"/>
                 </a:solidFill>
               </a:rPr>
-              <a:t>Safety: </a:t>
-            </a:r>
-            <a:r>
-              <a:rPr lang="en-US" dirty="0">
+              <a:t>Non-inferiority trial: </a:t>
+            </a:r>
+            <a:r>
+              <a:rPr lang="en-US" sz="2400" dirty="0"/>
+              <a:t>Test the hypothesis that the experimental intervention will provide outcomes that are </a:t>
+            </a:r>
+            <a:r>
+              <a:rPr lang="en-US" sz="2400" dirty="0">
+                <a:solidFill>
+                  <a:srgbClr val="990000"/>
+                </a:solidFill>
+              </a:rPr>
+              <a:t>no worse </a:t>
+            </a:r>
+            <a:r>
+              <a:rPr lang="en-US" sz="2400" dirty="0"/>
+              <a:t>than the control</a:t>
+            </a:r>
+          </a:p>
+          <a:p>
+            <a:pPr marL="800100" lvl="1" indent="-285750"/>
+            <a:r>
+              <a:rPr lang="en-US" sz="2400" dirty="0">
                 <a:solidFill>
                   <a:schemeClr val="tx1"/>
                 </a:solidFill>
               </a:rPr>
-              <a:t>Often include monitoring for safety (looking at certain toxicities, etc.)</a:t>
-            </a:r>
-          </a:p>
-          <a:p>
-            <a:pPr marL="285750" indent="-285750">
-              <a:buFont typeface="Arial" panose="020B0604020202020204" pitchFamily="34" charset="0"/>
-              <a:buChar char="•"/>
-            </a:pPr>
-            <a:r>
-              <a:rPr lang="en-US" dirty="0"/>
-              <a:t>It is now also common (or becoming increasingly common) to compare quality of life outcomes</a:t>
-            </a:r>
-          </a:p>
-          <a:p>
-            <a:pPr marL="800100" lvl="1" indent="-285750"/>
-            <a:r>
-              <a:rPr lang="en-US" dirty="0">
-                <a:solidFill>
-                  <a:schemeClr val="tx1"/>
-                </a:solidFill>
-              </a:rPr>
-              <a:t>How does the quality of life compare for the two treatment groups (these are often secondary/exploratory) </a:t>
-            </a:r>
+              <a:t>Often used when a less expensive, less toxic, or less invasive treatment is needed </a:t>
+            </a:r>
+          </a:p>
+          <a:p>
+            <a:endParaRPr lang="en-US" dirty="0"/>
+          </a:p>
+          <a:p>
+            <a:endParaRPr lang="en-US" dirty="0"/>
           </a:p>
         </p:txBody>
       </p:sp>
@@ -10063,7 +10136,7 @@
           <p:cNvPr id="3" name="Text Placeholder 2">
             <a:extLst>
               <a:ext uri="{FF2B5EF4-FFF2-40B4-BE49-F238E27FC236}">
-                <a16:creationId xmlns:a16="http://schemas.microsoft.com/office/drawing/2014/main" id="{55BFF96C-44FF-C908-E38A-A99749D85F0C}"/>
+                <a16:creationId xmlns:a16="http://schemas.microsoft.com/office/drawing/2014/main" id="{66EB6BA6-1021-BA64-C406-B13A992304E5}"/>
               </a:ext>
             </a:extLst>
           </p:cNvPr>
@@ -10089,7 +10162,7 @@
     </p:spTree>
     <p:extLst>
       <p:ext uri="{BB962C8B-B14F-4D97-AF65-F5344CB8AC3E}">
-        <p14:creationId xmlns:p14="http://schemas.microsoft.com/office/powerpoint/2010/main" val="3304372555"/>
+        <p14:creationId xmlns:p14="http://schemas.microsoft.com/office/powerpoint/2010/main" val="1674017371"/>
       </p:ext>
     </p:extLst>
   </p:cSld>
@@ -10121,7 +10194,7 @@
           <p:cNvPr id="2" name="Text Placeholder 1">
             <a:extLst>
               <a:ext uri="{FF2B5EF4-FFF2-40B4-BE49-F238E27FC236}">
-                <a16:creationId xmlns:a16="http://schemas.microsoft.com/office/drawing/2014/main" id="{22AAB43E-C14F-4E02-8DBB-28398EA5BB85}"/>
+                <a16:creationId xmlns:a16="http://schemas.microsoft.com/office/drawing/2014/main" id="{B5064125-A845-CE32-D1FA-1E927FF6DEB0}"/>
               </a:ext>
             </a:extLst>
           </p:cNvPr>
@@ -10132,64 +10205,101 @@
             <p:ph type="body" sz="quarter" idx="10"/>
           </p:nvPr>
         </p:nvSpPr>
-        <p:spPr/>
+        <p:spPr>
+          <a:xfrm>
+            <a:off x="456270" y="977702"/>
+            <a:ext cx="8231459" cy="3188096"/>
+          </a:xfrm>
+        </p:spPr>
         <p:txBody>
           <a:bodyPr>
-            <a:normAutofit fontScale="85000" lnSpcReduction="20000"/>
+            <a:normAutofit/>
           </a:bodyPr>
           <a:lstStyle/>
           <a:p>
             <a:r>
-              <a:rPr lang="en-US" b="1" dirty="0"/>
-              <a:t>Efficacy: </a:t>
-            </a:r>
-          </a:p>
-          <a:p>
-            <a:r>
-              <a:rPr lang="en-US" dirty="0"/>
-              <a:t>“</a:t>
-            </a:r>
+              <a:rPr lang="en-US" dirty="0"/>
+              <a:t>We must carefully select the outcomes of the study to answer our scientific question</a:t>
+            </a:r>
+          </a:p>
+          <a:p>
+            <a:pPr marL="285750" indent="-285750">
+              <a:buFont typeface="Arial" panose="020B0604020202020204" pitchFamily="34" charset="0"/>
+              <a:buChar char="•"/>
+            </a:pPr>
             <a:r>
               <a:rPr lang="en-US" b="1" dirty="0">
                 <a:solidFill>
                   <a:srgbClr val="990000"/>
                 </a:solidFill>
               </a:rPr>
-              <a:t>The first primary end point was the efficacy of BNT162b2 against confirmed Covid-19 </a:t>
-            </a:r>
-            <a:r>
-              <a:rPr lang="en-US" dirty="0"/>
-              <a:t>with onset at least 7 days after the second dose in participants who had been without serologic or virologic evidence of SARS-CoV-2 infection up to 7 days after the second dose; the second primary end point was efficacy in participants with and participants without evidence of prior infection. Confirmed Covid-19 was defined according to the Food and Drug Administration (FDA) criteria as the presence of at least one of the following symptoms: fever, new or increased cough, new or increased shortness of breath, chills, new or increased muscle pain, new loss of taste or smell, sore throat, diarrhea, or vomiting, combined with a respiratory specimen obtained during the symptomatic period or within 4 days before or after it that was positive for SARS-CoV-2 by nucleic acid amplification–based testing, either at the central laboratory or at a local testing facility (using a protocol-defined acceptable test). </a:t>
-            </a:r>
-          </a:p>
-          <a:p>
-            <a:r>
-              <a:rPr lang="en-US" dirty="0"/>
-              <a:t>Major </a:t>
-            </a:r>
+              <a:t>Primary endpoints: </a:t>
+            </a:r>
+            <a:r>
+              <a:rPr lang="en-US" dirty="0"/>
+              <a:t>The main outcome used to compare the interventions</a:t>
+            </a:r>
+          </a:p>
+          <a:p>
+            <a:pPr marL="285750" indent="-285750">
+              <a:buFont typeface="Arial" panose="020B0604020202020204" pitchFamily="34" charset="0"/>
+              <a:buChar char="•"/>
+            </a:pPr>
             <a:r>
               <a:rPr lang="en-US" b="1" dirty="0">
                 <a:solidFill>
                   <a:srgbClr val="990000"/>
                 </a:solidFill>
               </a:rPr>
-              <a:t>secondary end points included the efficacy of BNT162b2 against severe Covid-19</a:t>
-            </a:r>
-            <a:r>
-              <a:rPr lang="en-US" dirty="0"/>
-              <a:t>. Se- </a:t>
-            </a:r>
-            <a:r>
-              <a:rPr lang="en-US" dirty="0" err="1"/>
-              <a:t>vere</a:t>
-            </a:r>
-            <a:r>
-              <a:rPr lang="en-US" dirty="0"/>
-              <a:t> Covid-19 is defined by the FDA as confirmed Covid-19 with one of the following additional features: clinical signs at rest that are indicative of severe systemic illness; respiratory failure; evidence of shock; significant acute renal, hepatic, or neurologic dysfunction; admission to an intensive care unit; or death. Details are provided in the protocol.”</a:t>
-            </a:r>
-          </a:p>
-          <a:p>
-            <a:endParaRPr lang="en-US" dirty="0"/>
+              <a:t>Secondary endpoints: </a:t>
+            </a:r>
+            <a:r>
+              <a:rPr lang="en-US" dirty="0"/>
+              <a:t>Any other outcomes of interest for comparing the interventions</a:t>
+            </a:r>
+          </a:p>
+          <a:p>
+            <a:pPr marL="285750" indent="-285750">
+              <a:buFont typeface="Arial" panose="020B0604020202020204" pitchFamily="34" charset="0"/>
+              <a:buChar char="•"/>
+            </a:pPr>
+            <a:r>
+              <a:rPr lang="en-US" b="1" dirty="0">
+                <a:solidFill>
+                  <a:srgbClr val="990000"/>
+                </a:solidFill>
+              </a:rPr>
+              <a:t>Safety: </a:t>
+            </a:r>
+            <a:r>
+              <a:rPr lang="en-US" dirty="0">
+                <a:solidFill>
+                  <a:schemeClr val="tx1"/>
+                </a:solidFill>
+              </a:rPr>
+              <a:t>Often include monitoring for safety (looking at certain toxicities, etc.)</a:t>
+            </a:r>
+          </a:p>
+          <a:p>
+            <a:pPr marL="285750" indent="-285750">
+              <a:buFont typeface="Arial" panose="020B0604020202020204" pitchFamily="34" charset="0"/>
+              <a:buChar char="•"/>
+            </a:pPr>
+            <a:r>
+              <a:rPr lang="en-US" dirty="0"/>
+              <a:t>It is now also common (or becoming increasingly common) to compare quality of life outcomes</a:t>
+            </a:r>
+          </a:p>
+          <a:p>
+            <a:pPr marL="800100" lvl="1" indent="-285750"/>
+            <a:r>
+              <a:rPr lang="en-US" dirty="0">
+                <a:solidFill>
+                  <a:schemeClr val="tx1"/>
+                </a:solidFill>
+              </a:rPr>
+              <a:t>How does the quality of life compare for the two treatment groups (these are often secondary/exploratory) </a:t>
+            </a:r>
           </a:p>
         </p:txBody>
       </p:sp>
@@ -10198,7 +10308,7 @@
           <p:cNvPr id="3" name="Text Placeholder 2">
             <a:extLst>
               <a:ext uri="{FF2B5EF4-FFF2-40B4-BE49-F238E27FC236}">
-                <a16:creationId xmlns:a16="http://schemas.microsoft.com/office/drawing/2014/main" id="{46B6DDB8-CF77-A63B-B53C-B15F748BF1DE}"/>
+                <a16:creationId xmlns:a16="http://schemas.microsoft.com/office/drawing/2014/main" id="{55BFF96C-44FF-C908-E38A-A99749D85F0C}"/>
               </a:ext>
             </a:extLst>
           </p:cNvPr>
@@ -10209,30 +10319,22 @@
             <p:ph type="body" sz="quarter" idx="11"/>
           </p:nvPr>
         </p:nvSpPr>
-        <p:spPr>
-          <a:xfrm>
-            <a:off x="456271" y="259556"/>
-            <a:ext cx="8231459" cy="767270"/>
-          </a:xfrm>
-        </p:spPr>
+        <p:spPr/>
         <p:txBody>
           <a:bodyPr/>
           <a:lstStyle/>
           <a:p>
             <a:r>
               <a:rPr lang="en-US" dirty="0"/>
-              <a:t>Safety and Efficacy of the BNT162b2 mRNA Covid-19 Vaccine</a:t>
-            </a:r>
-          </a:p>
-          <a:p>
-            <a:endParaRPr lang="en-US" dirty="0"/>
+              <a:t>How will the treatments be compared? </a:t>
+            </a:r>
           </a:p>
         </p:txBody>
       </p:sp>
     </p:spTree>
     <p:extLst>
       <p:ext uri="{BB962C8B-B14F-4D97-AF65-F5344CB8AC3E}">
-        <p14:creationId xmlns:p14="http://schemas.microsoft.com/office/powerpoint/2010/main" val="2974128119"/>
+        <p14:creationId xmlns:p14="http://schemas.microsoft.com/office/powerpoint/2010/main" val="3304372555"/>
       </p:ext>
     </p:extLst>
   </p:cSld>
@@ -10264,7 +10366,7 @@
           <p:cNvPr id="2" name="Text Placeholder 1">
             <a:extLst>
               <a:ext uri="{FF2B5EF4-FFF2-40B4-BE49-F238E27FC236}">
-                <a16:creationId xmlns:a16="http://schemas.microsoft.com/office/drawing/2014/main" id="{FA41BB9C-8E66-E56D-EB92-33644DE32FE1}"/>
+                <a16:creationId xmlns:a16="http://schemas.microsoft.com/office/drawing/2014/main" id="{22AAB43E-C14F-4E02-8DBB-28398EA5BB85}"/>
               </a:ext>
             </a:extLst>
           </p:cNvPr>
@@ -10275,189 +10377,64 @@
             <p:ph type="body" sz="quarter" idx="10"/>
           </p:nvPr>
         </p:nvSpPr>
-        <p:spPr>
-          <a:xfrm>
-            <a:off x="456271" y="824459"/>
-            <a:ext cx="8231459" cy="3722141"/>
-          </a:xfrm>
-        </p:spPr>
+        <p:spPr/>
         <p:txBody>
           <a:bodyPr>
             <a:normAutofit fontScale="85000" lnSpcReduction="20000"/>
           </a:bodyPr>
           <a:lstStyle/>
           <a:p>
-            <a:pPr marL="285750" indent="-285750">
-              <a:buFont typeface="Arial" panose="020B0604020202020204" pitchFamily="34" charset="0"/>
-              <a:buChar char="•"/>
-            </a:pPr>
-            <a:r>
-              <a:rPr lang="en-US" dirty="0"/>
-              <a:t>Participants are randomized to one of the intervention groups</a:t>
-            </a:r>
-          </a:p>
-          <a:p>
-            <a:pPr marL="285750" indent="-285750">
-              <a:buFont typeface="Arial" panose="020B0604020202020204" pitchFamily="34" charset="0"/>
-              <a:buChar char="•"/>
-            </a:pPr>
-            <a:r>
-              <a:rPr lang="en-US" dirty="0"/>
-              <a:t>The protocol states how each intervention should be administered, how often, etc. </a:t>
-            </a:r>
-          </a:p>
-          <a:p>
-            <a:pPr marL="800100" lvl="1" indent="-285750"/>
-            <a:r>
-              <a:rPr lang="en-US" dirty="0">
-                <a:solidFill>
-                  <a:schemeClr val="tx1"/>
-                </a:solidFill>
-              </a:rPr>
-              <a:t>Not all patients will be able to receive the treatment as stated in the protocol (toxicity, dropout, </a:t>
-            </a:r>
-            <a:r>
-              <a:rPr lang="en-US" dirty="0" err="1">
-                <a:solidFill>
-                  <a:schemeClr val="tx1"/>
-                </a:solidFill>
-              </a:rPr>
-              <a:t>etc</a:t>
-            </a:r>
-            <a:r>
-              <a:rPr lang="en-US" dirty="0">
-                <a:solidFill>
-                  <a:schemeClr val="tx1"/>
-                </a:solidFill>
-              </a:rPr>
-              <a:t>)</a:t>
-            </a:r>
-          </a:p>
-          <a:p>
-            <a:pPr marL="800100" lvl="1" indent="-285750"/>
-            <a:r>
-              <a:rPr lang="en-US" dirty="0">
-                <a:solidFill>
-                  <a:schemeClr val="tx1"/>
-                </a:solidFill>
-              </a:rPr>
-              <a:t>Some patients do not receive the treatment they were randomized to</a:t>
-            </a:r>
-          </a:p>
-          <a:p>
-            <a:pPr marL="285750" indent="-285750"/>
-            <a:r>
-              <a:rPr lang="en-US" dirty="0">
-                <a:solidFill>
-                  <a:schemeClr val="tx1"/>
-                </a:solidFill>
-              </a:rPr>
-              <a:t>How do we </a:t>
-            </a:r>
-            <a:r>
-              <a:rPr lang="en-US" dirty="0"/>
-              <a:t>account for these patients in the analysis? </a:t>
-            </a:r>
-          </a:p>
-          <a:p>
-            <a:pPr marL="285750" indent="-285750">
-              <a:buFont typeface="Arial" panose="020B0604020202020204" pitchFamily="34" charset="0"/>
-              <a:buChar char="•"/>
-            </a:pPr>
+            <a:r>
+              <a:rPr lang="en-US" b="1" dirty="0"/>
+              <a:t>Efficacy: </a:t>
+            </a:r>
+          </a:p>
+          <a:p>
+            <a:r>
+              <a:rPr lang="en-US" dirty="0"/>
+              <a:t>“</a:t>
+            </a:r>
             <a:r>
               <a:rPr lang="en-US" b="1" dirty="0">
                 <a:solidFill>
                   <a:srgbClr val="990000"/>
                 </a:solidFill>
               </a:rPr>
-              <a:t>Per-protocol analyses: </a:t>
-            </a:r>
-            <a:r>
-              <a:rPr lang="en-US" dirty="0">
-                <a:solidFill>
-                  <a:schemeClr val="tx1"/>
-                </a:solidFill>
-              </a:rPr>
-              <a:t>Include patients only if they received the treatment exactly as stated in the protocol</a:t>
-            </a:r>
-          </a:p>
-          <a:p>
-            <a:pPr marL="800100" lvl="1" indent="-285750"/>
-            <a:r>
-              <a:rPr lang="en-US" dirty="0">
-                <a:solidFill>
-                  <a:schemeClr val="tx1"/>
-                </a:solidFill>
-              </a:rPr>
-              <a:t>Usually not recommended as confounding could occur (“compliant” patients and ”non-compliant” patients could differ on important prognostic factors)</a:t>
-            </a:r>
-          </a:p>
-          <a:p>
-            <a:pPr marL="800100" lvl="1" indent="-285750"/>
-            <a:r>
-              <a:rPr lang="en-US" dirty="0">
-                <a:solidFill>
-                  <a:schemeClr val="tx1"/>
-                </a:solidFill>
-              </a:rPr>
-              <a:t>Often used as part of secondary analyses</a:t>
-            </a:r>
-          </a:p>
-          <a:p>
-            <a:pPr marL="285750" indent="-285750">
-              <a:buFont typeface="Arial" panose="020B0604020202020204" pitchFamily="34" charset="0"/>
-              <a:buChar char="•"/>
-            </a:pPr>
+              <a:t>The first primary end point was the efficacy of BNT162b2 against confirmed Covid-19 </a:t>
+            </a:r>
+            <a:r>
+              <a:rPr lang="en-US" dirty="0"/>
+              <a:t>with onset at least 7 days after the second dose in participants who had been without serologic or virologic evidence of SARS-CoV-2 infection up to 7 days after the second dose; the second primary end point was efficacy in participants with and participants without evidence of prior infection. Confirmed Covid-19 was defined according to the Food and Drug Administration (FDA) criteria as the presence of at least one of the following symptoms: fever, new or increased cough, new or increased shortness of breath, chills, new or increased muscle pain, new loss of taste or smell, sore throat, diarrhea, or vomiting, combined with a respiratory specimen obtained during the symptomatic period or within 4 days before or after it that was positive for SARS-CoV-2 by nucleic acid amplification–based testing, either at the central laboratory or at a local testing facility (using a protocol-defined acceptable test). </a:t>
+            </a:r>
+          </a:p>
+          <a:p>
+            <a:r>
+              <a:rPr lang="en-US" dirty="0"/>
+              <a:t>Major </a:t>
+            </a:r>
             <a:r>
               <a:rPr lang="en-US" b="1" dirty="0">
                 <a:solidFill>
                   <a:srgbClr val="990000"/>
                 </a:solidFill>
               </a:rPr>
-              <a:t>Intention-to-treat </a:t>
-            </a:r>
-            <a:r>
-              <a:rPr lang="en-US" dirty="0">
-                <a:solidFill>
-                  <a:schemeClr val="tx1"/>
-                </a:solidFill>
-              </a:rPr>
-              <a:t>(most common and recommended approach): Includes patients in the group they were assigned to, regardless of whether they received the treatment or not</a:t>
-            </a:r>
-          </a:p>
-          <a:p>
-            <a:pPr marL="800100" lvl="1" indent="-285750"/>
-            <a:r>
-              <a:rPr lang="en-US" dirty="0">
-                <a:solidFill>
-                  <a:schemeClr val="tx1"/>
-                </a:solidFill>
-              </a:rPr>
-              <a:t>Reduces risk of confounding</a:t>
-            </a:r>
-          </a:p>
-          <a:p>
-            <a:pPr marL="285750" indent="-285750">
-              <a:buFont typeface="Arial" panose="020B0604020202020204" pitchFamily="34" charset="0"/>
-              <a:buChar char="•"/>
-            </a:pPr>
-            <a:r>
-              <a:rPr lang="en-US" b="1" dirty="0">
-                <a:solidFill>
-                  <a:srgbClr val="990000"/>
-                </a:solidFill>
-              </a:rPr>
-              <a:t>Modified Intention-to-treat: </a:t>
-            </a:r>
-            <a:r>
-              <a:rPr lang="en-US" dirty="0"/>
-              <a:t>intention-to-treat analysis with some exceptions regarding patients who should be excluded from the analysis (e.g. patients who never received treatment for reasons unrelated to the treatment) </a:t>
-            </a:r>
-            <a:endParaRPr lang="en-US" dirty="0">
-              <a:solidFill>
-                <a:schemeClr val="tx1"/>
-              </a:solidFill>
-            </a:endParaRPr>
+              <a:t>secondary end points included the efficacy of BNT162b2 against severe Covid-19</a:t>
+            </a:r>
+            <a:r>
+              <a:rPr lang="en-US" dirty="0"/>
+              <a:t>. Se- </a:t>
+            </a:r>
+            <a:r>
+              <a:rPr lang="en-US" dirty="0" err="1"/>
+              <a:t>vere</a:t>
+            </a:r>
+            <a:r>
+              <a:rPr lang="en-US" dirty="0"/>
+              <a:t> Covid-19 is defined by the FDA as confirmed Covid-19 with one of the following additional features: clinical signs at rest that are indicative of severe systemic illness; respiratory failure; evidence of shock; significant acute renal, hepatic, or neurologic dysfunction; admission to an intensive care unit; or death. Details are provided in the protocol.”</a:t>
+            </a:r>
+          </a:p>
+          <a:p>
+            <a:endParaRPr lang="en-US" dirty="0"/>
           </a:p>
         </p:txBody>
       </p:sp>
@@ -10466,7 +10443,7 @@
           <p:cNvPr id="3" name="Text Placeholder 2">
             <a:extLst>
               <a:ext uri="{FF2B5EF4-FFF2-40B4-BE49-F238E27FC236}">
-                <a16:creationId xmlns:a16="http://schemas.microsoft.com/office/drawing/2014/main" id="{AA057C4F-DDC3-C67E-24BC-720580788941}"/>
+                <a16:creationId xmlns:a16="http://schemas.microsoft.com/office/drawing/2014/main" id="{46B6DDB8-CF77-A63B-B53C-B15F748BF1DE}"/>
               </a:ext>
             </a:extLst>
           </p:cNvPr>
@@ -10477,22 +10454,30 @@
             <p:ph type="body" sz="quarter" idx="11"/>
           </p:nvPr>
         </p:nvSpPr>
-        <p:spPr/>
+        <p:spPr>
+          <a:xfrm>
+            <a:off x="456271" y="259556"/>
+            <a:ext cx="8231459" cy="767270"/>
+          </a:xfrm>
+        </p:spPr>
         <p:txBody>
           <a:bodyPr/>
           <a:lstStyle/>
           <a:p>
             <a:r>
               <a:rPr lang="en-US" dirty="0"/>
-              <a:t>Who will be included in the analysis? </a:t>
-            </a:r>
+              <a:t>Safety and Efficacy of the BNT162b2 mRNA Covid-19 Vaccine</a:t>
+            </a:r>
+          </a:p>
+          <a:p>
+            <a:endParaRPr lang="en-US" dirty="0"/>
           </a:p>
         </p:txBody>
       </p:sp>
     </p:spTree>
     <p:extLst>
       <p:ext uri="{BB962C8B-B14F-4D97-AF65-F5344CB8AC3E}">
-        <p14:creationId xmlns:p14="http://schemas.microsoft.com/office/powerpoint/2010/main" val="409743916"/>
+        <p14:creationId xmlns:p14="http://schemas.microsoft.com/office/powerpoint/2010/main" val="2974128119"/>
       </p:ext>
     </p:extLst>
   </p:cSld>
@@ -10521,10 +10506,212 @@
       </p:grpSpPr>
       <p:sp>
         <p:nvSpPr>
+          <p:cNvPr id="2" name="Text Placeholder 1">
+            <a:extLst>
+              <a:ext uri="{FF2B5EF4-FFF2-40B4-BE49-F238E27FC236}">
+                <a16:creationId xmlns:a16="http://schemas.microsoft.com/office/drawing/2014/main" id="{FA41BB9C-8E66-E56D-EB92-33644DE32FE1}"/>
+              </a:ext>
+            </a:extLst>
+          </p:cNvPr>
+          <p:cNvSpPr>
+            <a:spLocks noGrp="1"/>
+          </p:cNvSpPr>
+          <p:nvPr>
+            <p:ph type="body" sz="quarter" idx="10"/>
+          </p:nvPr>
+        </p:nvSpPr>
+        <p:spPr>
+          <a:xfrm>
+            <a:off x="456271" y="824459"/>
+            <a:ext cx="8231459" cy="3722141"/>
+          </a:xfrm>
+        </p:spPr>
+        <p:txBody>
+          <a:bodyPr>
+            <a:normAutofit fontScale="85000" lnSpcReduction="20000"/>
+          </a:bodyPr>
+          <a:lstStyle/>
+          <a:p>
+            <a:pPr marL="285750" indent="-285750">
+              <a:buFont typeface="Arial" panose="020B0604020202020204" pitchFamily="34" charset="0"/>
+              <a:buChar char="•"/>
+            </a:pPr>
+            <a:r>
+              <a:rPr lang="en-US" dirty="0"/>
+              <a:t>Participants are randomized to one of the intervention groups</a:t>
+            </a:r>
+          </a:p>
+          <a:p>
+            <a:pPr marL="285750" indent="-285750">
+              <a:buFont typeface="Arial" panose="020B0604020202020204" pitchFamily="34" charset="0"/>
+              <a:buChar char="•"/>
+            </a:pPr>
+            <a:r>
+              <a:rPr lang="en-US" dirty="0"/>
+              <a:t>The protocol states how each intervention should be administered, how often, etc. </a:t>
+            </a:r>
+          </a:p>
+          <a:p>
+            <a:pPr marL="800100" lvl="1" indent="-285750"/>
+            <a:r>
+              <a:rPr lang="en-US" dirty="0">
+                <a:solidFill>
+                  <a:schemeClr val="tx1"/>
+                </a:solidFill>
+              </a:rPr>
+              <a:t>Not all patients will be able to receive the treatment as stated in the protocol (toxicity, dropout, </a:t>
+            </a:r>
+            <a:r>
+              <a:rPr lang="en-US" dirty="0" err="1">
+                <a:solidFill>
+                  <a:schemeClr val="tx1"/>
+                </a:solidFill>
+              </a:rPr>
+              <a:t>etc</a:t>
+            </a:r>
+            <a:r>
+              <a:rPr lang="en-US" dirty="0">
+                <a:solidFill>
+                  <a:schemeClr val="tx1"/>
+                </a:solidFill>
+              </a:rPr>
+              <a:t>)</a:t>
+            </a:r>
+          </a:p>
+          <a:p>
+            <a:pPr marL="800100" lvl="1" indent="-285750"/>
+            <a:r>
+              <a:rPr lang="en-US" dirty="0">
+                <a:solidFill>
+                  <a:schemeClr val="tx1"/>
+                </a:solidFill>
+              </a:rPr>
+              <a:t>Some patients do not receive the treatment they were randomized to</a:t>
+            </a:r>
+          </a:p>
+          <a:p>
+            <a:pPr marL="285750" indent="-285750"/>
+            <a:r>
+              <a:rPr lang="en-US" dirty="0">
+                <a:solidFill>
+                  <a:schemeClr val="tx1"/>
+                </a:solidFill>
+              </a:rPr>
+              <a:t>How do we </a:t>
+            </a:r>
+            <a:r>
+              <a:rPr lang="en-US" dirty="0"/>
+              <a:t>account for these patients in the analysis? </a:t>
+            </a:r>
+          </a:p>
+          <a:p>
+            <a:pPr marL="285750" indent="-285750">
+              <a:buFont typeface="Arial" panose="020B0604020202020204" pitchFamily="34" charset="0"/>
+              <a:buChar char="•"/>
+            </a:pPr>
+            <a:r>
+              <a:rPr lang="en-US" b="1" dirty="0">
+                <a:solidFill>
+                  <a:srgbClr val="990000"/>
+                </a:solidFill>
+              </a:rPr>
+              <a:t>Per-protocol analyses: </a:t>
+            </a:r>
+            <a:r>
+              <a:rPr lang="en-US" dirty="0">
+                <a:solidFill>
+                  <a:schemeClr val="tx1"/>
+                </a:solidFill>
+              </a:rPr>
+              <a:t>Include patients only if they received the treatment exactly as stated in the protocol</a:t>
+            </a:r>
+          </a:p>
+          <a:p>
+            <a:pPr marL="800100" lvl="1" indent="-285750"/>
+            <a:r>
+              <a:rPr lang="en-US" dirty="0">
+                <a:solidFill>
+                  <a:schemeClr val="tx1"/>
+                </a:solidFill>
+              </a:rPr>
+              <a:t>Usually not recommended as confounding could occur (“compliant” patients and ”non-compliant” patients could differ on important prognostic factors)</a:t>
+            </a:r>
+          </a:p>
+          <a:p>
+            <a:pPr marL="800100" lvl="1" indent="-285750"/>
+            <a:r>
+              <a:rPr lang="en-US" dirty="0">
+                <a:solidFill>
+                  <a:schemeClr val="tx1"/>
+                </a:solidFill>
+              </a:rPr>
+              <a:t>Often used as part of secondary analyses</a:t>
+            </a:r>
+          </a:p>
+          <a:p>
+            <a:pPr marL="285750" indent="-285750">
+              <a:buFont typeface="Arial" panose="020B0604020202020204" pitchFamily="34" charset="0"/>
+              <a:buChar char="•"/>
+            </a:pPr>
+            <a:r>
+              <a:rPr lang="en-US" b="1" dirty="0">
+                <a:solidFill>
+                  <a:srgbClr val="990000"/>
+                </a:solidFill>
+              </a:rPr>
+              <a:t>Intention-to-treat </a:t>
+            </a:r>
+            <a:r>
+              <a:rPr lang="en-US" dirty="0">
+                <a:solidFill>
+                  <a:schemeClr val="tx1"/>
+                </a:solidFill>
+              </a:rPr>
+              <a:t>(most common and recommended approach): Includes patients in the group they were assigned to, regardless of whether they received the treatment or not</a:t>
+            </a:r>
+          </a:p>
+          <a:p>
+            <a:pPr marL="800100" lvl="1" indent="-285750"/>
+            <a:r>
+              <a:rPr lang="en-US" dirty="0">
+                <a:solidFill>
+                  <a:schemeClr val="tx1"/>
+                </a:solidFill>
+              </a:rPr>
+              <a:t>Reduces risk of confounding</a:t>
+            </a:r>
+          </a:p>
+          <a:p>
+            <a:pPr marL="285750" indent="-285750">
+              <a:buFont typeface="Arial" panose="020B0604020202020204" pitchFamily="34" charset="0"/>
+              <a:buChar char="•"/>
+            </a:pPr>
+            <a:r>
+              <a:rPr lang="en-US" b="1" dirty="0">
+                <a:solidFill>
+                  <a:srgbClr val="990000"/>
+                </a:solidFill>
+              </a:rPr>
+              <a:t>Modified Intention-to-treat: </a:t>
+            </a:r>
+            <a:r>
+              <a:rPr lang="en-US" dirty="0"/>
+              <a:t>intention-to-treat analysis with some exceptions regarding patients who should be excluded from the analysis (e.g. patients who never received treatment for reasons unrelated to the treatment) </a:t>
+            </a:r>
+            <a:endParaRPr lang="en-US" dirty="0">
+              <a:solidFill>
+                <a:schemeClr val="tx1"/>
+              </a:solidFill>
+            </a:endParaRPr>
+          </a:p>
+        </p:txBody>
+      </p:sp>
+      <p:sp>
+        <p:nvSpPr>
           <p:cNvPr id="3" name="Text Placeholder 2">
             <a:extLst>
               <a:ext uri="{FF2B5EF4-FFF2-40B4-BE49-F238E27FC236}">
-                <a16:creationId xmlns:a16="http://schemas.microsoft.com/office/drawing/2014/main" id="{BA7E52C3-5863-4F81-9BE1-09C1BA1D9CB4}"/>
+                <a16:creationId xmlns:a16="http://schemas.microsoft.com/office/drawing/2014/main" id="{AA057C4F-DDC3-C67E-24BC-720580788941}"/>
               </a:ext>
             </a:extLst>
           </p:cNvPr>
@@ -10542,111 +10729,7 @@
           <a:p>
             <a:r>
               <a:rPr lang="en-US" dirty="0"/>
-              <a:t>Safety and Efficacy of the BNT162b2 mRNA Covid-19 Vaccine</a:t>
-            </a:r>
-          </a:p>
-          <a:p>
-            <a:endParaRPr lang="en-US" dirty="0"/>
-          </a:p>
-        </p:txBody>
-      </p:sp>
-      <p:pic>
-        <p:nvPicPr>
-          <p:cNvPr id="5" name="Picture 4" descr="Graphical user interface, application&#10;&#10;Description automatically generated">
-            <a:extLst>
-              <a:ext uri="{FF2B5EF4-FFF2-40B4-BE49-F238E27FC236}">
-                <a16:creationId xmlns:a16="http://schemas.microsoft.com/office/drawing/2014/main" id="{1190E429-A87E-CFD0-A866-A783F916C38A}"/>
-              </a:ext>
-            </a:extLst>
-          </p:cNvPr>
-          <p:cNvPicPr>
-            <a:picLocks noChangeAspect="1"/>
-          </p:cNvPicPr>
-          <p:nvPr/>
-        </p:nvPicPr>
-        <p:blipFill>
-          <a:blip r:embed="rId2"/>
-          <a:stretch>
-            <a:fillRect/>
-          </a:stretch>
-        </p:blipFill>
-        <p:spPr>
-          <a:xfrm>
-            <a:off x="225017" y="992333"/>
-            <a:ext cx="6295703" cy="3642990"/>
-          </a:xfrm>
-          <a:prstGeom prst="rect">
-            <a:avLst/>
-          </a:prstGeom>
-        </p:spPr>
-      </p:pic>
-      <p:sp>
-        <p:nvSpPr>
-          <p:cNvPr id="6" name="TextBox 5">
-            <a:extLst>
-              <a:ext uri="{FF2B5EF4-FFF2-40B4-BE49-F238E27FC236}">
-                <a16:creationId xmlns:a16="http://schemas.microsoft.com/office/drawing/2014/main" id="{14290125-B712-E81F-6D3D-27FA95C1FC69}"/>
-              </a:ext>
-            </a:extLst>
-          </p:cNvPr>
-          <p:cNvSpPr txBox="1"/>
-          <p:nvPr/>
-        </p:nvSpPr>
-        <p:spPr>
-          <a:xfrm>
-            <a:off x="6625651" y="2068643"/>
-            <a:ext cx="2518349" cy="1384995"/>
-          </a:xfrm>
-          <a:prstGeom prst="rect">
-            <a:avLst/>
-          </a:prstGeom>
-          <a:noFill/>
-        </p:spPr>
-        <p:txBody>
-          <a:bodyPr wrap="square" rtlCol="0">
-            <a:spAutoFit/>
-          </a:bodyPr>
-          <a:lstStyle/>
-          <a:p>
-            <a:r>
-              <a:rPr lang="en-US" sz="1200" dirty="0"/>
-              <a:t>“Vaccine efficacy was estimated by 100×(1−IRR), where IRR is the calculated ratio of confirmed cases of Covid-19 illness per 1000 person-years of follow-up in the active vaccine group to the corresponding illness rate in the placebo group.”</a:t>
-            </a:r>
-          </a:p>
-        </p:txBody>
-      </p:sp>
-      <p:sp>
-        <p:nvSpPr>
-          <p:cNvPr id="7" name="TextBox 6">
-            <a:extLst>
-              <a:ext uri="{FF2B5EF4-FFF2-40B4-BE49-F238E27FC236}">
-                <a16:creationId xmlns:a16="http://schemas.microsoft.com/office/drawing/2014/main" id="{101F96AA-4C53-55FD-DF21-65998CC3721B}"/>
-              </a:ext>
-            </a:extLst>
-          </p:cNvPr>
-          <p:cNvSpPr txBox="1"/>
-          <p:nvPr/>
-        </p:nvSpPr>
-        <p:spPr>
-          <a:xfrm>
-            <a:off x="6250898" y="4866501"/>
-            <a:ext cx="2893102" cy="276999"/>
-          </a:xfrm>
-          <a:prstGeom prst="rect">
-            <a:avLst/>
-          </a:prstGeom>
-          <a:noFill/>
-        </p:spPr>
-        <p:txBody>
-          <a:bodyPr wrap="square" rtlCol="0">
-            <a:spAutoFit/>
-          </a:bodyPr>
-          <a:lstStyle/>
-          <a:p>
-            <a:pPr algn="r"/>
-            <a:r>
-              <a:rPr lang="en-US" sz="1200" dirty="0"/>
-              <a:t>(table from Polack et al., 2020)</a:t>
+              <a:t>Who will be included in the analysis? </a:t>
             </a:r>
           </a:p>
         </p:txBody>
@@ -10654,7 +10737,7 @@
     </p:spTree>
     <p:extLst>
       <p:ext uri="{BB962C8B-B14F-4D97-AF65-F5344CB8AC3E}">
-        <p14:creationId xmlns:p14="http://schemas.microsoft.com/office/powerpoint/2010/main" val="2090781208"/>
+        <p14:creationId xmlns:p14="http://schemas.microsoft.com/office/powerpoint/2010/main" val="409743916"/>
       </p:ext>
     </p:extLst>
   </p:cSld>
@@ -10686,7 +10769,7 @@
           <p:cNvPr id="3" name="Text Placeholder 2">
             <a:extLst>
               <a:ext uri="{FF2B5EF4-FFF2-40B4-BE49-F238E27FC236}">
-                <a16:creationId xmlns:a16="http://schemas.microsoft.com/office/drawing/2014/main" id="{EC2844C4-1939-10DD-53C7-DA00BA06E4A1}"/>
+                <a16:creationId xmlns:a16="http://schemas.microsoft.com/office/drawing/2014/main" id="{BA7E52C3-5863-4F81-9BE1-09C1BA1D9CB4}"/>
               </a:ext>
             </a:extLst>
           </p:cNvPr>
@@ -10704,442 +10787,111 @@
           <a:p>
             <a:r>
               <a:rPr lang="en-US" dirty="0"/>
-              <a:t>Phases of a clinical trial</a:t>
-            </a:r>
-          </a:p>
-        </p:txBody>
-      </p:sp>
-      <p:sp>
-        <p:nvSpPr>
-          <p:cNvPr id="4" name="Rounded Rectangle 3">
-            <a:extLst>
-              <a:ext uri="{FF2B5EF4-FFF2-40B4-BE49-F238E27FC236}">
-                <a16:creationId xmlns:a16="http://schemas.microsoft.com/office/drawing/2014/main" id="{EF717B57-8738-E5CF-862E-F91FD4E5D6F0}"/>
-              </a:ext>
-            </a:extLst>
-          </p:cNvPr>
-          <p:cNvSpPr/>
+              <a:t>Safety and Efficacy of the BNT162b2 mRNA Covid-19 Vaccine</a:t>
+            </a:r>
+          </a:p>
+          <a:p>
+            <a:endParaRPr lang="en-US" dirty="0"/>
+          </a:p>
+        </p:txBody>
+      </p:sp>
+      <p:pic>
+        <p:nvPicPr>
+          <p:cNvPr id="5" name="Picture 4" descr="Graphical user interface, application&#10;&#10;Description automatically generated">
+            <a:extLst>
+              <a:ext uri="{FF2B5EF4-FFF2-40B4-BE49-F238E27FC236}">
+                <a16:creationId xmlns:a16="http://schemas.microsoft.com/office/drawing/2014/main" id="{1190E429-A87E-CFD0-A866-A783F916C38A}"/>
+              </a:ext>
+            </a:extLst>
+          </p:cNvPr>
+          <p:cNvPicPr>
+            <a:picLocks noChangeAspect="1"/>
+          </p:cNvPicPr>
           <p:nvPr/>
-        </p:nvSpPr>
-        <p:spPr>
-          <a:xfrm>
-            <a:off x="456270" y="754856"/>
-            <a:ext cx="4046842" cy="1816894"/>
-          </a:xfrm>
-          <a:prstGeom prst="roundRect">
-            <a:avLst/>
-          </a:prstGeom>
-          <a:solidFill>
-            <a:srgbClr val="990000"/>
-          </a:solidFill>
-          <a:ln>
-            <a:solidFill>
-              <a:srgbClr val="990000"/>
-            </a:solidFill>
-          </a:ln>
-        </p:spPr>
-        <p:style>
-          <a:lnRef idx="2">
-            <a:schemeClr val="accent1">
-              <a:shade val="50000"/>
-            </a:schemeClr>
-          </a:lnRef>
-          <a:fillRef idx="1">
-            <a:schemeClr val="accent1"/>
-          </a:fillRef>
-          <a:effectRef idx="0">
-            <a:schemeClr val="accent1"/>
-          </a:effectRef>
-          <a:fontRef idx="minor">
-            <a:schemeClr val="lt1"/>
-          </a:fontRef>
-        </p:style>
-        <p:txBody>
-          <a:bodyPr rtlCol="0" anchor="ctr"/>
-          <a:lstStyle/>
-          <a:p>
-            <a:r>
-              <a:rPr lang="en-US" b="1" dirty="0">
-                <a:solidFill>
-                  <a:schemeClr val="bg1"/>
-                </a:solidFill>
-              </a:rPr>
-              <a:t>Phase I</a:t>
-            </a:r>
-            <a:r>
-              <a:rPr lang="en-US" dirty="0">
-                <a:solidFill>
-                  <a:schemeClr val="bg1"/>
-                </a:solidFill>
-              </a:rPr>
-              <a:t>: </a:t>
-            </a:r>
-          </a:p>
-          <a:p>
-            <a:pPr marL="285750" indent="-285750">
-              <a:buFont typeface="Arial" panose="020B0604020202020204" pitchFamily="34" charset="0"/>
-              <a:buChar char="•"/>
-            </a:pPr>
-            <a:r>
-              <a:rPr lang="en-US" dirty="0">
-                <a:solidFill>
-                  <a:schemeClr val="bg1"/>
-                </a:solidFill>
-              </a:rPr>
-              <a:t>Drug/treatment is tested for the first time</a:t>
-            </a:r>
-          </a:p>
-          <a:p>
-            <a:pPr marL="285750" indent="-285750">
-              <a:buFont typeface="Arial" panose="020B0604020202020204" pitchFamily="34" charset="0"/>
-              <a:buChar char="•"/>
-            </a:pPr>
-            <a:r>
-              <a:rPr lang="en-US" dirty="0">
-                <a:solidFill>
-                  <a:schemeClr val="bg1"/>
-                </a:solidFill>
-              </a:rPr>
-              <a:t>Small sample</a:t>
-            </a:r>
-          </a:p>
-          <a:p>
-            <a:pPr marL="285750" indent="-285750">
-              <a:buFont typeface="Arial" panose="020B0604020202020204" pitchFamily="34" charset="0"/>
-              <a:buChar char="•"/>
-            </a:pPr>
-            <a:r>
-              <a:rPr lang="en-US" dirty="0">
-                <a:solidFill>
-                  <a:schemeClr val="bg1"/>
-                </a:solidFill>
-              </a:rPr>
-              <a:t>Dose-finding</a:t>
-            </a:r>
-          </a:p>
-          <a:p>
-            <a:pPr marL="285750" indent="-285750">
-              <a:buFont typeface="Arial" panose="020B0604020202020204" pitchFamily="34" charset="0"/>
-              <a:buChar char="•"/>
-            </a:pPr>
-            <a:r>
-              <a:rPr lang="en-US" dirty="0">
-                <a:solidFill>
-                  <a:schemeClr val="bg1"/>
-                </a:solidFill>
-              </a:rPr>
-              <a:t>Learn about safety/side effects</a:t>
-            </a:r>
-          </a:p>
-        </p:txBody>
-      </p:sp>
-      <p:sp>
-        <p:nvSpPr>
-          <p:cNvPr id="5" name="Rounded Rectangle 4">
-            <a:extLst>
-              <a:ext uri="{FF2B5EF4-FFF2-40B4-BE49-F238E27FC236}">
-                <a16:creationId xmlns:a16="http://schemas.microsoft.com/office/drawing/2014/main" id="{A38A6991-81A8-C58A-AB56-3312CB2057BC}"/>
-              </a:ext>
-            </a:extLst>
-          </p:cNvPr>
-          <p:cNvSpPr/>
-          <p:nvPr/>
-        </p:nvSpPr>
-        <p:spPr>
-          <a:xfrm>
-            <a:off x="4571999" y="2656356"/>
-            <a:ext cx="4046839" cy="1759648"/>
-          </a:xfrm>
-          <a:prstGeom prst="roundRect">
-            <a:avLst/>
-          </a:prstGeom>
-          <a:solidFill>
-            <a:srgbClr val="990000"/>
-          </a:solidFill>
-          <a:ln>
-            <a:solidFill>
-              <a:srgbClr val="990000"/>
-            </a:solidFill>
-          </a:ln>
-        </p:spPr>
-        <p:style>
-          <a:lnRef idx="2">
-            <a:schemeClr val="accent1">
-              <a:shade val="50000"/>
-            </a:schemeClr>
-          </a:lnRef>
-          <a:fillRef idx="1">
-            <a:schemeClr val="accent1"/>
-          </a:fillRef>
-          <a:effectRef idx="0">
-            <a:schemeClr val="accent1"/>
-          </a:effectRef>
-          <a:fontRef idx="minor">
-            <a:schemeClr val="lt1"/>
-          </a:fontRef>
-        </p:style>
-        <p:txBody>
-          <a:bodyPr rtlCol="0" anchor="ctr"/>
-          <a:lstStyle/>
-          <a:p>
-            <a:r>
-              <a:rPr lang="en-US" b="1" dirty="0"/>
-              <a:t>Phase IV trials</a:t>
-            </a:r>
-            <a:r>
-              <a:rPr lang="en-US" dirty="0"/>
-              <a:t>: </a:t>
-            </a:r>
-          </a:p>
-          <a:p>
-            <a:pPr marL="285750" indent="-285750">
-              <a:buFont typeface="Arial" panose="020B0604020202020204" pitchFamily="34" charset="0"/>
-              <a:buChar char="•"/>
-            </a:pPr>
-            <a:r>
-              <a:rPr lang="en-US" sz="1500" dirty="0"/>
-              <a:t>After FDA approval</a:t>
-            </a:r>
-          </a:p>
-          <a:p>
-            <a:pPr marL="285750" indent="-285750">
-              <a:buFont typeface="Arial" panose="020B0604020202020204" pitchFamily="34" charset="0"/>
-              <a:buChar char="•"/>
-            </a:pPr>
-            <a:r>
-              <a:rPr lang="en-US" sz="1500" dirty="0"/>
-              <a:t>Identify or monitor longer-term/rare adverse effects </a:t>
-            </a:r>
-          </a:p>
-        </p:txBody>
-      </p:sp>
-      <p:sp>
-        <p:nvSpPr>
-          <p:cNvPr id="6" name="Rounded Rectangle 5">
-            <a:extLst>
-              <a:ext uri="{FF2B5EF4-FFF2-40B4-BE49-F238E27FC236}">
-                <a16:creationId xmlns:a16="http://schemas.microsoft.com/office/drawing/2014/main" id="{EFDA18F2-6667-1386-85D1-87488A14A253}"/>
-              </a:ext>
-            </a:extLst>
-          </p:cNvPr>
-          <p:cNvSpPr/>
-          <p:nvPr/>
-        </p:nvSpPr>
-        <p:spPr>
-          <a:xfrm>
-            <a:off x="456270" y="2656356"/>
-            <a:ext cx="4046842" cy="1816893"/>
-          </a:xfrm>
-          <a:prstGeom prst="roundRect">
-            <a:avLst/>
-          </a:prstGeom>
-          <a:solidFill>
-            <a:srgbClr val="990000"/>
-          </a:solidFill>
-          <a:ln>
-            <a:solidFill>
-              <a:srgbClr val="990000"/>
-            </a:solidFill>
-          </a:ln>
-        </p:spPr>
-        <p:style>
-          <a:lnRef idx="2">
-            <a:schemeClr val="accent1">
-              <a:shade val="50000"/>
-            </a:schemeClr>
-          </a:lnRef>
-          <a:fillRef idx="1">
-            <a:schemeClr val="accent1"/>
-          </a:fillRef>
-          <a:effectRef idx="0">
-            <a:schemeClr val="accent1"/>
-          </a:effectRef>
-          <a:fontRef idx="minor">
-            <a:schemeClr val="lt1"/>
-          </a:fontRef>
-        </p:style>
-        <p:txBody>
-          <a:bodyPr rtlCol="0" anchor="ctr"/>
-          <a:lstStyle/>
-          <a:p>
-            <a:r>
-              <a:rPr lang="en-US" b="1" dirty="0"/>
-              <a:t>Phase III trials</a:t>
-            </a:r>
-            <a:r>
-              <a:rPr lang="en-US" dirty="0"/>
-              <a:t>: </a:t>
-            </a:r>
-          </a:p>
-          <a:p>
-            <a:pPr marL="285750" indent="-285750">
-              <a:buFont typeface="Arial" panose="020B0604020202020204" pitchFamily="34" charset="0"/>
-              <a:buChar char="•"/>
-            </a:pPr>
-            <a:r>
-              <a:rPr lang="en-US" sz="1500" dirty="0"/>
-              <a:t>Large group of people</a:t>
-            </a:r>
-          </a:p>
-          <a:p>
-            <a:pPr marL="285750" indent="-285750">
-              <a:buFont typeface="Arial" panose="020B0604020202020204" pitchFamily="34" charset="0"/>
-              <a:buChar char="•"/>
-            </a:pPr>
-            <a:r>
-              <a:rPr lang="en-US" sz="1500" dirty="0"/>
-              <a:t>Confirm effectiveness</a:t>
-            </a:r>
-          </a:p>
-          <a:p>
-            <a:pPr marL="285750" indent="-285750">
-              <a:buFont typeface="Arial" panose="020B0604020202020204" pitchFamily="34" charset="0"/>
-              <a:buChar char="•"/>
-            </a:pPr>
-            <a:r>
-              <a:rPr lang="en-US" sz="1500" dirty="0"/>
-              <a:t>Monitor safety/side effects</a:t>
-            </a:r>
-          </a:p>
-          <a:p>
-            <a:pPr marL="285750" indent="-285750">
-              <a:buFont typeface="Arial" panose="020B0604020202020204" pitchFamily="34" charset="0"/>
-              <a:buChar char="•"/>
-            </a:pPr>
-            <a:r>
-              <a:rPr lang="en-US" sz="1500" dirty="0"/>
-              <a:t>Compare to standard of care</a:t>
-            </a:r>
-          </a:p>
-        </p:txBody>
-      </p:sp>
-      <p:sp>
-        <p:nvSpPr>
-          <p:cNvPr id="7" name="Rounded Rectangle 6">
-            <a:extLst>
-              <a:ext uri="{FF2B5EF4-FFF2-40B4-BE49-F238E27FC236}">
-                <a16:creationId xmlns:a16="http://schemas.microsoft.com/office/drawing/2014/main" id="{B34AF118-3403-E76B-5943-FC8B189A434C}"/>
-              </a:ext>
-            </a:extLst>
-          </p:cNvPr>
-          <p:cNvSpPr/>
-          <p:nvPr/>
-        </p:nvSpPr>
-        <p:spPr>
-          <a:xfrm>
-            <a:off x="4571999" y="758572"/>
-            <a:ext cx="4046840" cy="1844254"/>
-          </a:xfrm>
-          <a:prstGeom prst="roundRect">
-            <a:avLst/>
-          </a:prstGeom>
-          <a:solidFill>
-            <a:srgbClr val="990000"/>
-          </a:solidFill>
-          <a:ln>
-            <a:solidFill>
-              <a:srgbClr val="990000"/>
-            </a:solidFill>
-          </a:ln>
-        </p:spPr>
-        <p:style>
-          <a:lnRef idx="2">
-            <a:schemeClr val="accent1">
-              <a:shade val="50000"/>
-            </a:schemeClr>
-          </a:lnRef>
-          <a:fillRef idx="1">
-            <a:schemeClr val="accent1"/>
-          </a:fillRef>
-          <a:effectRef idx="0">
-            <a:schemeClr val="accent1"/>
-          </a:effectRef>
-          <a:fontRef idx="minor">
-            <a:schemeClr val="lt1"/>
-          </a:fontRef>
-        </p:style>
-        <p:txBody>
-          <a:bodyPr rtlCol="0" anchor="ctr"/>
-          <a:lstStyle/>
-          <a:p>
-            <a:r>
-              <a:rPr lang="en-US" b="1" dirty="0"/>
-              <a:t>Phase II trials</a:t>
-            </a:r>
-            <a:r>
-              <a:rPr lang="en-US" dirty="0"/>
-              <a:t>: </a:t>
-            </a:r>
-          </a:p>
-          <a:p>
-            <a:pPr marL="285750" indent="-285750">
-              <a:buFont typeface="Arial" panose="020B0604020202020204" pitchFamily="34" charset="0"/>
-              <a:buChar char="•"/>
-            </a:pPr>
-            <a:r>
-              <a:rPr lang="en-US" dirty="0"/>
-              <a:t>Safety &amp; possible efficacy</a:t>
-            </a:r>
-          </a:p>
-          <a:p>
-            <a:pPr marL="285750" indent="-285750">
-              <a:buFont typeface="Arial" panose="020B0604020202020204" pitchFamily="34" charset="0"/>
-              <a:buChar char="•"/>
-            </a:pPr>
-            <a:r>
-              <a:rPr lang="en-US" dirty="0"/>
-              <a:t>Larger sample size than Phase I trials</a:t>
-            </a:r>
-          </a:p>
-        </p:txBody>
-      </p:sp>
-      <p:sp>
-        <p:nvSpPr>
-          <p:cNvPr id="9" name="Rectangle 8">
-            <a:extLst>
-              <a:ext uri="{FF2B5EF4-FFF2-40B4-BE49-F238E27FC236}">
-                <a16:creationId xmlns:a16="http://schemas.microsoft.com/office/drawing/2014/main" id="{E3181169-6465-D095-0607-14210B9FCAE4}"/>
-              </a:ext>
-            </a:extLst>
-          </p:cNvPr>
-          <p:cNvSpPr/>
-          <p:nvPr/>
-        </p:nvSpPr>
-        <p:spPr>
-          <a:xfrm>
-            <a:off x="4091940" y="4883944"/>
-            <a:ext cx="5052059" cy="246221"/>
+        </p:nvPicPr>
+        <p:blipFill>
+          <a:blip r:embed="rId2"/>
+          <a:stretch>
+            <a:fillRect/>
+          </a:stretch>
+        </p:blipFill>
+        <p:spPr>
+          <a:xfrm>
+            <a:off x="225017" y="992333"/>
+            <a:ext cx="6295703" cy="3642990"/>
           </a:xfrm>
           <a:prstGeom prst="rect">
             <a:avLst/>
           </a:prstGeom>
         </p:spPr>
-        <p:txBody>
-          <a:bodyPr wrap="square">
+      </p:pic>
+      <p:sp>
+        <p:nvSpPr>
+          <p:cNvPr id="6" name="TextBox 5">
+            <a:extLst>
+              <a:ext uri="{FF2B5EF4-FFF2-40B4-BE49-F238E27FC236}">
+                <a16:creationId xmlns:a16="http://schemas.microsoft.com/office/drawing/2014/main" id="{14290125-B712-E81F-6D3D-27FA95C1FC69}"/>
+              </a:ext>
+            </a:extLst>
+          </p:cNvPr>
+          <p:cNvSpPr txBox="1"/>
+          <p:nvPr/>
+        </p:nvSpPr>
+        <p:spPr>
+          <a:xfrm>
+            <a:off x="6625651" y="2068643"/>
+            <a:ext cx="2518349" cy="1384995"/>
+          </a:xfrm>
+          <a:prstGeom prst="rect">
+            <a:avLst/>
+          </a:prstGeom>
+          <a:noFill/>
+        </p:spPr>
+        <p:txBody>
+          <a:bodyPr wrap="square" rtlCol="0">
             <a:spAutoFit/>
           </a:bodyPr>
           <a:lstStyle/>
           <a:p>
+            <a:r>
+              <a:rPr lang="en-US" sz="1200" dirty="0"/>
+              <a:t>“Vaccine efficacy was estimated by 100×(1−IRR), where IRR is the calculated ratio of confirmed cases of Covid-19 illness per 1000 person-years of follow-up in the active vaccine group to the corresponding illness rate in the placebo group.”</a:t>
+            </a:r>
+          </a:p>
+        </p:txBody>
+      </p:sp>
+      <p:sp>
+        <p:nvSpPr>
+          <p:cNvPr id="7" name="TextBox 6">
+            <a:extLst>
+              <a:ext uri="{FF2B5EF4-FFF2-40B4-BE49-F238E27FC236}">
+                <a16:creationId xmlns:a16="http://schemas.microsoft.com/office/drawing/2014/main" id="{101F96AA-4C53-55FD-DF21-65998CC3721B}"/>
+              </a:ext>
+            </a:extLst>
+          </p:cNvPr>
+          <p:cNvSpPr txBox="1"/>
+          <p:nvPr/>
+        </p:nvSpPr>
+        <p:spPr>
+          <a:xfrm>
+            <a:off x="6250898" y="4866501"/>
+            <a:ext cx="2893102" cy="276999"/>
+          </a:xfrm>
+          <a:prstGeom prst="rect">
+            <a:avLst/>
+          </a:prstGeom>
+          <a:noFill/>
+        </p:spPr>
+        <p:txBody>
+          <a:bodyPr wrap="square" rtlCol="0">
+            <a:spAutoFit/>
+          </a:bodyPr>
+          <a:lstStyle/>
+          <a:p>
             <a:pPr algn="r"/>
             <a:r>
-              <a:rPr lang="en-US" sz="1000" dirty="0"/>
-              <a:t>(Mack, 2019; https://</a:t>
-            </a:r>
-            <a:r>
-              <a:rPr lang="en-US" sz="1000" dirty="0" err="1"/>
-              <a:t>www.nih.gov</a:t>
-            </a:r>
-            <a:r>
-              <a:rPr lang="en-US" sz="1000" dirty="0"/>
-              <a:t>/health-information/</a:t>
-            </a:r>
-            <a:r>
-              <a:rPr lang="en-US" sz="1000" dirty="0" err="1"/>
-              <a:t>nih</a:t>
-            </a:r>
-            <a:r>
-              <a:rPr lang="en-US" sz="1000" dirty="0"/>
-              <a:t>-clinical-research-trials-you/basics)</a:t>
+              <a:rPr lang="en-US" sz="1200" dirty="0"/>
+              <a:t>(table from Polack et al., 2020)</a:t>
             </a:r>
           </a:p>
         </p:txBody>
@@ -11147,7 +10899,7 @@
     </p:spTree>
     <p:extLst>
       <p:ext uri="{BB962C8B-B14F-4D97-AF65-F5344CB8AC3E}">
-        <p14:creationId xmlns:p14="http://schemas.microsoft.com/office/powerpoint/2010/main" val="726716187"/>
+        <p14:creationId xmlns:p14="http://schemas.microsoft.com/office/powerpoint/2010/main" val="2090781208"/>
       </p:ext>
     </p:extLst>
   </p:cSld>
@@ -11427,7 +11179,7 @@
             <a:avLst/>
           </a:prstGeom>
           <a:solidFill>
-            <a:srgbClr val="0070C0"/>
+            <a:srgbClr val="990000"/>
           </a:solidFill>
           <a:ln>
             <a:solidFill>
@@ -11527,7 +11279,7 @@
             <a:avLst/>
           </a:prstGeom>
           <a:solidFill>
-            <a:srgbClr val="0070C0"/>
+            <a:srgbClr val="990000"/>
           </a:solidFill>
           <a:ln>
             <a:solidFill>
@@ -11600,8 +11352,8 @@
         </p:nvSpPr>
         <p:spPr>
           <a:xfrm>
-            <a:off x="4152900" y="4883944"/>
-            <a:ext cx="4991099" cy="246221"/>
+            <a:off x="4091940" y="4883944"/>
+            <a:ext cx="5052059" cy="246221"/>
           </a:xfrm>
           <a:prstGeom prst="rect">
             <a:avLst/>
@@ -11640,7 +11392,7 @@
     </p:spTree>
     <p:extLst>
       <p:ext uri="{BB962C8B-B14F-4D97-AF65-F5344CB8AC3E}">
-        <p14:creationId xmlns:p14="http://schemas.microsoft.com/office/powerpoint/2010/main" val="1817148906"/>
+        <p14:creationId xmlns:p14="http://schemas.microsoft.com/office/powerpoint/2010/main" val="726716187"/>
       </p:ext>
     </p:extLst>
   </p:cSld>
@@ -12248,119 +12000,10 @@
       </p:grpSpPr>
       <p:sp>
         <p:nvSpPr>
-          <p:cNvPr id="2" name="Text Placeholder 1">
-            <a:extLst>
-              <a:ext uri="{FF2B5EF4-FFF2-40B4-BE49-F238E27FC236}">
-                <a16:creationId xmlns:a16="http://schemas.microsoft.com/office/drawing/2014/main" id="{1E892A4E-B038-CC23-E656-D2CA82911C40}"/>
-              </a:ext>
-            </a:extLst>
-          </p:cNvPr>
-          <p:cNvSpPr>
-            <a:spLocks noGrp="1"/>
-          </p:cNvSpPr>
-          <p:nvPr>
-            <p:ph type="body" sz="quarter" idx="10"/>
-          </p:nvPr>
-        </p:nvSpPr>
-        <p:spPr/>
-        <p:txBody>
-          <a:bodyPr>
-            <a:normAutofit/>
-          </a:bodyPr>
-          <a:lstStyle/>
-          <a:p>
-            <a:r>
-              <a:rPr lang="en-US" dirty="0"/>
-              <a:t>Statement of ethical principles for medical research involving human subjects</a:t>
-            </a:r>
-          </a:p>
-          <a:p>
-            <a:pPr marL="285750" indent="-285750">
-              <a:buFont typeface="Arial" panose="020B0604020202020204" pitchFamily="34" charset="0"/>
-              <a:buChar char="•"/>
-            </a:pPr>
-            <a:r>
-              <a:rPr lang="en-US" dirty="0"/>
-              <a:t>Risks, burdens, and benefits</a:t>
-            </a:r>
-          </a:p>
-          <a:p>
-            <a:pPr marL="800100" lvl="1" indent="-285750"/>
-            <a:r>
-              <a:rPr lang="en-US" dirty="0">
-                <a:solidFill>
-                  <a:schemeClr val="tx1"/>
-                </a:solidFill>
-              </a:rPr>
-              <a:t>Benefits must outweigh the risks/burdens to research subjects</a:t>
-            </a:r>
-          </a:p>
-          <a:p>
-            <a:pPr marL="800100" lvl="1" indent="-285750"/>
-            <a:r>
-              <a:rPr lang="en-US" dirty="0">
-                <a:solidFill>
-                  <a:schemeClr val="tx1"/>
-                </a:solidFill>
-              </a:rPr>
-              <a:t>Minimize risk to participants</a:t>
-            </a:r>
-          </a:p>
-          <a:p>
-            <a:pPr marL="800100" lvl="1" indent="-285750"/>
-            <a:r>
-              <a:rPr lang="en-US" dirty="0">
-                <a:solidFill>
-                  <a:schemeClr val="tx1"/>
-                </a:solidFill>
-              </a:rPr>
-              <a:t>When the risks are found to outweigh the benefits, or have a clear answer, must determine whether to stop the study</a:t>
-            </a:r>
-          </a:p>
-          <a:p>
-            <a:pPr marL="285750" indent="-285750">
-              <a:buFont typeface="Arial" panose="020B0604020202020204" pitchFamily="34" charset="0"/>
-              <a:buChar char="•"/>
-            </a:pPr>
-            <a:r>
-              <a:rPr lang="en-US" dirty="0">
-                <a:solidFill>
-                  <a:schemeClr val="tx1"/>
-                </a:solidFill>
-              </a:rPr>
-              <a:t>Vulnerable populations</a:t>
-            </a:r>
-          </a:p>
-          <a:p>
-            <a:pPr marL="800100" lvl="1" indent="-285750"/>
-            <a:r>
-              <a:rPr lang="en-US" dirty="0">
-                <a:solidFill>
-                  <a:schemeClr val="tx1"/>
-                </a:solidFill>
-              </a:rPr>
-              <a:t>Should receive specifically considered protection</a:t>
-            </a:r>
-          </a:p>
-          <a:p>
-            <a:pPr marL="800100" lvl="1" indent="-285750"/>
-            <a:r>
-              <a:rPr lang="en-US" dirty="0">
-                <a:solidFill>
-                  <a:schemeClr val="tx1"/>
-                </a:solidFill>
-              </a:rPr>
-              <a:t>Research in vulnerable populations only allowed if the question cannot be answered by studying other populations</a:t>
-            </a:r>
-          </a:p>
-        </p:txBody>
-      </p:sp>
-      <p:sp>
-        <p:nvSpPr>
           <p:cNvPr id="3" name="Text Placeholder 2">
             <a:extLst>
               <a:ext uri="{FF2B5EF4-FFF2-40B4-BE49-F238E27FC236}">
-                <a16:creationId xmlns:a16="http://schemas.microsoft.com/office/drawing/2014/main" id="{3A7D3147-08B9-8C6F-D428-E47A37D84B72}"/>
+                <a16:creationId xmlns:a16="http://schemas.microsoft.com/office/drawing/2014/main" id="{6882ED70-A315-E49C-F4CC-423586EE39F6}"/>
               </a:ext>
             </a:extLst>
           </p:cNvPr>
@@ -12371,57 +12014,20 @@
             <p:ph type="body" sz="quarter" idx="11"/>
           </p:nvPr>
         </p:nvSpPr>
-        <p:spPr/>
+        <p:spPr>
+          <a:xfrm>
+            <a:off x="456270" y="1954349"/>
+            <a:ext cx="8231459" cy="990600"/>
+          </a:xfrm>
+        </p:spPr>
         <p:txBody>
           <a:bodyPr/>
           <a:lstStyle/>
           <a:p>
-            <a:r>
-              <a:rPr lang="en-US" dirty="0"/>
-              <a:t>Ethical Principles for Medical Research Involving Human Subjects: World Medical Association Declaration of Helsinki (summary of main concepts)</a:t>
-            </a:r>
-          </a:p>
-        </p:txBody>
-      </p:sp>
-      <p:sp>
-        <p:nvSpPr>
-          <p:cNvPr id="4" name="TextBox 3">
-            <a:extLst>
-              <a:ext uri="{FF2B5EF4-FFF2-40B4-BE49-F238E27FC236}">
-                <a16:creationId xmlns:a16="http://schemas.microsoft.com/office/drawing/2014/main" id="{A3B37706-9E12-A126-48D4-389F77A28C9E}"/>
-              </a:ext>
-            </a:extLst>
-          </p:cNvPr>
-          <p:cNvSpPr txBox="1"/>
-          <p:nvPr/>
-        </p:nvSpPr>
-        <p:spPr>
-          <a:xfrm>
-            <a:off x="4774367" y="4616970"/>
-            <a:ext cx="4369633" cy="461665"/>
-          </a:xfrm>
-          <a:prstGeom prst="rect">
-            <a:avLst/>
-          </a:prstGeom>
-          <a:noFill/>
-        </p:spPr>
-        <p:txBody>
-          <a:bodyPr wrap="square" rtlCol="0">
-            <a:spAutoFit/>
-          </a:bodyPr>
-          <a:lstStyle/>
-          <a:p>
-            <a:r>
-              <a:rPr lang="en-US" sz="1200" dirty="0"/>
-              <a:t>https://</a:t>
-            </a:r>
-            <a:r>
-              <a:rPr lang="en-US" sz="1200" dirty="0" err="1"/>
-              <a:t>www.wma.net</a:t>
-            </a:r>
-            <a:r>
-              <a:rPr lang="en-US" sz="1200" dirty="0"/>
-              <a:t>/policies-post/wma-declaration-of-helsinki-ethical-principles-for-medical-research-involving-human-subjects/</a:t>
+            <a:pPr algn="ctr"/>
+            <a:r>
+              <a:rPr lang="en-US" dirty="0"/>
+              <a:t>Ethical Principles and Considerations for Clinical Trials</a:t>
             </a:r>
           </a:p>
         </p:txBody>
@@ -12429,7 +12035,7 @@
     </p:spTree>
     <p:extLst>
       <p:ext uri="{BB962C8B-B14F-4D97-AF65-F5344CB8AC3E}">
-        <p14:creationId xmlns:p14="http://schemas.microsoft.com/office/powerpoint/2010/main" val="3009224310"/>
+        <p14:creationId xmlns:p14="http://schemas.microsoft.com/office/powerpoint/2010/main" val="66399186"/>
       </p:ext>
     </p:extLst>
   </p:cSld>
@@ -12895,15 +12501,10 @@
             <p:ph type="body" sz="quarter" idx="10"/>
           </p:nvPr>
         </p:nvSpPr>
-        <p:spPr>
-          <a:xfrm>
-            <a:off x="456271" y="1358503"/>
-            <a:ext cx="8231459" cy="3355903"/>
-          </a:xfrm>
-        </p:spPr>
+        <p:spPr/>
         <p:txBody>
           <a:bodyPr>
-            <a:normAutofit fontScale="85000" lnSpcReduction="20000"/>
+            <a:normAutofit/>
           </a:bodyPr>
           <a:lstStyle/>
           <a:p>
@@ -12919,7 +12520,7 @@
             </a:pPr>
             <a:r>
               <a:rPr lang="en-US" dirty="0"/>
-              <a:t>Scientific Requirements and Research Protocols</a:t>
+              <a:t>Risks, burdens, and benefits</a:t>
             </a:r>
           </a:p>
           <a:p>
@@ -12930,17 +12531,7 @@
                   <a:schemeClr val="tx1"/>
                 </a:solidFill>
               </a:rPr>
-              <a:t>There must be scientific rationale for conducting the study</a:t>
-            </a:r>
-          </a:p>
-          <a:p>
-            <a:pPr marL="285750" indent="-285750">
-              <a:buFont typeface="Arial" panose="020B0604020202020204" pitchFamily="34" charset="0"/>
-              <a:buChar char="•"/>
-            </a:pPr>
-            <a:r>
-              <a:rPr lang="en-US" dirty="0"/>
-              <a:t>Research Ethics Committees</a:t>
+              <a:t>Benefits must outweigh the risks/burdens to research subjects</a:t>
             </a:r>
           </a:p>
           <a:p>
@@ -12951,7 +12542,7 @@
                   <a:schemeClr val="tx1"/>
                 </a:solidFill>
               </a:rPr>
-              <a:t>The protocol must be reviewed and approved by independent research ethics committee</a:t>
+              <a:t>Minimize risk to participants</a:t>
             </a:r>
           </a:p>
           <a:p>
@@ -12962,7 +12553,7 @@
                   <a:schemeClr val="tx1"/>
                 </a:solidFill>
               </a:rPr>
-              <a:t>An independent committee will monitor the study, and any changes must be approved by the committee</a:t>
+              <a:t>When the risks are found to outweigh the benefits, or have a clear answer, must determine whether to stop the study</a:t>
             </a:r>
           </a:p>
           <a:p>
@@ -12976,11 +12567,7 @@
                   <a:schemeClr val="tx1"/>
                 </a:solidFill>
               </a:rPr>
-              <a:t>Info</a:t>
-            </a:r>
-            <a:r>
-              <a:rPr lang="en-US" dirty="0"/>
-              <a:t>rmed Consent</a:t>
+              <a:t>Vulnerable populations</a:t>
             </a:r>
           </a:p>
           <a:p>
@@ -12991,7 +12578,7 @@
                   <a:schemeClr val="tx1"/>
                 </a:solidFill>
               </a:rPr>
-              <a:t>Participation is voluntary and consent can be withdrawn at any point</a:t>
+              <a:t>Should receive specifically considered protection</a:t>
             </a:r>
           </a:p>
           <a:p>
@@ -13002,41 +12589,8 @@
                   <a:schemeClr val="tx1"/>
                 </a:solidFill>
               </a:rPr>
-              <a:t>Participants must be informed of the study aims, potential benefits/risks</a:t>
-            </a:r>
-          </a:p>
-          <a:p>
-            <a:pPr marL="285750" indent="-285750">
-              <a:buFont typeface="Arial" panose="020B0604020202020204" pitchFamily="34" charset="0"/>
-              <a:buChar char="•"/>
-            </a:pPr>
-            <a:r>
-              <a:rPr lang="en-US" dirty="0">
-                <a:solidFill>
-                  <a:schemeClr val="tx1"/>
-                </a:solidFill>
-              </a:rPr>
-              <a:t>Use of a placebo</a:t>
-            </a:r>
-          </a:p>
-          <a:p>
-            <a:pPr marL="800100" lvl="1" indent="-285750"/>
-            <a:r>
-              <a:rPr lang="en-US" dirty="0">
-                <a:solidFill>
-                  <a:schemeClr val="tx1"/>
-                </a:solidFill>
-              </a:rPr>
-              <a:t>Standard of care should be used unless no treatments are available, in which case placebo can be used</a:t>
-            </a:r>
-          </a:p>
-          <a:p>
-            <a:pPr marL="285750" indent="-285750"/>
-            <a:endParaRPr lang="en-US" dirty="0">
-              <a:solidFill>
-                <a:schemeClr val="tx1"/>
-              </a:solidFill>
-            </a:endParaRPr>
+              <a:t>Research in vulnerable populations only allowed if the question cannot be answered by studying other populations</a:t>
+            </a:r>
           </a:p>
         </p:txBody>
       </p:sp>
@@ -13070,27 +12624,28 @@
       </p:sp>
       <p:sp>
         <p:nvSpPr>
-          <p:cNvPr id="4" name="Rectangle 3">
-            <a:extLst>
-              <a:ext uri="{FF2B5EF4-FFF2-40B4-BE49-F238E27FC236}">
-                <a16:creationId xmlns:a16="http://schemas.microsoft.com/office/drawing/2014/main" id="{2C8D9A14-A3FD-D609-0048-F9DE29FFB67E}"/>
-              </a:ext>
-            </a:extLst>
-          </p:cNvPr>
-          <p:cNvSpPr/>
+          <p:cNvPr id="4" name="TextBox 3">
+            <a:extLst>
+              <a:ext uri="{FF2B5EF4-FFF2-40B4-BE49-F238E27FC236}">
+                <a16:creationId xmlns:a16="http://schemas.microsoft.com/office/drawing/2014/main" id="{A3B37706-9E12-A126-48D4-389F77A28C9E}"/>
+              </a:ext>
+            </a:extLst>
+          </p:cNvPr>
+          <p:cNvSpPr txBox="1"/>
           <p:nvPr/>
         </p:nvSpPr>
         <p:spPr>
           <a:xfrm>
-            <a:off x="4834329" y="4653111"/>
-            <a:ext cx="4572000" cy="461665"/>
+            <a:off x="4774367" y="4616970"/>
+            <a:ext cx="4369633" cy="461665"/>
           </a:xfrm>
           <a:prstGeom prst="rect">
             <a:avLst/>
           </a:prstGeom>
-        </p:spPr>
-        <p:txBody>
-          <a:bodyPr>
+          <a:noFill/>
+        </p:spPr>
+        <p:txBody>
+          <a:bodyPr wrap="square" rtlCol="0">
             <a:spAutoFit/>
           </a:bodyPr>
           <a:lstStyle/>
@@ -13113,7 +12668,7 @@
     </p:spTree>
     <p:extLst>
       <p:ext uri="{BB962C8B-B14F-4D97-AF65-F5344CB8AC3E}">
-        <p14:creationId xmlns:p14="http://schemas.microsoft.com/office/powerpoint/2010/main" val="2626254820"/>
+        <p14:creationId xmlns:p14="http://schemas.microsoft.com/office/powerpoint/2010/main" val="3009224310"/>
       </p:ext>
     </p:extLst>
   </p:cSld>
@@ -13145,7 +12700,7 @@
           <p:cNvPr id="2" name="Text Placeholder 1">
             <a:extLst>
               <a:ext uri="{FF2B5EF4-FFF2-40B4-BE49-F238E27FC236}">
-                <a16:creationId xmlns:a16="http://schemas.microsoft.com/office/drawing/2014/main" id="{AE105867-4D72-80D5-C39D-11E4547D8556}"/>
+                <a16:creationId xmlns:a16="http://schemas.microsoft.com/office/drawing/2014/main" id="{1E892A4E-B038-CC23-E656-D2CA82911C40}"/>
               </a:ext>
             </a:extLst>
           </p:cNvPr>
@@ -13156,12 +12711,23 @@
             <p:ph type="body" sz="quarter" idx="10"/>
           </p:nvPr>
         </p:nvSpPr>
-        <p:spPr/>
+        <p:spPr>
+          <a:xfrm>
+            <a:off x="456271" y="1358503"/>
+            <a:ext cx="8231459" cy="3355903"/>
+          </a:xfrm>
+        </p:spPr>
         <p:txBody>
           <a:bodyPr>
-            <a:normAutofit fontScale="92500" lnSpcReduction="20000"/>
+            <a:normAutofit fontScale="85000" lnSpcReduction="20000"/>
           </a:bodyPr>
           <a:lstStyle/>
+          <a:p>
+            <a:r>
+              <a:rPr lang="en-US" dirty="0"/>
+              <a:t>Statement of ethical principles for medical research involving human subjects</a:t>
+            </a:r>
+          </a:p>
           <a:p>
             <a:pPr marL="285750" indent="-285750">
               <a:buFont typeface="Arial" panose="020B0604020202020204" pitchFamily="34" charset="0"/>
@@ -13169,25 +12735,7 @@
             </a:pPr>
             <a:r>
               <a:rPr lang="en-US" dirty="0"/>
-              <a:t>Children cannot give informed consent until they are at least 18 years old</a:t>
-            </a:r>
-          </a:p>
-          <a:p>
-            <a:pPr marL="285750" indent="-285750">
-              <a:buFont typeface="Arial" panose="020B0604020202020204" pitchFamily="34" charset="0"/>
-              <a:buChar char="•"/>
-            </a:pPr>
-            <a:r>
-              <a:rPr lang="en-US" b="1" dirty="0">
-                <a:solidFill>
-                  <a:srgbClr val="990000"/>
-                </a:solidFill>
-              </a:rPr>
-              <a:t>Assent</a:t>
-            </a:r>
-            <a:r>
-              <a:rPr lang="en-US" dirty="0"/>
-              <a:t> is required for children under 18 years of age except in special circumstance (e.g. the child is not old enough to understand the trial and what will be asked of them)</a:t>
+              <a:t>Scientific Requirements and Research Protocols</a:t>
             </a:r>
           </a:p>
           <a:p>
@@ -13198,7 +12746,17 @@
                   <a:schemeClr val="tx1"/>
                 </a:solidFill>
               </a:rPr>
-              <a:t>Child agrees to take part in the trial</a:t>
+              <a:t>There must be scientific rationale for conducting the study</a:t>
+            </a:r>
+          </a:p>
+          <a:p>
+            <a:pPr marL="285750" indent="-285750">
+              <a:buFont typeface="Arial" panose="020B0604020202020204" pitchFamily="34" charset="0"/>
+              <a:buChar char="•"/>
+            </a:pPr>
+            <a:r>
+              <a:rPr lang="en-US" dirty="0"/>
+              <a:t>Research Ethics Committees</a:t>
             </a:r>
           </a:p>
           <a:p>
@@ -13209,36 +12767,92 @@
                   <a:schemeClr val="tx1"/>
                 </a:solidFill>
               </a:rPr>
-              <a:t>Several sessions may be required to help the child understand what will be asked of them</a:t>
-            </a:r>
-          </a:p>
-          <a:p>
-            <a:pPr marL="285750" indent="-285750">
-              <a:buFont typeface="Arial" panose="020B0604020202020204" pitchFamily="34" charset="0"/>
-              <a:buChar char="•"/>
-            </a:pPr>
+              <a:t>The protocol must be reviewed and approved by independent research ethics committee</a:t>
+            </a:r>
+          </a:p>
+          <a:p>
+            <a:pPr marL="800100" lvl="1" indent="-285750"/>
             <a:r>
               <a:rPr lang="en-US" dirty="0">
                 <a:solidFill>
                   <a:schemeClr val="tx1"/>
                 </a:solidFill>
               </a:rPr>
-              <a:t>Both parents must give their permission for the child to participate in the trial (with some exceptions)</a:t>
+              <a:t>An independent committee will monitor the study, and any changes must be approved by the committee</a:t>
+            </a:r>
+          </a:p>
+          <a:p>
+            <a:pPr marL="285750" indent="-285750">
+              <a:buFont typeface="Arial" panose="020B0604020202020204" pitchFamily="34" charset="0"/>
+              <a:buChar char="•"/>
+            </a:pPr>
+            <a:r>
+              <a:rPr lang="en-US" dirty="0">
+                <a:solidFill>
+                  <a:schemeClr val="tx1"/>
+                </a:solidFill>
+              </a:rPr>
+              <a:t>Info</a:t>
+            </a:r>
+            <a:r>
+              <a:rPr lang="en-US" dirty="0"/>
+              <a:t>rmed Consent</a:t>
             </a:r>
           </a:p>
           <a:p>
             <a:pPr marL="800100" lvl="1" indent="-285750"/>
-            <a:endParaRPr lang="en-US" dirty="0"/>
+            <a:r>
+              <a:rPr lang="en-US" dirty="0">
+                <a:solidFill>
+                  <a:schemeClr val="tx1"/>
+                </a:solidFill>
+              </a:rPr>
+              <a:t>Participation is voluntary and consent can be withdrawn at any point</a:t>
+            </a:r>
           </a:p>
           <a:p>
             <a:pPr marL="800100" lvl="1" indent="-285750"/>
-            <a:endParaRPr lang="en-US" dirty="0"/>
-          </a:p>
-          <a:p>
-            <a:br>
-              <a:rPr lang="en-US" dirty="0"/>
-            </a:br>
-            <a:endParaRPr lang="en-US" dirty="0"/>
+            <a:r>
+              <a:rPr lang="en-US" dirty="0">
+                <a:solidFill>
+                  <a:schemeClr val="tx1"/>
+                </a:solidFill>
+              </a:rPr>
+              <a:t>Participants must be informed of the study aims, potential benefits/risks</a:t>
+            </a:r>
+          </a:p>
+          <a:p>
+            <a:pPr marL="285750" indent="-285750">
+              <a:buFont typeface="Arial" panose="020B0604020202020204" pitchFamily="34" charset="0"/>
+              <a:buChar char="•"/>
+            </a:pPr>
+            <a:r>
+              <a:rPr lang="en-US" dirty="0">
+                <a:solidFill>
+                  <a:schemeClr val="tx1"/>
+                </a:solidFill>
+              </a:rPr>
+              <a:t>Use of a placebo</a:t>
+            </a:r>
+          </a:p>
+          <a:p>
+            <a:pPr marL="800100" lvl="1" indent="-285750"/>
+            <a:r>
+              <a:rPr lang="en-US" dirty="0">
+                <a:solidFill>
+                  <a:schemeClr val="tx1"/>
+                </a:solidFill>
+              </a:rPr>
+              <a:t>Standard of care should be used unless no treatments are available, in which case placebo can be used</a:t>
+            </a:r>
+          </a:p>
+          <a:p>
+            <a:pPr marL="285750" indent="-285750"/>
+            <a:endParaRPr lang="en-US" dirty="0">
+              <a:solidFill>
+                <a:schemeClr val="tx1"/>
+              </a:solidFill>
+            </a:endParaRPr>
           </a:p>
         </p:txBody>
       </p:sp>
@@ -13247,7 +12861,7 @@
           <p:cNvPr id="3" name="Text Placeholder 2">
             <a:extLst>
               <a:ext uri="{FF2B5EF4-FFF2-40B4-BE49-F238E27FC236}">
-                <a16:creationId xmlns:a16="http://schemas.microsoft.com/office/drawing/2014/main" id="{838630DB-DB0B-2151-5F33-DD0A1CD16884}"/>
+                <a16:creationId xmlns:a16="http://schemas.microsoft.com/office/drawing/2014/main" id="{3A7D3147-08B9-8C6F-D428-E47A37D84B72}"/>
               </a:ext>
             </a:extLst>
           </p:cNvPr>
@@ -13265,42 +12879,49 @@
           <a:p>
             <a:r>
               <a:rPr lang="en-US" dirty="0"/>
-              <a:t>Clinical Trials in Pediatric Patients</a:t>
-            </a:r>
-          </a:p>
-        </p:txBody>
-      </p:sp>
-      <p:sp>
-        <p:nvSpPr>
-          <p:cNvPr id="4" name="TextBox 3">
-            <a:extLst>
-              <a:ext uri="{FF2B5EF4-FFF2-40B4-BE49-F238E27FC236}">
-                <a16:creationId xmlns:a16="http://schemas.microsoft.com/office/drawing/2014/main" id="{C2D91A0F-F106-4531-9F92-CD4A4090703B}"/>
-              </a:ext>
-            </a:extLst>
-          </p:cNvPr>
-          <p:cNvSpPr txBox="1"/>
+              <a:t>Ethical Principles for Medical Research Involving Human Subjects: World Medical Association Declaration of Helsinki (summary of main concepts)</a:t>
+            </a:r>
+          </a:p>
+        </p:txBody>
+      </p:sp>
+      <p:sp>
+        <p:nvSpPr>
+          <p:cNvPr id="4" name="Rectangle 3">
+            <a:extLst>
+              <a:ext uri="{FF2B5EF4-FFF2-40B4-BE49-F238E27FC236}">
+                <a16:creationId xmlns:a16="http://schemas.microsoft.com/office/drawing/2014/main" id="{2C8D9A14-A3FD-D609-0048-F9DE29FFB67E}"/>
+              </a:ext>
+            </a:extLst>
+          </p:cNvPr>
+          <p:cNvSpPr/>
           <p:nvPr/>
         </p:nvSpPr>
         <p:spPr>
           <a:xfrm>
-            <a:off x="7383780" y="4866501"/>
-            <a:ext cx="1830950" cy="276999"/>
+            <a:off x="4834329" y="4653111"/>
+            <a:ext cx="4572000" cy="461665"/>
           </a:xfrm>
           <a:prstGeom prst="rect">
             <a:avLst/>
           </a:prstGeom>
-          <a:noFill/>
-        </p:spPr>
-        <p:txBody>
-          <a:bodyPr wrap="none" rtlCol="0">
+        </p:spPr>
+        <p:txBody>
+          <a:bodyPr>
             <a:spAutoFit/>
           </a:bodyPr>
           <a:lstStyle/>
           <a:p>
             <a:r>
               <a:rPr lang="en-US" sz="1200" dirty="0"/>
-              <a:t>(National Cancer Institute)</a:t>
+              <a:t>https://</a:t>
+            </a:r>
+            <a:r>
+              <a:rPr lang="en-US" sz="1200" dirty="0" err="1"/>
+              <a:t>www.wma.net</a:t>
+            </a:r>
+            <a:r>
+              <a:rPr lang="en-US" sz="1200" dirty="0"/>
+              <a:t>/policies-post/wma-declaration-of-helsinki-ethical-principles-for-medical-research-involving-human-subjects/</a:t>
             </a:r>
           </a:p>
         </p:txBody>
@@ -13308,7 +12929,7 @@
     </p:spTree>
     <p:extLst>
       <p:ext uri="{BB962C8B-B14F-4D97-AF65-F5344CB8AC3E}">
-        <p14:creationId xmlns:p14="http://schemas.microsoft.com/office/powerpoint/2010/main" val="3531513716"/>
+        <p14:creationId xmlns:p14="http://schemas.microsoft.com/office/powerpoint/2010/main" val="2626254820"/>
       </p:ext>
     </p:extLst>
   </p:cSld>
@@ -13340,7 +12961,7 @@
           <p:cNvPr id="2" name="Text Placeholder 1">
             <a:extLst>
               <a:ext uri="{FF2B5EF4-FFF2-40B4-BE49-F238E27FC236}">
-                <a16:creationId xmlns:a16="http://schemas.microsoft.com/office/drawing/2014/main" id="{8A81C1D3-BE6A-9BA1-00D7-975139AF803D}"/>
+                <a16:creationId xmlns:a16="http://schemas.microsoft.com/office/drawing/2014/main" id="{AE105867-4D72-80D5-C39D-11E4547D8556}"/>
               </a:ext>
             </a:extLst>
           </p:cNvPr>
@@ -13351,15 +12972,10 @@
             <p:ph type="body" sz="quarter" idx="10"/>
           </p:nvPr>
         </p:nvSpPr>
-        <p:spPr>
-          <a:xfrm>
-            <a:off x="456270" y="754856"/>
-            <a:ext cx="8231459" cy="3702844"/>
-          </a:xfrm>
-        </p:spPr>
+        <p:spPr/>
         <p:txBody>
           <a:bodyPr>
-            <a:normAutofit fontScale="92500" lnSpcReduction="10000"/>
+            <a:normAutofit fontScale="92500" lnSpcReduction="20000"/>
           </a:bodyPr>
           <a:lstStyle/>
           <a:p>
@@ -13369,7 +12985,7 @@
             </a:pPr>
             <a:r>
               <a:rPr lang="en-US" dirty="0"/>
-              <a:t>Scientific standards: ”If a trail is of sufficiently poor quality that it cannot make a meaningful contribution to medical knowledge, then it should be declared unethical.” (Pocock, 1983)</a:t>
+              <a:t>Children cannot give informed consent until they are at least 18 years old</a:t>
             </a:r>
           </a:p>
           <a:p>
@@ -13383,124 +12999,63 @@
                   <a:srgbClr val="990000"/>
                 </a:solidFill>
               </a:rPr>
-              <a:t>Clinical equipoise </a:t>
-            </a:r>
-            <a:r>
-              <a:rPr lang="en-US" dirty="0"/>
-              <a:t>requires that no treatment is known to be ”better” than the other at the time of the design/start of the clinical trial</a:t>
-            </a:r>
-          </a:p>
-          <a:p>
-            <a:pPr marL="285750" indent="-285750">
-              <a:buFont typeface="Arial" panose="020B0604020202020204" pitchFamily="34" charset="0"/>
-              <a:buChar char="•"/>
-            </a:pPr>
-            <a:r>
-              <a:rPr lang="en-US" dirty="0"/>
-              <a:t>Participants must sign an </a:t>
-            </a:r>
-            <a:r>
-              <a:rPr lang="en-US" b="1" dirty="0">
-                <a:solidFill>
-                  <a:srgbClr val="990000"/>
-                </a:solidFill>
-              </a:rPr>
-              <a:t>informed consent </a:t>
-            </a:r>
-            <a:r>
-              <a:rPr lang="en-US" dirty="0"/>
-              <a:t>document</a:t>
+              <a:t>Assent</a:t>
+            </a:r>
+            <a:r>
+              <a:rPr lang="en-US" dirty="0"/>
+              <a:t> is required for children under 18 years of age except in special circumstance (e.g. the child is not old enough to understand the trial and what will be asked of them)</a:t>
             </a:r>
           </a:p>
           <a:p>
             <a:pPr marL="800100" lvl="1" indent="-285750"/>
-            <a:r>
-              <a:rPr lang="en-US" b="1" dirty="0">
-                <a:solidFill>
-                  <a:srgbClr val="990000"/>
-                </a:solidFill>
-              </a:rPr>
-              <a:t>Informed consent: </a:t>
-            </a:r>
             <a:r>
               <a:rPr lang="en-US" dirty="0">
                 <a:solidFill>
                   <a:schemeClr val="tx1"/>
                 </a:solidFill>
               </a:rPr>
-              <a:t>a document that has been approved by an Institutional Review Board and states in language that the patient can understand: </a:t>
-            </a:r>
-          </a:p>
-          <a:p>
-            <a:pPr marL="1143000" lvl="2" indent="-285750"/>
+              <a:t>Child agrees to take part in the trial</a:t>
+            </a:r>
+          </a:p>
+          <a:p>
+            <a:pPr marL="800100" lvl="1" indent="-285750"/>
             <a:r>
               <a:rPr lang="en-US" dirty="0">
                 <a:solidFill>
                   <a:schemeClr val="tx1"/>
                 </a:solidFill>
               </a:rPr>
-              <a:t>A description of the trial</a:t>
-            </a:r>
-          </a:p>
-          <a:p>
-            <a:pPr marL="1143000" lvl="2" indent="-285750"/>
+              <a:t>Several sessions may be required to help the child understand what will be asked of them</a:t>
+            </a:r>
+          </a:p>
+          <a:p>
+            <a:pPr marL="285750" indent="-285750">
+              <a:buFont typeface="Arial" panose="020B0604020202020204" pitchFamily="34" charset="0"/>
+              <a:buChar char="•"/>
+            </a:pPr>
             <a:r>
               <a:rPr lang="en-US" dirty="0">
                 <a:solidFill>
                   <a:schemeClr val="tx1"/>
                 </a:solidFill>
               </a:rPr>
-              <a:t>Potential risks/benefits</a:t>
-            </a:r>
-          </a:p>
-          <a:p>
-            <a:pPr marL="1143000" lvl="2" indent="-285750"/>
-            <a:r>
-              <a:rPr lang="en-US" dirty="0">
-                <a:solidFill>
-                  <a:schemeClr val="tx1"/>
-                </a:solidFill>
-              </a:rPr>
-              <a:t>Participant/physician obligations</a:t>
+              <a:t>Both parents must give their permission for the child to participate in the trial (with some exceptions)</a:t>
             </a:r>
           </a:p>
           <a:p>
             <a:pPr marL="800100" lvl="1" indent="-285750"/>
-            <a:r>
-              <a:rPr lang="en-US" b="1" dirty="0">
-                <a:solidFill>
-                  <a:srgbClr val="990000"/>
-                </a:solidFill>
-              </a:rPr>
-              <a:t>Institutional Review Board: </a:t>
-            </a:r>
-            <a:r>
-              <a:rPr lang="en-US" dirty="0">
-                <a:solidFill>
-                  <a:schemeClr val="tx1"/>
-                </a:solidFill>
-              </a:rPr>
-              <a:t>an administrative body whose purpose is to protect the rights of human research subjects</a:t>
-            </a:r>
-          </a:p>
-          <a:p>
-            <a:pPr marL="285750" indent="-285750">
-              <a:buFont typeface="Arial" panose="020B0604020202020204" pitchFamily="34" charset="0"/>
-              <a:buChar char="•"/>
-            </a:pPr>
-            <a:r>
-              <a:rPr lang="en-US" dirty="0"/>
-              <a:t>Data Safety Monitoring Board</a:t>
-            </a:r>
-            <a:endParaRPr lang="en-US" dirty="0">
-              <a:solidFill>
-                <a:schemeClr val="tx1"/>
-              </a:solidFill>
-            </a:endParaRPr>
-          </a:p>
-          <a:p>
             <a:endParaRPr lang="en-US" dirty="0"/>
           </a:p>
+          <a:p>
+            <a:pPr marL="800100" lvl="1" indent="-285750"/>
+            <a:endParaRPr lang="en-US" dirty="0"/>
+          </a:p>
+          <a:p>
+            <a:br>
+              <a:rPr lang="en-US" dirty="0"/>
+            </a:br>
+            <a:endParaRPr lang="en-US" dirty="0"/>
+          </a:p>
         </p:txBody>
       </p:sp>
       <p:sp>
@@ -13508,7 +13063,7 @@
           <p:cNvPr id="3" name="Text Placeholder 2">
             <a:extLst>
               <a:ext uri="{FF2B5EF4-FFF2-40B4-BE49-F238E27FC236}">
-                <a16:creationId xmlns:a16="http://schemas.microsoft.com/office/drawing/2014/main" id="{F97728CB-A2EE-2C32-E644-4B9DD7BD1329}"/>
+                <a16:creationId xmlns:a16="http://schemas.microsoft.com/office/drawing/2014/main" id="{838630DB-DB0B-2151-5F33-DD0A1CD16884}"/>
               </a:ext>
             </a:extLst>
           </p:cNvPr>
@@ -13526,7 +13081,7 @@
           <a:p>
             <a:r>
               <a:rPr lang="en-US" dirty="0"/>
-              <a:t>Ethical Considerations</a:t>
+              <a:t>Clinical Trials in Pediatric Patients</a:t>
             </a:r>
           </a:p>
         </p:txBody>
@@ -13536,7 +13091,7 @@
           <p:cNvPr id="4" name="TextBox 3">
             <a:extLst>
               <a:ext uri="{FF2B5EF4-FFF2-40B4-BE49-F238E27FC236}">
-                <a16:creationId xmlns:a16="http://schemas.microsoft.com/office/drawing/2014/main" id="{F0253330-9164-024B-2B9C-EA410FED32E9}"/>
+                <a16:creationId xmlns:a16="http://schemas.microsoft.com/office/drawing/2014/main" id="{C2D91A0F-F106-4531-9F92-CD4A4090703B}"/>
               </a:ext>
             </a:extLst>
           </p:cNvPr>
@@ -13545,8 +13100,8 @@
         </p:nvSpPr>
         <p:spPr>
           <a:xfrm>
-            <a:off x="7889502" y="4866501"/>
-            <a:ext cx="1596454" cy="276999"/>
+            <a:off x="7383780" y="4866501"/>
+            <a:ext cx="1830950" cy="276999"/>
           </a:xfrm>
           <a:prstGeom prst="rect">
             <a:avLst/>
@@ -13554,14 +13109,14 @@
           <a:noFill/>
         </p:spPr>
         <p:txBody>
-          <a:bodyPr wrap="square" rtlCol="0">
+          <a:bodyPr wrap="none" rtlCol="0">
             <a:spAutoFit/>
           </a:bodyPr>
           <a:lstStyle/>
           <a:p>
             <a:r>
               <a:rPr lang="en-US" sz="1200" dirty="0"/>
-              <a:t>(Mack, 2019)</a:t>
+              <a:t>(National Cancer Institute)</a:t>
             </a:r>
           </a:p>
         </p:txBody>
@@ -13569,7 +13124,7 @@
     </p:spTree>
     <p:extLst>
       <p:ext uri="{BB962C8B-B14F-4D97-AF65-F5344CB8AC3E}">
-        <p14:creationId xmlns:p14="http://schemas.microsoft.com/office/powerpoint/2010/main" val="1884870260"/>
+        <p14:creationId xmlns:p14="http://schemas.microsoft.com/office/powerpoint/2010/main" val="3531513716"/>
       </p:ext>
     </p:extLst>
   </p:cSld>
@@ -13601,7 +13156,7 @@
           <p:cNvPr id="2" name="Text Placeholder 1">
             <a:extLst>
               <a:ext uri="{FF2B5EF4-FFF2-40B4-BE49-F238E27FC236}">
-                <a16:creationId xmlns:a16="http://schemas.microsoft.com/office/drawing/2014/main" id="{77A71522-D499-C1F1-D5D5-701FB0ABC8F6}"/>
+                <a16:creationId xmlns:a16="http://schemas.microsoft.com/office/drawing/2014/main" id="{8A81C1D3-BE6A-9BA1-00D7-975139AF803D}"/>
               </a:ext>
             </a:extLst>
           </p:cNvPr>
@@ -13614,21 +13169,15 @@
         </p:nvSpPr>
         <p:spPr>
           <a:xfrm>
-            <a:off x="456270" y="1034654"/>
-            <a:ext cx="8231459" cy="3525440"/>
+            <a:off x="456270" y="754856"/>
+            <a:ext cx="8231459" cy="3702844"/>
           </a:xfrm>
         </p:spPr>
         <p:txBody>
           <a:bodyPr>
-            <a:normAutofit/>
+            <a:normAutofit fontScale="92500" lnSpcReduction="10000"/>
           </a:bodyPr>
           <a:lstStyle/>
-          <a:p>
-            <a:r>
-              <a:rPr lang="en-US" dirty="0"/>
-              <a:t>Goes by different names</a:t>
-            </a:r>
-          </a:p>
           <a:p>
             <a:pPr marL="285750" indent="-285750">
               <a:buFont typeface="Arial" panose="020B0604020202020204" pitchFamily="34" charset="0"/>
@@ -13636,7 +13185,7 @@
             </a:pPr>
             <a:r>
               <a:rPr lang="en-US" dirty="0"/>
-              <a:t>Data Safety Monitoring Boards (DSMB)</a:t>
+              <a:t>Scientific standards: ”If a trail is of sufficiently poor quality that it cannot make a meaningful contribution to medical knowledge, then it should be declared unethical.” (Pocock, 1983)</a:t>
             </a:r>
           </a:p>
           <a:p>
@@ -13645,8 +13194,16 @@
               <a:buChar char="•"/>
             </a:pPr>
             <a:r>
-              <a:rPr lang="en-US" dirty="0"/>
-              <a:t>Data Safety Monitoring Committee (DSMC)</a:t>
+              <a:rPr lang="en-US" b="1" dirty="0">
+                <a:solidFill>
+                  <a:srgbClr val="990000"/>
+                </a:solidFill>
+              </a:rPr>
+              <a:t>Clinical equipoise </a:t>
+            </a:r>
+            <a:r>
+              <a:rPr lang="en-US" dirty="0"/>
+              <a:t>requires that no treatment is known to be ”better” than the other at the time of the design/start of the clinical trial</a:t>
             </a:r>
           </a:p>
           <a:p>
@@ -13656,7 +13213,90 @@
             </a:pPr>
             <a:r>
               <a:rPr lang="en-US" dirty="0"/>
-              <a:t>Independent Data Monitoring Committee (IDMC)</a:t>
+              <a:t>Participants must sign an </a:t>
+            </a:r>
+            <a:r>
+              <a:rPr lang="en-US" b="1" dirty="0">
+                <a:solidFill>
+                  <a:srgbClr val="990000"/>
+                </a:solidFill>
+              </a:rPr>
+              <a:t>informed consent </a:t>
+            </a:r>
+            <a:r>
+              <a:rPr lang="en-US" dirty="0"/>
+              <a:t>document</a:t>
+            </a:r>
+          </a:p>
+          <a:p>
+            <a:pPr marL="800100" lvl="1" indent="-285750"/>
+            <a:r>
+              <a:rPr lang="en-US" b="1" dirty="0">
+                <a:solidFill>
+                  <a:srgbClr val="990000"/>
+                </a:solidFill>
+              </a:rPr>
+              <a:t>Informed consent: </a:t>
+            </a:r>
+            <a:r>
+              <a:rPr lang="en-US" dirty="0">
+                <a:solidFill>
+                  <a:schemeClr val="tx1"/>
+                </a:solidFill>
+              </a:rPr>
+              <a:t>a document that has been approved by an Institutional Review Board and states in language that the patient can understand: </a:t>
+            </a:r>
+          </a:p>
+          <a:p>
+            <a:pPr marL="1143000" lvl="2" indent="-285750"/>
+            <a:r>
+              <a:rPr lang="en-US" dirty="0">
+                <a:solidFill>
+                  <a:schemeClr val="tx1"/>
+                </a:solidFill>
+              </a:rPr>
+              <a:t>A description of the trial</a:t>
+            </a:r>
+          </a:p>
+          <a:p>
+            <a:pPr marL="1143000" lvl="2" indent="-285750"/>
+            <a:r>
+              <a:rPr lang="en-US" dirty="0">
+                <a:solidFill>
+                  <a:schemeClr val="tx1"/>
+                </a:solidFill>
+              </a:rPr>
+              <a:t>Potential risks/benefits</a:t>
+            </a:r>
+          </a:p>
+          <a:p>
+            <a:pPr marL="1143000" lvl="2" indent="-285750"/>
+            <a:r>
+              <a:rPr lang="en-US" dirty="0">
+                <a:solidFill>
+                  <a:schemeClr val="tx1"/>
+                </a:solidFill>
+              </a:rPr>
+              <a:t>Participant/physician obligations</a:t>
+            </a:r>
+          </a:p>
+          <a:p>
+            <a:pPr marL="800100" lvl="1" indent="-285750"/>
+            <a:r>
+              <a:rPr lang="en-US" b="1" dirty="0">
+                <a:solidFill>
+                  <a:srgbClr val="990000"/>
+                </a:solidFill>
+              </a:rPr>
+              <a:t>Institutional Review Board: </a:t>
+            </a:r>
+            <a:r>
+              <a:rPr lang="en-US" dirty="0">
+                <a:solidFill>
+                  <a:schemeClr val="tx1"/>
+                </a:solidFill>
+              </a:rPr>
+              <a:t>an administrative body whose purpose is to protect the rights of human research subjects</a:t>
             </a:r>
           </a:p>
           <a:p>
@@ -13666,58 +13306,17 @@
             </a:pPr>
             <a:r>
               <a:rPr lang="en-US" dirty="0"/>
-              <a:t>Data Monitoring Committee (DMC)</a:t>
-            </a:r>
-          </a:p>
-          <a:p>
-            <a:r>
-              <a:rPr lang="en-US" dirty="0"/>
-              <a:t>DSMC composition: </a:t>
-            </a:r>
-          </a:p>
-          <a:p>
-            <a:pPr marL="285750" indent="-285750">
-              <a:buFont typeface="Arial" panose="020B0604020202020204" pitchFamily="34" charset="0"/>
-              <a:buChar char="•"/>
-            </a:pPr>
-            <a:r>
-              <a:rPr lang="en-US" dirty="0"/>
-              <a:t>Subject-matter specialists (2-4)</a:t>
-            </a:r>
-          </a:p>
-          <a:p>
-            <a:pPr marL="285750" indent="-285750">
-              <a:buFont typeface="Arial" panose="020B0604020202020204" pitchFamily="34" charset="0"/>
-              <a:buChar char="•"/>
-            </a:pPr>
-            <a:r>
-              <a:rPr lang="en-US" dirty="0"/>
-              <a:t>Biostatistician (1-2)</a:t>
-            </a:r>
-          </a:p>
-          <a:p>
-            <a:pPr marL="800100" lvl="1" indent="-285750"/>
+              <a:t>Data Safety Monitoring Board</a:t>
+            </a:r>
+            <a:endParaRPr lang="en-US" dirty="0">
+              <a:solidFill>
+                <a:schemeClr val="tx1"/>
+              </a:solidFill>
+            </a:endParaRPr>
+          </a:p>
+          <a:p>
             <a:endParaRPr lang="en-US" dirty="0"/>
           </a:p>
-          <a:p>
-            <a:endParaRPr lang="en-US" dirty="0"/>
-          </a:p>
-          <a:p>
-            <a:endParaRPr lang="en-US" dirty="0"/>
-          </a:p>
-          <a:p>
-            <a:endParaRPr lang="en-US" dirty="0"/>
-          </a:p>
-          <a:p>
-            <a:pPr marL="285750" indent="-285750">
-              <a:buFont typeface="Arial" panose="020B0604020202020204" pitchFamily="34" charset="0"/>
-              <a:buChar char="•"/>
-            </a:pPr>
-            <a:endParaRPr lang="en-US" dirty="0"/>
-          </a:p>
-          <a:p>
-            <a:endParaRPr lang="en-US" dirty="0"/>
-          </a:p>
         </p:txBody>
       </p:sp>
       <p:sp>
@@ -13725,7 +13324,7 @@
           <p:cNvPr id="3" name="Text Placeholder 2">
             <a:extLst>
               <a:ext uri="{FF2B5EF4-FFF2-40B4-BE49-F238E27FC236}">
-                <a16:creationId xmlns:a16="http://schemas.microsoft.com/office/drawing/2014/main" id="{9400E1B5-E92F-F1FF-562B-1517C4C45952}"/>
+                <a16:creationId xmlns:a16="http://schemas.microsoft.com/office/drawing/2014/main" id="{F97728CB-A2EE-2C32-E644-4B9DD7BD1329}"/>
               </a:ext>
             </a:extLst>
           </p:cNvPr>
@@ -13743,7 +13342,7 @@
           <a:p>
             <a:r>
               <a:rPr lang="en-US" dirty="0"/>
-              <a:t>Monitoring Patient Safety: Data Safety Monitoring Boards</a:t>
+              <a:t>Ethical Considerations</a:t>
             </a:r>
           </a:p>
         </p:txBody>
@@ -13753,7 +13352,7 @@
           <p:cNvPr id="4" name="TextBox 3">
             <a:extLst>
               <a:ext uri="{FF2B5EF4-FFF2-40B4-BE49-F238E27FC236}">
-                <a16:creationId xmlns:a16="http://schemas.microsoft.com/office/drawing/2014/main" id="{78946C02-EB60-94DA-4336-6E976074A565}"/>
+                <a16:creationId xmlns:a16="http://schemas.microsoft.com/office/drawing/2014/main" id="{F0253330-9164-024B-2B9C-EA410FED32E9}"/>
               </a:ext>
             </a:extLst>
           </p:cNvPr>
@@ -13762,8 +13361,8 @@
         </p:nvSpPr>
         <p:spPr>
           <a:xfrm>
-            <a:off x="5897880" y="4808220"/>
-            <a:ext cx="3025140" cy="276999"/>
+            <a:off x="7889502" y="4866501"/>
+            <a:ext cx="1596454" cy="276999"/>
           </a:xfrm>
           <a:prstGeom prst="rect">
             <a:avLst/>
@@ -13776,18 +13375,9 @@
           </a:bodyPr>
           <a:lstStyle/>
           <a:p>
-            <a:pPr algn="r"/>
             <a:r>
               <a:rPr lang="en-US" sz="1200" dirty="0"/>
-              <a:t>(Gillen and </a:t>
-            </a:r>
-            <a:r>
-              <a:rPr lang="en-US" sz="1200" dirty="0" err="1"/>
-              <a:t>Kittelson</a:t>
-            </a:r>
-            <a:r>
-              <a:rPr lang="en-US" sz="1200" dirty="0"/>
-              <a:t>, 2017)</a:t>
+              <a:t>(Mack, 2019)</a:t>
             </a:r>
           </a:p>
         </p:txBody>
@@ -13795,7 +13385,7 @@
     </p:spTree>
     <p:extLst>
       <p:ext uri="{BB962C8B-B14F-4D97-AF65-F5344CB8AC3E}">
-        <p14:creationId xmlns:p14="http://schemas.microsoft.com/office/powerpoint/2010/main" val="4683191"/>
+        <p14:creationId xmlns:p14="http://schemas.microsoft.com/office/powerpoint/2010/main" val="1884870260"/>
       </p:ext>
     </p:extLst>
   </p:cSld>
@@ -13824,161 +13414,10 @@
       </p:grpSpPr>
       <p:sp>
         <p:nvSpPr>
-          <p:cNvPr id="2" name="Text Placeholder 1">
-            <a:extLst>
-              <a:ext uri="{FF2B5EF4-FFF2-40B4-BE49-F238E27FC236}">
-                <a16:creationId xmlns:a16="http://schemas.microsoft.com/office/drawing/2014/main" id="{77A71522-D499-C1F1-D5D5-701FB0ABC8F6}"/>
-              </a:ext>
-            </a:extLst>
-          </p:cNvPr>
-          <p:cNvSpPr>
-            <a:spLocks noGrp="1"/>
-          </p:cNvSpPr>
-          <p:nvPr>
-            <p:ph type="body" sz="quarter" idx="10"/>
-          </p:nvPr>
-        </p:nvSpPr>
-        <p:spPr>
-          <a:xfrm>
-            <a:off x="456270" y="1034654"/>
-            <a:ext cx="8231459" cy="3525440"/>
-          </a:xfrm>
-        </p:spPr>
-        <p:txBody>
-          <a:bodyPr>
-            <a:normAutofit/>
-          </a:bodyPr>
-          <a:lstStyle/>
-          <a:p>
-            <a:r>
-              <a:rPr lang="en-US" dirty="0"/>
-              <a:t>The role of a DSMB</a:t>
-            </a:r>
-          </a:p>
-          <a:p>
-            <a:pPr marL="285750" indent="-285750">
-              <a:buFont typeface="Arial" panose="020B0604020202020204" pitchFamily="34" charset="0"/>
-              <a:buChar char="•"/>
-            </a:pPr>
-            <a:r>
-              <a:rPr lang="en-US" dirty="0"/>
-              <a:t>Ensure unbiased decisions</a:t>
-            </a:r>
-          </a:p>
-          <a:p>
-            <a:pPr marL="285750" indent="-285750">
-              <a:buFont typeface="Arial" panose="020B0604020202020204" pitchFamily="34" charset="0"/>
-              <a:buChar char="•"/>
-            </a:pPr>
-            <a:r>
-              <a:rPr lang="en-US" dirty="0"/>
-              <a:t>DSMB members are </a:t>
-            </a:r>
-            <a:r>
-              <a:rPr lang="en-US" i="1" dirty="0"/>
-              <a:t>independent</a:t>
-            </a:r>
-            <a:r>
-              <a:rPr lang="en-US" dirty="0"/>
-              <a:t> of the study investigators </a:t>
-            </a:r>
-          </a:p>
-          <a:p>
-            <a:pPr marL="285750" indent="-285750">
-              <a:buFont typeface="Arial" panose="020B0604020202020204" pitchFamily="34" charset="0"/>
-              <a:buChar char="•"/>
-            </a:pPr>
-            <a:r>
-              <a:rPr lang="en-US" dirty="0"/>
-              <a:t>DSMB reviews unblinded data in the midst of a trial to: </a:t>
-            </a:r>
-          </a:p>
-          <a:p>
-            <a:pPr marL="800100" lvl="1" indent="-285750"/>
-            <a:r>
-              <a:rPr lang="en-US" dirty="0">
-                <a:solidFill>
-                  <a:schemeClr val="tx1"/>
-                </a:solidFill>
-              </a:rPr>
-              <a:t>Assure the trial is safe to continue</a:t>
-            </a:r>
-          </a:p>
-          <a:p>
-            <a:pPr marL="800100" lvl="1" indent="-285750"/>
-            <a:r>
-              <a:rPr lang="en-US" dirty="0">
-                <a:solidFill>
-                  <a:schemeClr val="tx1"/>
-                </a:solidFill>
-              </a:rPr>
-              <a:t>Make decisions about early termination based on the statistical monitoring plan</a:t>
-            </a:r>
-          </a:p>
-          <a:p>
-            <a:pPr marL="1143000" lvl="2" indent="-285750"/>
-            <a:r>
-              <a:rPr lang="en-US" dirty="0">
-                <a:solidFill>
-                  <a:schemeClr val="tx1"/>
-                </a:solidFill>
-              </a:rPr>
-              <a:t>Early termination can be due to efficacy, futility, or safety</a:t>
-            </a:r>
-          </a:p>
-          <a:p>
-            <a:pPr marL="1485900" lvl="3" indent="-285750"/>
-            <a:r>
-              <a:rPr lang="en-US" dirty="0">
-                <a:solidFill>
-                  <a:schemeClr val="tx1"/>
-                </a:solidFill>
-              </a:rPr>
-              <a:t>Decision to terminate early must be considered in balance with all aspects of the trial and what we can learn (i.e. stopping early due to efficacy may make it difficult to learn about safety)</a:t>
-            </a:r>
-          </a:p>
-          <a:p>
-            <a:pPr marL="800100" lvl="1" indent="-285750"/>
-            <a:endParaRPr lang="en-US" dirty="0">
-              <a:solidFill>
-                <a:schemeClr val="tx1"/>
-              </a:solidFill>
-            </a:endParaRPr>
-          </a:p>
-          <a:p>
-            <a:pPr lvl="1" indent="0">
-              <a:buNone/>
-            </a:pPr>
-            <a:endParaRPr lang="en-US" dirty="0">
-              <a:solidFill>
-                <a:schemeClr val="tx1"/>
-              </a:solidFill>
-            </a:endParaRPr>
-          </a:p>
-          <a:p>
-            <a:endParaRPr lang="en-US" dirty="0"/>
-          </a:p>
-          <a:p>
-            <a:endParaRPr lang="en-US" dirty="0"/>
-          </a:p>
-          <a:p>
-            <a:pPr marL="285750" indent="-285750">
-              <a:buFont typeface="Arial" panose="020B0604020202020204" pitchFamily="34" charset="0"/>
-              <a:buChar char="•"/>
-            </a:pPr>
-            <a:endParaRPr lang="en-US" dirty="0"/>
-          </a:p>
-          <a:p>
-            <a:endParaRPr lang="en-US" dirty="0"/>
-          </a:p>
-        </p:txBody>
-      </p:sp>
-      <p:sp>
-        <p:nvSpPr>
           <p:cNvPr id="3" name="Text Placeholder 2">
             <a:extLst>
               <a:ext uri="{FF2B5EF4-FFF2-40B4-BE49-F238E27FC236}">
-                <a16:creationId xmlns:a16="http://schemas.microsoft.com/office/drawing/2014/main" id="{9400E1B5-E92F-F1FF-562B-1517C4C45952}"/>
+                <a16:creationId xmlns:a16="http://schemas.microsoft.com/office/drawing/2014/main" id="{7CA308D5-3B9C-508A-939B-793713ADCA23}"/>
               </a:ext>
             </a:extLst>
           </p:cNvPr>
@@ -13989,58 +13428,20 @@
             <p:ph type="body" sz="quarter" idx="11"/>
           </p:nvPr>
         </p:nvSpPr>
-        <p:spPr/>
+        <p:spPr>
+          <a:xfrm>
+            <a:off x="456270" y="1875521"/>
+            <a:ext cx="8231459" cy="990600"/>
+          </a:xfrm>
+        </p:spPr>
         <p:txBody>
           <a:bodyPr/>
           <a:lstStyle/>
           <a:p>
+            <a:pPr algn="ctr"/>
             <a:r>
               <a:rPr lang="en-US" dirty="0"/>
               <a:t>Monitoring Patient Safety: Data Safety Monitoring Boards</a:t>
-            </a:r>
-          </a:p>
-        </p:txBody>
-      </p:sp>
-      <p:sp>
-        <p:nvSpPr>
-          <p:cNvPr id="4" name="TextBox 3">
-            <a:extLst>
-              <a:ext uri="{FF2B5EF4-FFF2-40B4-BE49-F238E27FC236}">
-                <a16:creationId xmlns:a16="http://schemas.microsoft.com/office/drawing/2014/main" id="{DF2012D2-3E5E-AA45-4DBC-81E9C0A7B091}"/>
-              </a:ext>
-            </a:extLst>
-          </p:cNvPr>
-          <p:cNvSpPr txBox="1"/>
-          <p:nvPr/>
-        </p:nvSpPr>
-        <p:spPr>
-          <a:xfrm>
-            <a:off x="6560820" y="4866501"/>
-            <a:ext cx="2468880" cy="276999"/>
-          </a:xfrm>
-          <a:prstGeom prst="rect">
-            <a:avLst/>
-          </a:prstGeom>
-          <a:noFill/>
-        </p:spPr>
-        <p:txBody>
-          <a:bodyPr wrap="square" rtlCol="0">
-            <a:spAutoFit/>
-          </a:bodyPr>
-          <a:lstStyle/>
-          <a:p>
-            <a:pPr algn="r"/>
-            <a:r>
-              <a:rPr lang="en-US" sz="1200" dirty="0"/>
-              <a:t>(Gillen and </a:t>
-            </a:r>
-            <a:r>
-              <a:rPr lang="en-US" sz="1200" dirty="0" err="1"/>
-              <a:t>Kittelson</a:t>
-            </a:r>
-            <a:r>
-              <a:rPr lang="en-US" sz="1200" dirty="0"/>
-              <a:t>, 2017)</a:t>
             </a:r>
           </a:p>
         </p:txBody>
@@ -14048,7 +13449,7 @@
     </p:spTree>
     <p:extLst>
       <p:ext uri="{BB962C8B-B14F-4D97-AF65-F5344CB8AC3E}">
-        <p14:creationId xmlns:p14="http://schemas.microsoft.com/office/powerpoint/2010/main" val="3439635666"/>
+        <p14:creationId xmlns:p14="http://schemas.microsoft.com/office/powerpoint/2010/main" val="4223647160"/>
       </p:ext>
     </p:extLst>
   </p:cSld>
@@ -14077,10 +13478,134 @@
       </p:grpSpPr>
       <p:sp>
         <p:nvSpPr>
+          <p:cNvPr id="2" name="Text Placeholder 1">
+            <a:extLst>
+              <a:ext uri="{FF2B5EF4-FFF2-40B4-BE49-F238E27FC236}">
+                <a16:creationId xmlns:a16="http://schemas.microsoft.com/office/drawing/2014/main" id="{77A71522-D499-C1F1-D5D5-701FB0ABC8F6}"/>
+              </a:ext>
+            </a:extLst>
+          </p:cNvPr>
+          <p:cNvSpPr>
+            <a:spLocks noGrp="1"/>
+          </p:cNvSpPr>
+          <p:nvPr>
+            <p:ph type="body" sz="quarter" idx="10"/>
+          </p:nvPr>
+        </p:nvSpPr>
+        <p:spPr>
+          <a:xfrm>
+            <a:off x="456270" y="1034654"/>
+            <a:ext cx="8231459" cy="3525440"/>
+          </a:xfrm>
+        </p:spPr>
+        <p:txBody>
+          <a:bodyPr>
+            <a:normAutofit/>
+          </a:bodyPr>
+          <a:lstStyle/>
+          <a:p>
+            <a:r>
+              <a:rPr lang="en-US" dirty="0"/>
+              <a:t>Goes by different names</a:t>
+            </a:r>
+          </a:p>
+          <a:p>
+            <a:pPr marL="285750" indent="-285750">
+              <a:buFont typeface="Arial" panose="020B0604020202020204" pitchFamily="34" charset="0"/>
+              <a:buChar char="•"/>
+            </a:pPr>
+            <a:r>
+              <a:rPr lang="en-US" dirty="0"/>
+              <a:t>Data Safety Monitoring Boards (DSMB)</a:t>
+            </a:r>
+          </a:p>
+          <a:p>
+            <a:pPr marL="285750" indent="-285750">
+              <a:buFont typeface="Arial" panose="020B0604020202020204" pitchFamily="34" charset="0"/>
+              <a:buChar char="•"/>
+            </a:pPr>
+            <a:r>
+              <a:rPr lang="en-US" dirty="0"/>
+              <a:t>Data Safety Monitoring Committee (DSMC)</a:t>
+            </a:r>
+          </a:p>
+          <a:p>
+            <a:pPr marL="285750" indent="-285750">
+              <a:buFont typeface="Arial" panose="020B0604020202020204" pitchFamily="34" charset="0"/>
+              <a:buChar char="•"/>
+            </a:pPr>
+            <a:r>
+              <a:rPr lang="en-US" dirty="0"/>
+              <a:t>Independent Data Monitoring Committee (IDMC)</a:t>
+            </a:r>
+          </a:p>
+          <a:p>
+            <a:pPr marL="285750" indent="-285750">
+              <a:buFont typeface="Arial" panose="020B0604020202020204" pitchFamily="34" charset="0"/>
+              <a:buChar char="•"/>
+            </a:pPr>
+            <a:r>
+              <a:rPr lang="en-US" dirty="0"/>
+              <a:t>Data Monitoring Committee (DMC)</a:t>
+            </a:r>
+          </a:p>
+          <a:p>
+            <a:r>
+              <a:rPr lang="en-US" dirty="0"/>
+              <a:t>DSMC composition: </a:t>
+            </a:r>
+          </a:p>
+          <a:p>
+            <a:pPr marL="285750" indent="-285750">
+              <a:buFont typeface="Arial" panose="020B0604020202020204" pitchFamily="34" charset="0"/>
+              <a:buChar char="•"/>
+            </a:pPr>
+            <a:r>
+              <a:rPr lang="en-US" dirty="0"/>
+              <a:t>Subject-matter specialists (2-4)</a:t>
+            </a:r>
+          </a:p>
+          <a:p>
+            <a:pPr marL="285750" indent="-285750">
+              <a:buFont typeface="Arial" panose="020B0604020202020204" pitchFamily="34" charset="0"/>
+              <a:buChar char="•"/>
+            </a:pPr>
+            <a:r>
+              <a:rPr lang="en-US" dirty="0"/>
+              <a:t>Biostatistician (1-2)</a:t>
+            </a:r>
+          </a:p>
+          <a:p>
+            <a:pPr marL="800100" lvl="1" indent="-285750"/>
+            <a:endParaRPr lang="en-US" dirty="0"/>
+          </a:p>
+          <a:p>
+            <a:endParaRPr lang="en-US" dirty="0"/>
+          </a:p>
+          <a:p>
+            <a:endParaRPr lang="en-US" dirty="0"/>
+          </a:p>
+          <a:p>
+            <a:endParaRPr lang="en-US" dirty="0"/>
+          </a:p>
+          <a:p>
+            <a:pPr marL="285750" indent="-285750">
+              <a:buFont typeface="Arial" panose="020B0604020202020204" pitchFamily="34" charset="0"/>
+              <a:buChar char="•"/>
+            </a:pPr>
+            <a:endParaRPr lang="en-US" dirty="0"/>
+          </a:p>
+          <a:p>
+            <a:endParaRPr lang="en-US" dirty="0"/>
+          </a:p>
+        </p:txBody>
+      </p:sp>
+      <p:sp>
+        <p:nvSpPr>
           <p:cNvPr id="3" name="Text Placeholder 2">
             <a:extLst>
               <a:ext uri="{FF2B5EF4-FFF2-40B4-BE49-F238E27FC236}">
-                <a16:creationId xmlns:a16="http://schemas.microsoft.com/office/drawing/2014/main" id="{9E34FE8B-2C8D-797F-86CD-8EF5E922A2A3}"/>
+                <a16:creationId xmlns:a16="http://schemas.microsoft.com/office/drawing/2014/main" id="{9400E1B5-E92F-F1FF-562B-1517C4C45952}"/>
               </a:ext>
             </a:extLst>
           </p:cNvPr>
@@ -14091,19 +13616,58 @@
             <p:ph type="body" sz="quarter" idx="11"/>
           </p:nvPr>
         </p:nvSpPr>
-        <p:spPr>
-          <a:xfrm>
-            <a:off x="2887051" y="2076450"/>
-            <a:ext cx="8231459" cy="990600"/>
-          </a:xfrm>
-        </p:spPr>
+        <p:spPr/>
         <p:txBody>
           <a:bodyPr/>
           <a:lstStyle/>
           <a:p>
             <a:r>
               <a:rPr lang="en-US" dirty="0"/>
-              <a:t>One More Example..</a:t>
+              <a:t>Monitoring Patient Safety: Data Safety Monitoring Boards</a:t>
+            </a:r>
+          </a:p>
+        </p:txBody>
+      </p:sp>
+      <p:sp>
+        <p:nvSpPr>
+          <p:cNvPr id="4" name="TextBox 3">
+            <a:extLst>
+              <a:ext uri="{FF2B5EF4-FFF2-40B4-BE49-F238E27FC236}">
+                <a16:creationId xmlns:a16="http://schemas.microsoft.com/office/drawing/2014/main" id="{78946C02-EB60-94DA-4336-6E976074A565}"/>
+              </a:ext>
+            </a:extLst>
+          </p:cNvPr>
+          <p:cNvSpPr txBox="1"/>
+          <p:nvPr/>
+        </p:nvSpPr>
+        <p:spPr>
+          <a:xfrm>
+            <a:off x="5897880" y="4808220"/>
+            <a:ext cx="3025140" cy="276999"/>
+          </a:xfrm>
+          <a:prstGeom prst="rect">
+            <a:avLst/>
+          </a:prstGeom>
+          <a:noFill/>
+        </p:spPr>
+        <p:txBody>
+          <a:bodyPr wrap="square" rtlCol="0">
+            <a:spAutoFit/>
+          </a:bodyPr>
+          <a:lstStyle/>
+          <a:p>
+            <a:pPr algn="r"/>
+            <a:r>
+              <a:rPr lang="en-US" sz="1200" dirty="0"/>
+              <a:t>(Gillen and </a:t>
+            </a:r>
+            <a:r>
+              <a:rPr lang="en-US" sz="1200" dirty="0" err="1"/>
+              <a:t>Kittelson</a:t>
+            </a:r>
+            <a:r>
+              <a:rPr lang="en-US" sz="1200" dirty="0"/>
+              <a:t>, 2017)</a:t>
             </a:r>
           </a:p>
         </p:txBody>
@@ -14111,7 +13675,7 @@
     </p:spTree>
     <p:extLst>
       <p:ext uri="{BB962C8B-B14F-4D97-AF65-F5344CB8AC3E}">
-        <p14:creationId xmlns:p14="http://schemas.microsoft.com/office/powerpoint/2010/main" val="854761756"/>
+        <p14:creationId xmlns:p14="http://schemas.microsoft.com/office/powerpoint/2010/main" val="4683191"/>
       </p:ext>
     </p:extLst>
   </p:cSld>
@@ -14140,10 +13704,161 @@
       </p:grpSpPr>
       <p:sp>
         <p:nvSpPr>
-          <p:cNvPr id="5" name="Text Placeholder 4">
-            <a:extLst>
-              <a:ext uri="{FF2B5EF4-FFF2-40B4-BE49-F238E27FC236}">
-                <a16:creationId xmlns:a16="http://schemas.microsoft.com/office/drawing/2014/main" id="{8EE35CCD-5E6E-9EDB-33D2-4D88C23F7438}"/>
+          <p:cNvPr id="2" name="Text Placeholder 1">
+            <a:extLst>
+              <a:ext uri="{FF2B5EF4-FFF2-40B4-BE49-F238E27FC236}">
+                <a16:creationId xmlns:a16="http://schemas.microsoft.com/office/drawing/2014/main" id="{77A71522-D499-C1F1-D5D5-701FB0ABC8F6}"/>
+              </a:ext>
+            </a:extLst>
+          </p:cNvPr>
+          <p:cNvSpPr>
+            <a:spLocks noGrp="1"/>
+          </p:cNvSpPr>
+          <p:nvPr>
+            <p:ph type="body" sz="quarter" idx="10"/>
+          </p:nvPr>
+        </p:nvSpPr>
+        <p:spPr>
+          <a:xfrm>
+            <a:off x="456270" y="1034654"/>
+            <a:ext cx="8231459" cy="3525440"/>
+          </a:xfrm>
+        </p:spPr>
+        <p:txBody>
+          <a:bodyPr>
+            <a:normAutofit/>
+          </a:bodyPr>
+          <a:lstStyle/>
+          <a:p>
+            <a:r>
+              <a:rPr lang="en-US" dirty="0"/>
+              <a:t>The role of a DSMB</a:t>
+            </a:r>
+          </a:p>
+          <a:p>
+            <a:pPr marL="285750" indent="-285750">
+              <a:buFont typeface="Arial" panose="020B0604020202020204" pitchFamily="34" charset="0"/>
+              <a:buChar char="•"/>
+            </a:pPr>
+            <a:r>
+              <a:rPr lang="en-US" dirty="0"/>
+              <a:t>Ensure unbiased decisions</a:t>
+            </a:r>
+          </a:p>
+          <a:p>
+            <a:pPr marL="285750" indent="-285750">
+              <a:buFont typeface="Arial" panose="020B0604020202020204" pitchFamily="34" charset="0"/>
+              <a:buChar char="•"/>
+            </a:pPr>
+            <a:r>
+              <a:rPr lang="en-US" dirty="0"/>
+              <a:t>DSMB members are </a:t>
+            </a:r>
+            <a:r>
+              <a:rPr lang="en-US" i="1" dirty="0"/>
+              <a:t>independent</a:t>
+            </a:r>
+            <a:r>
+              <a:rPr lang="en-US" dirty="0"/>
+              <a:t> of the study investigators </a:t>
+            </a:r>
+          </a:p>
+          <a:p>
+            <a:pPr marL="285750" indent="-285750">
+              <a:buFont typeface="Arial" panose="020B0604020202020204" pitchFamily="34" charset="0"/>
+              <a:buChar char="•"/>
+            </a:pPr>
+            <a:r>
+              <a:rPr lang="en-US" dirty="0"/>
+              <a:t>DSMB reviews unblinded data in the midst of a trial to: </a:t>
+            </a:r>
+          </a:p>
+          <a:p>
+            <a:pPr marL="800100" lvl="1" indent="-285750"/>
+            <a:r>
+              <a:rPr lang="en-US" dirty="0">
+                <a:solidFill>
+                  <a:schemeClr val="tx1"/>
+                </a:solidFill>
+              </a:rPr>
+              <a:t>Assure the trial is safe to continue</a:t>
+            </a:r>
+          </a:p>
+          <a:p>
+            <a:pPr marL="800100" lvl="1" indent="-285750"/>
+            <a:r>
+              <a:rPr lang="en-US" dirty="0">
+                <a:solidFill>
+                  <a:schemeClr val="tx1"/>
+                </a:solidFill>
+              </a:rPr>
+              <a:t>Make decisions about early termination based on the statistical monitoring plan</a:t>
+            </a:r>
+          </a:p>
+          <a:p>
+            <a:pPr marL="1143000" lvl="2" indent="-285750"/>
+            <a:r>
+              <a:rPr lang="en-US" dirty="0">
+                <a:solidFill>
+                  <a:schemeClr val="tx1"/>
+                </a:solidFill>
+              </a:rPr>
+              <a:t>Early termination can be due to efficacy, futility, or safety</a:t>
+            </a:r>
+          </a:p>
+          <a:p>
+            <a:pPr marL="1485900" lvl="3" indent="-285750"/>
+            <a:r>
+              <a:rPr lang="en-US" dirty="0">
+                <a:solidFill>
+                  <a:schemeClr val="tx1"/>
+                </a:solidFill>
+              </a:rPr>
+              <a:t>Decision to terminate early must be considered in balance with all aspects of the trial and what we can learn (i.e. stopping early due to efficacy may make it difficult to learn about safety)</a:t>
+            </a:r>
+          </a:p>
+          <a:p>
+            <a:pPr marL="800100" lvl="1" indent="-285750"/>
+            <a:endParaRPr lang="en-US" dirty="0">
+              <a:solidFill>
+                <a:schemeClr val="tx1"/>
+              </a:solidFill>
+            </a:endParaRPr>
+          </a:p>
+          <a:p>
+            <a:pPr lvl="1" indent="0">
+              <a:buNone/>
+            </a:pPr>
+            <a:endParaRPr lang="en-US" dirty="0">
+              <a:solidFill>
+                <a:schemeClr val="tx1"/>
+              </a:solidFill>
+            </a:endParaRPr>
+          </a:p>
+          <a:p>
+            <a:endParaRPr lang="en-US" dirty="0"/>
+          </a:p>
+          <a:p>
+            <a:endParaRPr lang="en-US" dirty="0"/>
+          </a:p>
+          <a:p>
+            <a:pPr marL="285750" indent="-285750">
+              <a:buFont typeface="Arial" panose="020B0604020202020204" pitchFamily="34" charset="0"/>
+              <a:buChar char="•"/>
+            </a:pPr>
+            <a:endParaRPr lang="en-US" dirty="0"/>
+          </a:p>
+          <a:p>
+            <a:endParaRPr lang="en-US" dirty="0"/>
+          </a:p>
+        </p:txBody>
+      </p:sp>
+      <p:sp>
+        <p:nvSpPr>
+          <p:cNvPr id="3" name="Text Placeholder 2">
+            <a:extLst>
+              <a:ext uri="{FF2B5EF4-FFF2-40B4-BE49-F238E27FC236}">
+                <a16:creationId xmlns:a16="http://schemas.microsoft.com/office/drawing/2014/main" id="{9400E1B5-E92F-F1FF-562B-1517C4C45952}"/>
               </a:ext>
             </a:extLst>
           </p:cNvPr>
@@ -14154,32 +13869,24 @@
             <p:ph type="body" sz="quarter" idx="11"/>
           </p:nvPr>
         </p:nvSpPr>
-        <p:spPr>
-          <a:xfrm>
-            <a:off x="456271" y="259556"/>
-            <a:ext cx="8231459" cy="479584"/>
-          </a:xfrm>
-        </p:spPr>
+        <p:spPr/>
         <p:txBody>
           <a:bodyPr/>
           <a:lstStyle/>
           <a:p>
             <a:r>
               <a:rPr lang="en-US" dirty="0"/>
-              <a:t>Phase III Children’s Oncology Group Trial AAML0531 </a:t>
-            </a:r>
-          </a:p>
-          <a:p>
-            <a:endParaRPr lang="en-US" dirty="0"/>
-          </a:p>
-        </p:txBody>
-      </p:sp>
-      <p:sp>
-        <p:nvSpPr>
-          <p:cNvPr id="6" name="TextBox 5">
-            <a:extLst>
-              <a:ext uri="{FF2B5EF4-FFF2-40B4-BE49-F238E27FC236}">
-                <a16:creationId xmlns:a16="http://schemas.microsoft.com/office/drawing/2014/main" id="{4BE58701-7A32-63D2-E93C-037468836854}"/>
+              <a:t>Monitoring Patient Safety: Data Safety Monitoring Boards</a:t>
+            </a:r>
+          </a:p>
+        </p:txBody>
+      </p:sp>
+      <p:sp>
+        <p:nvSpPr>
+          <p:cNvPr id="4" name="TextBox 3">
+            <a:extLst>
+              <a:ext uri="{FF2B5EF4-FFF2-40B4-BE49-F238E27FC236}">
+                <a16:creationId xmlns:a16="http://schemas.microsoft.com/office/drawing/2014/main" id="{DF2012D2-3E5E-AA45-4DBC-81E9C0A7B091}"/>
               </a:ext>
             </a:extLst>
           </p:cNvPr>
@@ -14188,8 +13895,8 @@
         </p:nvSpPr>
         <p:spPr>
           <a:xfrm>
-            <a:off x="487680" y="906780"/>
-            <a:ext cx="8168640" cy="4247317"/>
+            <a:off x="6560820" y="4866501"/>
+            <a:ext cx="2468880" cy="276999"/>
           </a:xfrm>
           <a:prstGeom prst="rect">
             <a:avLst/>
@@ -14202,153 +13909,18 @@
           </a:bodyPr>
           <a:lstStyle/>
           <a:p>
-            <a:pPr marL="285750" indent="-285750">
-              <a:buFont typeface="Arial" panose="020B0604020202020204" pitchFamily="34" charset="0"/>
-              <a:buChar char="•"/>
-            </a:pPr>
-            <a:r>
-              <a:rPr lang="en-US" dirty="0"/>
-              <a:t>Acute Myeloid Leukemia (AML) is difficult to treat</a:t>
-            </a:r>
-          </a:p>
-          <a:p>
-            <a:pPr marL="742950" lvl="1" indent="-285750">
-              <a:buFont typeface="Arial" panose="020B0604020202020204" pitchFamily="34" charset="0"/>
-              <a:buChar char="•"/>
-            </a:pPr>
-            <a:r>
-              <a:rPr lang="en-US" dirty="0"/>
-              <a:t>Disease heterogeneity</a:t>
-            </a:r>
-          </a:p>
-          <a:p>
-            <a:pPr marL="742950" lvl="1" indent="-285750">
-              <a:buFont typeface="Arial" panose="020B0604020202020204" pitchFamily="34" charset="0"/>
-              <a:buChar char="•"/>
-            </a:pPr>
-            <a:r>
-              <a:rPr lang="en-US" dirty="0"/>
-              <a:t>High relapse</a:t>
-            </a:r>
-          </a:p>
-          <a:p>
-            <a:pPr marL="742950" lvl="1" indent="-285750">
-              <a:buFont typeface="Arial" panose="020B0604020202020204" pitchFamily="34" charset="0"/>
-              <a:buChar char="•"/>
-            </a:pPr>
-            <a:r>
-              <a:rPr lang="en-US" dirty="0"/>
-              <a:t>Toxic mortality</a:t>
-            </a:r>
-          </a:p>
-          <a:p>
-            <a:pPr marL="285750" indent="-285750">
-              <a:buFont typeface="Arial" panose="020B0604020202020204" pitchFamily="34" charset="0"/>
-              <a:buChar char="•"/>
-            </a:pPr>
-            <a:r>
-              <a:rPr lang="en-US" dirty="0"/>
-              <a:t>Treatment intensification has been used to help improve outcomes, but previous studies have shown that continuing to increase intensification leads to higher treatment-related mortality (limits reached)</a:t>
-            </a:r>
-          </a:p>
-          <a:p>
-            <a:pPr marL="285750" indent="-285750">
-              <a:buFont typeface="Arial" panose="020B0604020202020204" pitchFamily="34" charset="0"/>
-              <a:buChar char="•"/>
-            </a:pPr>
-            <a:r>
-              <a:rPr lang="en-US" dirty="0"/>
-              <a:t>Phase II studies have shown potential benefit and safety of </a:t>
-            </a:r>
-            <a:r>
-              <a:rPr lang="en-US" dirty="0" err="1"/>
-              <a:t>gemtuzumab-ozogamicin</a:t>
-            </a:r>
-            <a:r>
-              <a:rPr lang="en-US" dirty="0"/>
-              <a:t> (GO) in combination with chemotherapy</a:t>
-            </a:r>
-          </a:p>
-          <a:p>
-            <a:endParaRPr lang="en-US" dirty="0"/>
-          </a:p>
-          <a:p>
-            <a:endParaRPr lang="en-US" dirty="0"/>
-          </a:p>
-          <a:p>
-            <a:pPr marL="285750" indent="-285750">
-              <a:buFont typeface="Arial" panose="020B0604020202020204" pitchFamily="34" charset="0"/>
-              <a:buChar char="•"/>
-            </a:pPr>
-            <a:r>
-              <a:rPr lang="en-US" b="1" dirty="0">
-                <a:solidFill>
-                  <a:srgbClr val="990000"/>
-                </a:solidFill>
-              </a:rPr>
-              <a:t>Primary objective: </a:t>
-            </a:r>
-            <a:r>
-              <a:rPr lang="en-US" dirty="0"/>
-              <a:t>To determine whether GO added to standard chemotherapy improved EFS and OS in children with newly diagnosed AML. </a:t>
-            </a:r>
-          </a:p>
-          <a:p>
-            <a:pPr marL="285750" indent="-285750">
-              <a:buFont typeface="Arial" panose="020B0604020202020204" pitchFamily="34" charset="0"/>
-              <a:buChar char="•"/>
-            </a:pPr>
-            <a:endParaRPr lang="en-US" dirty="0"/>
-          </a:p>
-          <a:p>
-            <a:pPr marL="285750" indent="-285750">
-              <a:buFont typeface="Arial" panose="020B0604020202020204" pitchFamily="34" charset="0"/>
-              <a:buChar char="•"/>
-            </a:pPr>
-            <a:endParaRPr lang="en-US" dirty="0"/>
-          </a:p>
-        </p:txBody>
-      </p:sp>
-      <p:sp>
-        <p:nvSpPr>
-          <p:cNvPr id="7" name="TextBox 6">
-            <a:extLst>
-              <a:ext uri="{FF2B5EF4-FFF2-40B4-BE49-F238E27FC236}">
-                <a16:creationId xmlns:a16="http://schemas.microsoft.com/office/drawing/2014/main" id="{F35AB644-4A65-DA82-3A7B-CC18AB6FD797}"/>
-              </a:ext>
-            </a:extLst>
-          </p:cNvPr>
-          <p:cNvSpPr txBox="1"/>
-          <p:nvPr/>
-        </p:nvSpPr>
-        <p:spPr>
-          <a:xfrm>
-            <a:off x="6111240" y="4866501"/>
-            <a:ext cx="2971800" cy="276999"/>
-          </a:xfrm>
-          <a:prstGeom prst="rect">
-            <a:avLst/>
-          </a:prstGeom>
-          <a:noFill/>
-        </p:spPr>
-        <p:txBody>
-          <a:bodyPr wrap="square" rtlCol="0">
-            <a:spAutoFit/>
-          </a:bodyPr>
-          <a:lstStyle/>
-          <a:p>
             <a:pPr algn="r"/>
             <a:r>
               <a:rPr lang="en-US" sz="1200" dirty="0"/>
-              <a:t>(</a:t>
+              <a:t>(Gillen and </a:t>
             </a:r>
             <a:r>
               <a:rPr lang="en-US" sz="1200" dirty="0" err="1"/>
-              <a:t>Gamis</a:t>
+              <a:t>Kittelson</a:t>
             </a:r>
             <a:r>
               <a:rPr lang="en-US" sz="1200" dirty="0"/>
-              <a:t>, et al., 2014)</a:t>
+              <a:t>, 2017)</a:t>
             </a:r>
           </a:p>
         </p:txBody>
@@ -14356,7 +13928,7 @@
     </p:spTree>
     <p:extLst>
       <p:ext uri="{BB962C8B-B14F-4D97-AF65-F5344CB8AC3E}">
-        <p14:creationId xmlns:p14="http://schemas.microsoft.com/office/powerpoint/2010/main" val="2255365278"/>
+        <p14:creationId xmlns:p14="http://schemas.microsoft.com/office/powerpoint/2010/main" val="3439635666"/>
       </p:ext>
     </p:extLst>
   </p:cSld>
@@ -14385,10 +13957,10 @@
       </p:grpSpPr>
       <p:sp>
         <p:nvSpPr>
-          <p:cNvPr id="5" name="Text Placeholder 4">
-            <a:extLst>
-              <a:ext uri="{FF2B5EF4-FFF2-40B4-BE49-F238E27FC236}">
-                <a16:creationId xmlns:a16="http://schemas.microsoft.com/office/drawing/2014/main" id="{8EE35CCD-5E6E-9EDB-33D2-4D88C23F7438}"/>
+          <p:cNvPr id="3" name="Text Placeholder 2">
+            <a:extLst>
+              <a:ext uri="{FF2B5EF4-FFF2-40B4-BE49-F238E27FC236}">
+                <a16:creationId xmlns:a16="http://schemas.microsoft.com/office/drawing/2014/main" id="{9E34FE8B-2C8D-797F-86CD-8EF5E922A2A3}"/>
               </a:ext>
             </a:extLst>
           </p:cNvPr>
@@ -14401,8 +13973,8 @@
         </p:nvSpPr>
         <p:spPr>
           <a:xfrm>
-            <a:off x="456271" y="259556"/>
-            <a:ext cx="8231459" cy="479584"/>
+            <a:off x="2887051" y="2076450"/>
+            <a:ext cx="8231459" cy="990600"/>
           </a:xfrm>
         </p:spPr>
         <p:txBody>
@@ -14411,150 +13983,7 @@
           <a:p>
             <a:r>
               <a:rPr lang="en-US" dirty="0"/>
-              <a:t>Phase III Children’s Oncology Group Trial AAML0531 </a:t>
-            </a:r>
-          </a:p>
-          <a:p>
-            <a:endParaRPr lang="en-US" dirty="0"/>
-          </a:p>
-        </p:txBody>
-      </p:sp>
-      <p:sp>
-        <p:nvSpPr>
-          <p:cNvPr id="6" name="TextBox 5">
-            <a:extLst>
-              <a:ext uri="{FF2B5EF4-FFF2-40B4-BE49-F238E27FC236}">
-                <a16:creationId xmlns:a16="http://schemas.microsoft.com/office/drawing/2014/main" id="{4BE58701-7A32-63D2-E93C-037468836854}"/>
-              </a:ext>
-            </a:extLst>
-          </p:cNvPr>
-          <p:cNvSpPr txBox="1"/>
-          <p:nvPr/>
-        </p:nvSpPr>
-        <p:spPr>
-          <a:xfrm>
-            <a:off x="456271" y="815340"/>
-            <a:ext cx="8168640" cy="2031325"/>
-          </a:xfrm>
-          <a:prstGeom prst="rect">
-            <a:avLst/>
-          </a:prstGeom>
-          <a:noFill/>
-        </p:spPr>
-        <p:txBody>
-          <a:bodyPr wrap="square" rtlCol="0">
-            <a:spAutoFit/>
-          </a:bodyPr>
-          <a:lstStyle/>
-          <a:p>
-            <a:endParaRPr lang="en-US" dirty="0"/>
-          </a:p>
-          <a:p>
-            <a:r>
-              <a:rPr lang="en-US" dirty="0"/>
-              <a:t>“The </a:t>
-            </a:r>
-            <a:r>
-              <a:rPr lang="en-US" dirty="0">
-                <a:solidFill>
-                  <a:srgbClr val="990000"/>
-                </a:solidFill>
-              </a:rPr>
-              <a:t>National Cancer Institute’s central institutional review board and institutional review boards </a:t>
-            </a:r>
-            <a:r>
-              <a:rPr lang="en-US" dirty="0"/>
-              <a:t>at each enrolling center (n = 181) </a:t>
-            </a:r>
-            <a:r>
-              <a:rPr lang="en-US" dirty="0">
-                <a:solidFill>
-                  <a:srgbClr val="990000"/>
-                </a:solidFill>
-              </a:rPr>
-              <a:t>approved the study; </a:t>
-            </a:r>
-            <a:r>
-              <a:rPr lang="en-US" dirty="0"/>
-              <a:t>patients and their families provided </a:t>
-            </a:r>
-            <a:r>
-              <a:rPr lang="en-US" dirty="0">
-                <a:solidFill>
-                  <a:srgbClr val="990000"/>
-                </a:solidFill>
-              </a:rPr>
-              <a:t>informed consent or assent </a:t>
-            </a:r>
-            <a:r>
-              <a:rPr lang="en-US" dirty="0"/>
-              <a:t>as appropriate. The trial was conducted in accordance with the </a:t>
-            </a:r>
-            <a:r>
-              <a:rPr lang="en-US" dirty="0">
-                <a:solidFill>
-                  <a:srgbClr val="990000"/>
-                </a:solidFill>
-              </a:rPr>
-              <a:t>Declaration of Helsinki</a:t>
-            </a:r>
-            <a:r>
-              <a:rPr lang="en-US" dirty="0"/>
-              <a:t>. The trial was registered at </a:t>
-            </a:r>
-            <a:r>
-              <a:rPr lang="en-US" dirty="0" err="1"/>
-              <a:t>www.clinicaltrials.gov</a:t>
-            </a:r>
-            <a:r>
-              <a:rPr lang="en-US" dirty="0"/>
-              <a:t> as NCT00372593.” </a:t>
-            </a:r>
-          </a:p>
-          <a:p>
-            <a:endParaRPr lang="en-US" dirty="0"/>
-          </a:p>
-        </p:txBody>
-      </p:sp>
-      <p:sp>
-        <p:nvSpPr>
-          <p:cNvPr id="2" name="Rectangle 1">
-            <a:extLst>
-              <a:ext uri="{FF2B5EF4-FFF2-40B4-BE49-F238E27FC236}">
-                <a16:creationId xmlns:a16="http://schemas.microsoft.com/office/drawing/2014/main" id="{69E37BCA-0C49-D352-9B41-6DACBF8D8C09}"/>
-              </a:ext>
-            </a:extLst>
-          </p:cNvPr>
-          <p:cNvSpPr/>
-          <p:nvPr/>
-        </p:nvSpPr>
-        <p:spPr>
-          <a:xfrm>
-            <a:off x="7703414" y="4883944"/>
-            <a:ext cx="1440586" cy="276999"/>
-          </a:xfrm>
-          <a:prstGeom prst="rect">
-            <a:avLst/>
-          </a:prstGeom>
-        </p:spPr>
-        <p:txBody>
-          <a:bodyPr wrap="none">
-            <a:spAutoFit/>
-          </a:bodyPr>
-          <a:lstStyle/>
-          <a:p>
-            <a:pPr algn="r"/>
-            <a:r>
-              <a:rPr lang="en-US" sz="1200" dirty="0"/>
-              <a:t>(</a:t>
-            </a:r>
-            <a:r>
-              <a:rPr lang="en-US" sz="1200" dirty="0" err="1"/>
-              <a:t>Gamis</a:t>
-            </a:r>
-            <a:r>
-              <a:rPr lang="en-US" sz="1200" dirty="0"/>
-              <a:t>, et al., 2014)</a:t>
+              <a:t>One More Example..</a:t>
             </a:r>
           </a:p>
         </p:txBody>
@@ -14562,7 +13991,7 @@
     </p:spTree>
     <p:extLst>
       <p:ext uri="{BB962C8B-B14F-4D97-AF65-F5344CB8AC3E}">
-        <p14:creationId xmlns:p14="http://schemas.microsoft.com/office/powerpoint/2010/main" val="952785393"/>
+        <p14:creationId xmlns:p14="http://schemas.microsoft.com/office/powerpoint/2010/main" val="854761756"/>
       </p:ext>
     </p:extLst>
   </p:cSld>
@@ -14627,60 +14056,6 @@
       </p:sp>
       <p:sp>
         <p:nvSpPr>
-          <p:cNvPr id="3" name="Rectangle 2">
-            <a:extLst>
-              <a:ext uri="{FF2B5EF4-FFF2-40B4-BE49-F238E27FC236}">
-                <a16:creationId xmlns:a16="http://schemas.microsoft.com/office/drawing/2014/main" id="{0A77BB9C-6C93-FB94-617C-B61C2C38BF53}"/>
-              </a:ext>
-            </a:extLst>
-          </p:cNvPr>
-          <p:cNvSpPr/>
-          <p:nvPr/>
-        </p:nvSpPr>
-        <p:spPr>
-          <a:xfrm>
-            <a:off x="110359" y="4296103"/>
-            <a:ext cx="930165" cy="788276"/>
-          </a:xfrm>
-          <a:prstGeom prst="rect">
-            <a:avLst/>
-          </a:prstGeom>
-          <a:solidFill>
-            <a:schemeClr val="bg1"/>
-          </a:solidFill>
-          <a:ln>
-            <a:solidFill>
-              <a:schemeClr val="bg1"/>
-            </a:solidFill>
-          </a:ln>
-        </p:spPr>
-        <p:style>
-          <a:lnRef idx="2">
-            <a:schemeClr val="accent1">
-              <a:shade val="15000"/>
-            </a:schemeClr>
-          </a:lnRef>
-          <a:fillRef idx="1">
-            <a:schemeClr val="accent1"/>
-          </a:fillRef>
-          <a:effectRef idx="0">
-            <a:schemeClr val="accent1"/>
-          </a:effectRef>
-          <a:fontRef idx="minor">
-            <a:schemeClr val="lt1"/>
-          </a:fontRef>
-        </p:style>
-        <p:txBody>
-          <a:bodyPr rtlCol="0" anchor="ctr"/>
-          <a:lstStyle/>
-          <a:p>
-            <a:pPr algn="ctr"/>
-            <a:endParaRPr lang="en-US"/>
-          </a:p>
-        </p:txBody>
-      </p:sp>
-      <p:sp>
-        <p:nvSpPr>
           <p:cNvPr id="6" name="TextBox 5">
             <a:extLst>
               <a:ext uri="{FF2B5EF4-FFF2-40B4-BE49-F238E27FC236}">
@@ -14693,8 +14068,8 @@
         </p:nvSpPr>
         <p:spPr>
           <a:xfrm>
-            <a:off x="456271" y="815340"/>
-            <a:ext cx="8168640" cy="4524315"/>
+            <a:off x="487680" y="906780"/>
+            <a:ext cx="8168640" cy="4247317"/>
           </a:xfrm>
           <a:prstGeom prst="rect">
             <a:avLst/>
@@ -14707,19 +14082,43 @@
           </a:bodyPr>
           <a:lstStyle/>
           <a:p>
-            <a:r>
-              <a:rPr lang="en-US" dirty="0"/>
-              <a:t>Exclusion Criteria: </a:t>
-            </a:r>
-          </a:p>
-          <a:p>
             <a:pPr marL="285750" indent="-285750">
               <a:buFont typeface="Arial" panose="020B0604020202020204" pitchFamily="34" charset="0"/>
               <a:buChar char="•"/>
             </a:pPr>
             <a:r>
               <a:rPr lang="en-US" dirty="0"/>
-              <a:t>Prior chemotherapy (except intrathecal cytarabine)</a:t>
+              <a:t>Acute Myeloid Leukemia (AML) is difficult to treat</a:t>
+            </a:r>
+          </a:p>
+          <a:p>
+            <a:pPr marL="742950" lvl="1" indent="-285750">
+              <a:buFont typeface="Arial" panose="020B0604020202020204" pitchFamily="34" charset="0"/>
+              <a:buChar char="•"/>
+            </a:pPr>
+            <a:r>
+              <a:rPr lang="en-US" dirty="0"/>
+              <a:t>Disease heterogeneity</a:t>
+            </a:r>
+          </a:p>
+          <a:p>
+            <a:pPr marL="742950" lvl="1" indent="-285750">
+              <a:buFont typeface="Arial" panose="020B0604020202020204" pitchFamily="34" charset="0"/>
+              <a:buChar char="•"/>
+            </a:pPr>
+            <a:r>
+              <a:rPr lang="en-US" dirty="0"/>
+              <a:t>High relapse</a:t>
+            </a:r>
+          </a:p>
+          <a:p>
+            <a:pPr marL="742950" lvl="1" indent="-285750">
+              <a:buFont typeface="Arial" panose="020B0604020202020204" pitchFamily="34" charset="0"/>
+              <a:buChar char="•"/>
+            </a:pPr>
+            <a:r>
+              <a:rPr lang="en-US" dirty="0"/>
+              <a:t>Toxic mortality</a:t>
             </a:r>
           </a:p>
           <a:p>
@@ -14729,7 +14128,7 @@
             </a:pPr>
             <a:r>
               <a:rPr lang="en-US" dirty="0"/>
-              <a:t>Acute promyelocytic leukemia [t(15;17)]</a:t>
+              <a:t>Treatment intensification has been used to help improve outcomes, but previous studies have shown that continuing to increase intensification leads to higher treatment-related mortality (limits reached)</a:t>
             </a:r>
           </a:p>
           <a:p>
@@ -14739,115 +14138,81 @@
             </a:pPr>
             <a:r>
               <a:rPr lang="en-US" dirty="0"/>
-              <a:t>Juvenile myelomonocytic leukemia</a:t>
-            </a:r>
+              <a:t>Phase II studies have shown potential benefit and safety of </a:t>
+            </a:r>
+            <a:r>
+              <a:rPr lang="en-US" dirty="0" err="1"/>
+              <a:t>gemtuzumab-ozogamicin</a:t>
+            </a:r>
+            <a:r>
+              <a:rPr lang="en-US" dirty="0"/>
+              <a:t> (GO) in combination with chemotherapy</a:t>
+            </a:r>
+          </a:p>
+          <a:p>
+            <a:endParaRPr lang="en-US" dirty="0"/>
+          </a:p>
+          <a:p>
+            <a:endParaRPr lang="en-US" dirty="0"/>
           </a:p>
           <a:p>
             <a:pPr marL="285750" indent="-285750">
               <a:buFont typeface="Arial" panose="020B0604020202020204" pitchFamily="34" charset="0"/>
               <a:buChar char="•"/>
             </a:pPr>
-            <a:r>
-              <a:rPr lang="en-US" dirty="0"/>
-              <a:t>Bone marrow failure syndromes </a:t>
-            </a:r>
-          </a:p>
-          <a:p>
-            <a:pPr marL="285750" indent="-285750">
-              <a:buFont typeface="Arial" panose="020B0604020202020204" pitchFamily="34" charset="0"/>
-              <a:buChar char="•"/>
-            </a:pPr>
-            <a:r>
-              <a:rPr lang="en-US" dirty="0"/>
-              <a:t>Secondary AML</a:t>
-            </a:r>
-          </a:p>
-          <a:p>
-            <a:endParaRPr lang="en-US" dirty="0"/>
-          </a:p>
-          <a:p>
-            <a:r>
-              <a:rPr lang="en-US" dirty="0"/>
-              <a:t>Patients were randomly assigned</a:t>
-            </a:r>
-          </a:p>
-          <a:p>
-            <a:pPr marL="285750" indent="-285750">
-              <a:buFont typeface="Arial" panose="020B0604020202020204" pitchFamily="34" charset="0"/>
-              <a:buChar char="•"/>
-            </a:pPr>
-            <a:r>
-              <a:rPr lang="en-US" dirty="0"/>
-              <a:t>Standard therapy alone (</a:t>
-            </a:r>
-            <a:r>
-              <a:rPr lang="en-US" dirty="0" err="1"/>
-              <a:t>No-GO</a:t>
-            </a:r>
-            <a:r>
-              <a:rPr lang="en-US" dirty="0"/>
-              <a:t>)</a:t>
-            </a:r>
-          </a:p>
-          <a:p>
-            <a:pPr marL="285750" indent="-285750">
-              <a:buFont typeface="Arial" panose="020B0604020202020204" pitchFamily="34" charset="0"/>
-              <a:buChar char="•"/>
-            </a:pPr>
-            <a:r>
-              <a:rPr lang="en-US" dirty="0"/>
-              <a:t>Standard therapy + GO (GO)</a:t>
-            </a:r>
-          </a:p>
-          <a:p>
-            <a:r>
-              <a:rPr lang="en-US" dirty="0"/>
-              <a:t>“Blocked randomization with </a:t>
-            </a:r>
             <a:r>
               <a:rPr lang="en-US" b="1" dirty="0">
                 <a:solidFill>
                   <a:srgbClr val="990000"/>
                 </a:solidFill>
               </a:rPr>
-              <a:t>blocks of size 4 </a:t>
-            </a:r>
-            <a:r>
-              <a:rPr lang="en-US" dirty="0"/>
-              <a:t>that were concealed from enrolling centers was used for treatment arm assignment. The COG Data and Statistical Center assigned patients to the treatment arms, after they were enrolled by the patient’s institution through an automated Web portal.”</a:t>
-            </a:r>
-          </a:p>
-          <a:p>
+              <a:t>Primary objective: </a:t>
+            </a:r>
+            <a:r>
+              <a:rPr lang="en-US" dirty="0"/>
+              <a:t>To determine whether GO added to standard chemotherapy improved EFS and OS in children with newly diagnosed AML. </a:t>
+            </a:r>
+          </a:p>
+          <a:p>
+            <a:pPr marL="285750" indent="-285750">
+              <a:buFont typeface="Arial" panose="020B0604020202020204" pitchFamily="34" charset="0"/>
+              <a:buChar char="•"/>
+            </a:pPr>
             <a:endParaRPr lang="en-US" dirty="0"/>
           </a:p>
           <a:p>
+            <a:pPr marL="285750" indent="-285750">
+              <a:buFont typeface="Arial" panose="020B0604020202020204" pitchFamily="34" charset="0"/>
+              <a:buChar char="•"/>
+            </a:pPr>
             <a:endParaRPr lang="en-US" dirty="0"/>
           </a:p>
         </p:txBody>
       </p:sp>
       <p:sp>
         <p:nvSpPr>
-          <p:cNvPr id="2" name="Rectangle 1">
-            <a:extLst>
-              <a:ext uri="{FF2B5EF4-FFF2-40B4-BE49-F238E27FC236}">
-                <a16:creationId xmlns:a16="http://schemas.microsoft.com/office/drawing/2014/main" id="{9A757850-6309-D78B-AF5A-79742DAF2810}"/>
-              </a:ext>
-            </a:extLst>
-          </p:cNvPr>
-          <p:cNvSpPr/>
+          <p:cNvPr id="7" name="TextBox 6">
+            <a:extLst>
+              <a:ext uri="{FF2B5EF4-FFF2-40B4-BE49-F238E27FC236}">
+                <a16:creationId xmlns:a16="http://schemas.microsoft.com/office/drawing/2014/main" id="{F35AB644-4A65-DA82-3A7B-CC18AB6FD797}"/>
+              </a:ext>
+            </a:extLst>
+          </p:cNvPr>
+          <p:cNvSpPr txBox="1"/>
           <p:nvPr/>
         </p:nvSpPr>
         <p:spPr>
           <a:xfrm>
-            <a:off x="7782799" y="4866501"/>
-            <a:ext cx="1440586" cy="276999"/>
+            <a:off x="6111240" y="4866501"/>
+            <a:ext cx="2971800" cy="276999"/>
           </a:xfrm>
           <a:prstGeom prst="rect">
             <a:avLst/>
           </a:prstGeom>
-        </p:spPr>
-        <p:txBody>
-          <a:bodyPr wrap="none">
+          <a:noFill/>
+        </p:spPr>
+        <p:txBody>
+          <a:bodyPr wrap="square" rtlCol="0">
             <a:spAutoFit/>
           </a:bodyPr>
           <a:lstStyle/>
@@ -14871,7 +14236,7 @@
     </p:spTree>
     <p:extLst>
       <p:ext uri="{BB962C8B-B14F-4D97-AF65-F5344CB8AC3E}">
-        <p14:creationId xmlns:p14="http://schemas.microsoft.com/office/powerpoint/2010/main" val="3889199249"/>
+        <p14:creationId xmlns:p14="http://schemas.microsoft.com/office/powerpoint/2010/main" val="2255365278"/>
       </p:ext>
     </p:extLst>
   </p:cSld>
@@ -14949,7 +14314,7 @@
         <p:spPr>
           <a:xfrm>
             <a:off x="456271" y="815340"/>
-            <a:ext cx="8168640" cy="1200329"/>
+            <a:ext cx="8168640" cy="2031325"/>
           </a:xfrm>
           <a:prstGeom prst="rect">
             <a:avLst/>
@@ -14962,24 +14327,73 @@
           </a:bodyPr>
           <a:lstStyle/>
           <a:p>
-            <a:r>
-              <a:rPr lang="en-US" dirty="0"/>
-              <a:t>Primary endpoints: Overall survival (OS) and event-free survival (EFS)</a:t>
-            </a:r>
-          </a:p>
-          <a:p>
-            <a:pPr marL="285750" indent="-285750">
-              <a:buFont typeface="Arial" panose="020B0604020202020204" pitchFamily="34" charset="0"/>
-              <a:buChar char="•"/>
-            </a:pPr>
-            <a:r>
-              <a:rPr lang="en-US" dirty="0"/>
-              <a:t>EFS was defined as the time from study entry until death, induction failure, or relapse of any type</a:t>
-            </a:r>
-          </a:p>
-          <a:p>
             <a:endParaRPr lang="en-US" dirty="0"/>
           </a:p>
+          <a:p>
+            <a:r>
+              <a:rPr lang="en-US" dirty="0"/>
+              <a:t>“The </a:t>
+            </a:r>
+            <a:r>
+              <a:rPr lang="en-US" dirty="0">
+                <a:solidFill>
+                  <a:srgbClr val="990000"/>
+                </a:solidFill>
+              </a:rPr>
+              <a:t>National Cancer Institute’s central institutional review board and institutional review boards </a:t>
+            </a:r>
+            <a:r>
+              <a:rPr lang="en-US" dirty="0"/>
+              <a:t>at each enrolling center (n = 181) </a:t>
+            </a:r>
+            <a:r>
+              <a:rPr lang="en-US" dirty="0">
+                <a:solidFill>
+                  <a:srgbClr val="990000"/>
+                </a:solidFill>
+              </a:rPr>
+              <a:t>approved the study; </a:t>
+            </a:r>
+            <a:r>
+              <a:rPr lang="en-US" dirty="0"/>
+              <a:t>patients and their families provided </a:t>
+            </a:r>
+            <a:r>
+              <a:rPr lang="en-US" dirty="0">
+                <a:solidFill>
+                  <a:srgbClr val="990000"/>
+                </a:solidFill>
+              </a:rPr>
+              <a:t>informed consent or assent </a:t>
+            </a:r>
+            <a:r>
+              <a:rPr lang="en-US" dirty="0"/>
+              <a:t>as appropriate. The trial was conducted in accordance with the </a:t>
+            </a:r>
+            <a:r>
+              <a:rPr lang="en-US" dirty="0">
+                <a:solidFill>
+                  <a:srgbClr val="990000"/>
+                </a:solidFill>
+              </a:rPr>
+              <a:t>Declaration of Helsinki</a:t>
+            </a:r>
+            <a:r>
+              <a:rPr lang="en-US" dirty="0"/>
+              <a:t>. The trial was registered at </a:t>
+            </a:r>
+            <a:r>
+              <a:rPr lang="en-US" dirty="0" err="1"/>
+              <a:t>www.clinicaltrials.gov</a:t>
+            </a:r>
+            <a:r>
+              <a:rPr lang="en-US" dirty="0"/>
+              <a:t> as NCT00372593.” </a:t>
+            </a:r>
+          </a:p>
+          <a:p>
+            <a:endParaRPr lang="en-US" dirty="0"/>
+          </a:p>
         </p:txBody>
       </p:sp>
       <p:sp>
@@ -14987,7 +14401,7 @@
           <p:cNvPr id="2" name="Rectangle 1">
             <a:extLst>
               <a:ext uri="{FF2B5EF4-FFF2-40B4-BE49-F238E27FC236}">
-                <a16:creationId xmlns:a16="http://schemas.microsoft.com/office/drawing/2014/main" id="{2E4D7AF7-B964-1A6B-A6E3-63815F9880F4}"/>
+                <a16:creationId xmlns:a16="http://schemas.microsoft.com/office/drawing/2014/main" id="{69E37BCA-0C49-D352-9B41-6DACBF8D8C09}"/>
               </a:ext>
             </a:extLst>
           </p:cNvPr>
@@ -15028,7 +14442,7 @@
     </p:spTree>
     <p:extLst>
       <p:ext uri="{BB962C8B-B14F-4D97-AF65-F5344CB8AC3E}">
-        <p14:creationId xmlns:p14="http://schemas.microsoft.com/office/powerpoint/2010/main" val="952745111"/>
+        <p14:creationId xmlns:p14="http://schemas.microsoft.com/office/powerpoint/2010/main" val="952785393"/>
       </p:ext>
     </p:extLst>
   </p:cSld>
@@ -15209,97 +14623,10 @@
       </p:grpSpPr>
       <p:sp>
         <p:nvSpPr>
-          <p:cNvPr id="2" name="Text Placeholder 1">
-            <a:extLst>
-              <a:ext uri="{FF2B5EF4-FFF2-40B4-BE49-F238E27FC236}">
-                <a16:creationId xmlns:a16="http://schemas.microsoft.com/office/drawing/2014/main" id="{75401D3B-A36E-E05E-374D-6831AB80FCE9}"/>
-              </a:ext>
-            </a:extLst>
-          </p:cNvPr>
-          <p:cNvSpPr>
-            <a:spLocks noGrp="1"/>
-          </p:cNvSpPr>
-          <p:nvPr>
-            <p:ph type="body" sz="quarter" idx="10"/>
-          </p:nvPr>
-        </p:nvSpPr>
-        <p:spPr/>
-        <p:txBody>
-          <a:bodyPr/>
-          <a:lstStyle/>
-          <a:p>
-            <a:r>
-              <a:rPr lang="en-US" dirty="0"/>
-              <a:t>“The study had a goal to enroll </a:t>
-            </a:r>
-            <a:r>
-              <a:rPr lang="en-US" b="1" dirty="0">
-                <a:solidFill>
-                  <a:srgbClr val="990000"/>
-                </a:solidFill>
-              </a:rPr>
-              <a:t>1,000 eligible patients </a:t>
-            </a:r>
-            <a:r>
-              <a:rPr lang="en-US" dirty="0"/>
-              <a:t>who did not have Down syndrome and was designed to have </a:t>
-            </a:r>
-            <a:r>
-              <a:rPr lang="en-US" b="1" dirty="0">
-                <a:solidFill>
-                  <a:srgbClr val="990000"/>
-                </a:solidFill>
-              </a:rPr>
-              <a:t>80% power with one-sided 2.5% type I error to detect a 9% improvement in long-term EFS (54% </a:t>
-            </a:r>
-            <a:r>
-              <a:rPr lang="en-US" b="1" i="1" dirty="0">
-                <a:solidFill>
-                  <a:srgbClr val="990000"/>
-                </a:solidFill>
-              </a:rPr>
-              <a:t>v </a:t>
-            </a:r>
-            <a:r>
-              <a:rPr lang="en-US" b="1" dirty="0">
-                <a:solidFill>
-                  <a:srgbClr val="990000"/>
-                </a:solidFill>
-              </a:rPr>
-              <a:t>45%) and long- term OS (59% </a:t>
-            </a:r>
-            <a:r>
-              <a:rPr lang="en-US" b="1" i="1" dirty="0">
-                <a:solidFill>
-                  <a:srgbClr val="990000"/>
-                </a:solidFill>
-              </a:rPr>
-              <a:t>v </a:t>
-            </a:r>
-            <a:r>
-              <a:rPr lang="en-US" b="1" dirty="0">
-                <a:solidFill>
-                  <a:srgbClr val="990000"/>
-                </a:solidFill>
-              </a:rPr>
-              <a:t>50%) </a:t>
-            </a:r>
-            <a:r>
-              <a:rPr lang="en-US" dirty="0"/>
-              <a:t>between the two study arms. The study was monitored by a data safety monitoring committee.”</a:t>
-            </a:r>
-          </a:p>
-          <a:p>
-            <a:endParaRPr lang="en-US" dirty="0"/>
-          </a:p>
-        </p:txBody>
-      </p:sp>
-      <p:sp>
-        <p:nvSpPr>
-          <p:cNvPr id="3" name="Text Placeholder 2">
-            <a:extLst>
-              <a:ext uri="{FF2B5EF4-FFF2-40B4-BE49-F238E27FC236}">
-                <a16:creationId xmlns:a16="http://schemas.microsoft.com/office/drawing/2014/main" id="{B7E5E122-E8EA-AC85-F211-F5DBD93534F7}"/>
+          <p:cNvPr id="5" name="Text Placeholder 4">
+            <a:extLst>
+              <a:ext uri="{FF2B5EF4-FFF2-40B4-BE49-F238E27FC236}">
+                <a16:creationId xmlns:a16="http://schemas.microsoft.com/office/drawing/2014/main" id="{8EE35CCD-5E6E-9EDB-33D2-4D88C23F7438}"/>
               </a:ext>
             </a:extLst>
           </p:cNvPr>
@@ -15310,24 +14637,32 @@
             <p:ph type="body" sz="quarter" idx="11"/>
           </p:nvPr>
         </p:nvSpPr>
-        <p:spPr/>
+        <p:spPr>
+          <a:xfrm>
+            <a:off x="456271" y="259556"/>
+            <a:ext cx="8231459" cy="479584"/>
+          </a:xfrm>
+        </p:spPr>
         <p:txBody>
           <a:bodyPr/>
           <a:lstStyle/>
           <a:p>
             <a:r>
               <a:rPr lang="en-US" dirty="0"/>
-              <a:t>Phase III Children’s Oncology Group Trial AAML0531</a:t>
-            </a:r>
-          </a:p>
-        </p:txBody>
-      </p:sp>
-      <p:sp>
-        <p:nvSpPr>
-          <p:cNvPr id="4" name="Rectangle 3">
-            <a:extLst>
-              <a:ext uri="{FF2B5EF4-FFF2-40B4-BE49-F238E27FC236}">
-                <a16:creationId xmlns:a16="http://schemas.microsoft.com/office/drawing/2014/main" id="{9F7CDE27-A913-6B89-C6E8-506DA8E46595}"/>
+              <a:t>Phase III Children’s Oncology Group Trial AAML0531 </a:t>
+            </a:r>
+          </a:p>
+          <a:p>
+            <a:endParaRPr lang="en-US" dirty="0"/>
+          </a:p>
+        </p:txBody>
+      </p:sp>
+      <p:sp>
+        <p:nvSpPr>
+          <p:cNvPr id="3" name="Rectangle 2">
+            <a:extLst>
+              <a:ext uri="{FF2B5EF4-FFF2-40B4-BE49-F238E27FC236}">
+                <a16:creationId xmlns:a16="http://schemas.microsoft.com/office/drawing/2014/main" id="{0A77BB9C-6C93-FB94-617C-B61C2C38BF53}"/>
               </a:ext>
             </a:extLst>
           </p:cNvPr>
@@ -15336,12 +14671,212 @@
         </p:nvSpPr>
         <p:spPr>
           <a:xfrm>
-            <a:off x="7703414" y="4866501"/>
-            <a:ext cx="1440586" cy="276999"/>
+            <a:off x="110359" y="4296103"/>
+            <a:ext cx="930165" cy="788276"/>
           </a:xfrm>
           <a:prstGeom prst="rect">
             <a:avLst/>
           </a:prstGeom>
+          <a:solidFill>
+            <a:schemeClr val="bg1"/>
+          </a:solidFill>
+          <a:ln>
+            <a:solidFill>
+              <a:schemeClr val="bg1"/>
+            </a:solidFill>
+          </a:ln>
+        </p:spPr>
+        <p:style>
+          <a:lnRef idx="2">
+            <a:schemeClr val="accent1">
+              <a:shade val="15000"/>
+            </a:schemeClr>
+          </a:lnRef>
+          <a:fillRef idx="1">
+            <a:schemeClr val="accent1"/>
+          </a:fillRef>
+          <a:effectRef idx="0">
+            <a:schemeClr val="accent1"/>
+          </a:effectRef>
+          <a:fontRef idx="minor">
+            <a:schemeClr val="lt1"/>
+          </a:fontRef>
+        </p:style>
+        <p:txBody>
+          <a:bodyPr rtlCol="0" anchor="ctr"/>
+          <a:lstStyle/>
+          <a:p>
+            <a:pPr algn="ctr"/>
+            <a:endParaRPr lang="en-US"/>
+          </a:p>
+        </p:txBody>
+      </p:sp>
+      <p:sp>
+        <p:nvSpPr>
+          <p:cNvPr id="6" name="TextBox 5">
+            <a:extLst>
+              <a:ext uri="{FF2B5EF4-FFF2-40B4-BE49-F238E27FC236}">
+                <a16:creationId xmlns:a16="http://schemas.microsoft.com/office/drawing/2014/main" id="{4BE58701-7A32-63D2-E93C-037468836854}"/>
+              </a:ext>
+            </a:extLst>
+          </p:cNvPr>
+          <p:cNvSpPr txBox="1"/>
+          <p:nvPr/>
+        </p:nvSpPr>
+        <p:spPr>
+          <a:xfrm>
+            <a:off x="456271" y="815340"/>
+            <a:ext cx="8168640" cy="4524315"/>
+          </a:xfrm>
+          <a:prstGeom prst="rect">
+            <a:avLst/>
+          </a:prstGeom>
+          <a:noFill/>
+        </p:spPr>
+        <p:txBody>
+          <a:bodyPr wrap="square" rtlCol="0">
+            <a:spAutoFit/>
+          </a:bodyPr>
+          <a:lstStyle/>
+          <a:p>
+            <a:r>
+              <a:rPr lang="en-US" dirty="0"/>
+              <a:t>Exclusion Criteria: </a:t>
+            </a:r>
+          </a:p>
+          <a:p>
+            <a:pPr marL="285750" indent="-285750">
+              <a:buFont typeface="Arial" panose="020B0604020202020204" pitchFamily="34" charset="0"/>
+              <a:buChar char="•"/>
+            </a:pPr>
+            <a:r>
+              <a:rPr lang="en-US" dirty="0"/>
+              <a:t>Prior chemotherapy (except intrathecal cytarabine)</a:t>
+            </a:r>
+          </a:p>
+          <a:p>
+            <a:pPr marL="285750" indent="-285750">
+              <a:buFont typeface="Arial" panose="020B0604020202020204" pitchFamily="34" charset="0"/>
+              <a:buChar char="•"/>
+            </a:pPr>
+            <a:r>
+              <a:rPr lang="en-US" dirty="0"/>
+              <a:t>Acute promyelocytic leukemia [t(15;17)]</a:t>
+            </a:r>
+          </a:p>
+          <a:p>
+            <a:pPr marL="285750" indent="-285750">
+              <a:buFont typeface="Arial" panose="020B0604020202020204" pitchFamily="34" charset="0"/>
+              <a:buChar char="•"/>
+            </a:pPr>
+            <a:r>
+              <a:rPr lang="en-US" dirty="0"/>
+              <a:t>Juvenile myelomonocytic leukemia</a:t>
+            </a:r>
+          </a:p>
+          <a:p>
+            <a:pPr marL="285750" indent="-285750">
+              <a:buFont typeface="Arial" panose="020B0604020202020204" pitchFamily="34" charset="0"/>
+              <a:buChar char="•"/>
+            </a:pPr>
+            <a:r>
+              <a:rPr lang="en-US" dirty="0"/>
+              <a:t>Bone marrow failure syndromes </a:t>
+            </a:r>
+          </a:p>
+          <a:p>
+            <a:pPr marL="285750" indent="-285750">
+              <a:buFont typeface="Arial" panose="020B0604020202020204" pitchFamily="34" charset="0"/>
+              <a:buChar char="•"/>
+            </a:pPr>
+            <a:r>
+              <a:rPr lang="en-US" dirty="0"/>
+              <a:t>Secondary AML</a:t>
+            </a:r>
+          </a:p>
+          <a:p>
+            <a:endParaRPr lang="en-US" dirty="0"/>
+          </a:p>
+          <a:p>
+            <a:r>
+              <a:rPr lang="en-US" dirty="0"/>
+              <a:t>Patients were randomly assigned</a:t>
+            </a:r>
+          </a:p>
+          <a:p>
+            <a:pPr marL="285750" indent="-285750">
+              <a:buFont typeface="Arial" panose="020B0604020202020204" pitchFamily="34" charset="0"/>
+              <a:buChar char="•"/>
+            </a:pPr>
+            <a:r>
+              <a:rPr lang="en-US" dirty="0"/>
+              <a:t>Standard therapy alone (</a:t>
+            </a:r>
+            <a:r>
+              <a:rPr lang="en-US" dirty="0" err="1"/>
+              <a:t>No-GO</a:t>
+            </a:r>
+            <a:r>
+              <a:rPr lang="en-US" dirty="0"/>
+              <a:t>)</a:t>
+            </a:r>
+          </a:p>
+          <a:p>
+            <a:pPr marL="285750" indent="-285750">
+              <a:buFont typeface="Arial" panose="020B0604020202020204" pitchFamily="34" charset="0"/>
+              <a:buChar char="•"/>
+            </a:pPr>
+            <a:r>
+              <a:rPr lang="en-US" dirty="0"/>
+              <a:t>Standard therapy + GO (GO)</a:t>
+            </a:r>
+          </a:p>
+          <a:p>
+            <a:r>
+              <a:rPr lang="en-US" dirty="0"/>
+              <a:t>“Blocked randomization with </a:t>
+            </a:r>
+            <a:r>
+              <a:rPr lang="en-US" b="1" dirty="0">
+                <a:solidFill>
+                  <a:srgbClr val="990000"/>
+                </a:solidFill>
+              </a:rPr>
+              <a:t>blocks of size 4 </a:t>
+            </a:r>
+            <a:r>
+              <a:rPr lang="en-US" dirty="0"/>
+              <a:t>that were concealed from enrolling centers was used for treatment arm assignment. The COG Data and Statistical Center assigned patients to the treatment arms, after they were enrolled by the patient’s institution through an automated Web portal.”</a:t>
+            </a:r>
+          </a:p>
+          <a:p>
+            <a:endParaRPr lang="en-US" dirty="0"/>
+          </a:p>
+          <a:p>
+            <a:endParaRPr lang="en-US" dirty="0"/>
+          </a:p>
+        </p:txBody>
+      </p:sp>
+      <p:sp>
+        <p:nvSpPr>
+          <p:cNvPr id="2" name="Rectangle 1">
+            <a:extLst>
+              <a:ext uri="{FF2B5EF4-FFF2-40B4-BE49-F238E27FC236}">
+                <a16:creationId xmlns:a16="http://schemas.microsoft.com/office/drawing/2014/main" id="{9A757850-6309-D78B-AF5A-79742DAF2810}"/>
+              </a:ext>
+            </a:extLst>
+          </p:cNvPr>
+          <p:cNvSpPr/>
+          <p:nvPr/>
+        </p:nvSpPr>
+        <p:spPr>
+          <a:xfrm>
+            <a:off x="7782799" y="4866501"/>
+            <a:ext cx="1440586" cy="276999"/>
+          </a:xfrm>
+          <a:prstGeom prst="rect">
+            <a:avLst/>
+          </a:prstGeom>
         </p:spPr>
         <p:txBody>
           <a:bodyPr wrap="none">
@@ -15368,7 +14903,7 @@
     </p:spTree>
     <p:extLst>
       <p:ext uri="{BB962C8B-B14F-4D97-AF65-F5344CB8AC3E}">
-        <p14:creationId xmlns:p14="http://schemas.microsoft.com/office/powerpoint/2010/main" val="1439031967"/>
+        <p14:creationId xmlns:p14="http://schemas.microsoft.com/office/powerpoint/2010/main" val="3889199249"/>
       </p:ext>
     </p:extLst>
   </p:cSld>
@@ -15413,7 +14948,7 @@
         </p:nvSpPr>
         <p:spPr>
           <a:xfrm>
-            <a:off x="456270" y="19764"/>
+            <a:off x="456271" y="259556"/>
             <a:ext cx="8231459" cy="479584"/>
           </a:xfrm>
         </p:spPr>
@@ -15431,42 +14966,60 @@
           </a:p>
         </p:txBody>
       </p:sp>
-      <p:pic>
-        <p:nvPicPr>
-          <p:cNvPr id="3" name="Picture 2" descr="Table&#10;&#10;Description automatically generated">
-            <a:extLst>
-              <a:ext uri="{FF2B5EF4-FFF2-40B4-BE49-F238E27FC236}">
-                <a16:creationId xmlns:a16="http://schemas.microsoft.com/office/drawing/2014/main" id="{D11E52B9-C0E3-B44E-6C8B-114EAA59B8BE}"/>
-              </a:ext>
-            </a:extLst>
-          </p:cNvPr>
-          <p:cNvPicPr>
-            <a:picLocks noChangeAspect="1"/>
-          </p:cNvPicPr>
+      <p:sp>
+        <p:nvSpPr>
+          <p:cNvPr id="6" name="TextBox 5">
+            <a:extLst>
+              <a:ext uri="{FF2B5EF4-FFF2-40B4-BE49-F238E27FC236}">
+                <a16:creationId xmlns:a16="http://schemas.microsoft.com/office/drawing/2014/main" id="{4BE58701-7A32-63D2-E93C-037468836854}"/>
+              </a:ext>
+            </a:extLst>
+          </p:cNvPr>
+          <p:cNvSpPr txBox="1"/>
           <p:nvPr/>
-        </p:nvPicPr>
-        <p:blipFill>
-          <a:blip r:embed="rId2"/>
-          <a:stretch>
-            <a:fillRect/>
-          </a:stretch>
-        </p:blipFill>
-        <p:spPr>
-          <a:xfrm>
-            <a:off x="890863" y="365624"/>
-            <a:ext cx="7544478" cy="4412251"/>
+        </p:nvSpPr>
+        <p:spPr>
+          <a:xfrm>
+            <a:off x="456271" y="815340"/>
+            <a:ext cx="8168640" cy="1200329"/>
           </a:xfrm>
           <a:prstGeom prst="rect">
             <a:avLst/>
           </a:prstGeom>
-        </p:spPr>
-      </p:pic>
-      <p:sp>
-        <p:nvSpPr>
-          <p:cNvPr id="4" name="Rectangle 3">
-            <a:extLst>
-              <a:ext uri="{FF2B5EF4-FFF2-40B4-BE49-F238E27FC236}">
-                <a16:creationId xmlns:a16="http://schemas.microsoft.com/office/drawing/2014/main" id="{1A39FDC0-D9E5-17F3-58B8-017591CF166F}"/>
+          <a:noFill/>
+        </p:spPr>
+        <p:txBody>
+          <a:bodyPr wrap="square" rtlCol="0">
+            <a:spAutoFit/>
+          </a:bodyPr>
+          <a:lstStyle/>
+          <a:p>
+            <a:r>
+              <a:rPr lang="en-US" dirty="0"/>
+              <a:t>Primary endpoints: Overall survival (OS) and event-free survival (EFS)</a:t>
+            </a:r>
+          </a:p>
+          <a:p>
+            <a:pPr marL="285750" indent="-285750">
+              <a:buFont typeface="Arial" panose="020B0604020202020204" pitchFamily="34" charset="0"/>
+              <a:buChar char="•"/>
+            </a:pPr>
+            <a:r>
+              <a:rPr lang="en-US" dirty="0"/>
+              <a:t>EFS was defined as the time from study entry until death, induction failure, or relapse of any type</a:t>
+            </a:r>
+          </a:p>
+          <a:p>
+            <a:endParaRPr lang="en-US" dirty="0"/>
+          </a:p>
+        </p:txBody>
+      </p:sp>
+      <p:sp>
+        <p:nvSpPr>
+          <p:cNvPr id="2" name="Rectangle 1">
+            <a:extLst>
+              <a:ext uri="{FF2B5EF4-FFF2-40B4-BE49-F238E27FC236}">
+                <a16:creationId xmlns:a16="http://schemas.microsoft.com/office/drawing/2014/main" id="{2E4D7AF7-B964-1A6B-A6E3-63815F9880F4}"/>
               </a:ext>
             </a:extLst>
           </p:cNvPr>
@@ -15475,7 +15028,7 @@
         </p:nvSpPr>
         <p:spPr>
           <a:xfrm>
-            <a:off x="7715048" y="4866501"/>
+            <a:off x="7703414" y="4883944"/>
             <a:ext cx="1440586" cy="276999"/>
           </a:xfrm>
           <a:prstGeom prst="rect">
@@ -15507,7 +15060,7 @@
     </p:spTree>
     <p:extLst>
       <p:ext uri="{BB962C8B-B14F-4D97-AF65-F5344CB8AC3E}">
-        <p14:creationId xmlns:p14="http://schemas.microsoft.com/office/powerpoint/2010/main" val="3113929802"/>
+        <p14:creationId xmlns:p14="http://schemas.microsoft.com/office/powerpoint/2010/main" val="952745111"/>
       </p:ext>
     </p:extLst>
   </p:cSld>
@@ -15536,10 +15089,97 @@
       </p:grpSpPr>
       <p:sp>
         <p:nvSpPr>
-          <p:cNvPr id="5" name="Text Placeholder 4">
-            <a:extLst>
-              <a:ext uri="{FF2B5EF4-FFF2-40B4-BE49-F238E27FC236}">
-                <a16:creationId xmlns:a16="http://schemas.microsoft.com/office/drawing/2014/main" id="{8EE35CCD-5E6E-9EDB-33D2-4D88C23F7438}"/>
+          <p:cNvPr id="2" name="Text Placeholder 1">
+            <a:extLst>
+              <a:ext uri="{FF2B5EF4-FFF2-40B4-BE49-F238E27FC236}">
+                <a16:creationId xmlns:a16="http://schemas.microsoft.com/office/drawing/2014/main" id="{75401D3B-A36E-E05E-374D-6831AB80FCE9}"/>
+              </a:ext>
+            </a:extLst>
+          </p:cNvPr>
+          <p:cNvSpPr>
+            <a:spLocks noGrp="1"/>
+          </p:cNvSpPr>
+          <p:nvPr>
+            <p:ph type="body" sz="quarter" idx="10"/>
+          </p:nvPr>
+        </p:nvSpPr>
+        <p:spPr/>
+        <p:txBody>
+          <a:bodyPr/>
+          <a:lstStyle/>
+          <a:p>
+            <a:r>
+              <a:rPr lang="en-US" dirty="0"/>
+              <a:t>“The study had a goal to enroll </a:t>
+            </a:r>
+            <a:r>
+              <a:rPr lang="en-US" b="1" dirty="0">
+                <a:solidFill>
+                  <a:srgbClr val="990000"/>
+                </a:solidFill>
+              </a:rPr>
+              <a:t>1,000 eligible patients </a:t>
+            </a:r>
+            <a:r>
+              <a:rPr lang="en-US" dirty="0"/>
+              <a:t>who did not have Down syndrome and was designed to have </a:t>
+            </a:r>
+            <a:r>
+              <a:rPr lang="en-US" b="1" dirty="0">
+                <a:solidFill>
+                  <a:srgbClr val="990000"/>
+                </a:solidFill>
+              </a:rPr>
+              <a:t>80% power with one-sided 2.5% type I error to detect a 9% improvement in long-term EFS (54% </a:t>
+            </a:r>
+            <a:r>
+              <a:rPr lang="en-US" b="1" i="1" dirty="0">
+                <a:solidFill>
+                  <a:srgbClr val="990000"/>
+                </a:solidFill>
+              </a:rPr>
+              <a:t>v </a:t>
+            </a:r>
+            <a:r>
+              <a:rPr lang="en-US" b="1" dirty="0">
+                <a:solidFill>
+                  <a:srgbClr val="990000"/>
+                </a:solidFill>
+              </a:rPr>
+              <a:t>45%) and long- term OS (59% </a:t>
+            </a:r>
+            <a:r>
+              <a:rPr lang="en-US" b="1" i="1" dirty="0">
+                <a:solidFill>
+                  <a:srgbClr val="990000"/>
+                </a:solidFill>
+              </a:rPr>
+              <a:t>v </a:t>
+            </a:r>
+            <a:r>
+              <a:rPr lang="en-US" b="1" dirty="0">
+                <a:solidFill>
+                  <a:srgbClr val="990000"/>
+                </a:solidFill>
+              </a:rPr>
+              <a:t>50%) </a:t>
+            </a:r>
+            <a:r>
+              <a:rPr lang="en-US" dirty="0"/>
+              <a:t>between the two study arms. The study was monitored by a data safety monitoring committee.”</a:t>
+            </a:r>
+          </a:p>
+          <a:p>
+            <a:endParaRPr lang="en-US" dirty="0"/>
+          </a:p>
+        </p:txBody>
+      </p:sp>
+      <p:sp>
+        <p:nvSpPr>
+          <p:cNvPr id="3" name="Text Placeholder 2">
+            <a:extLst>
+              <a:ext uri="{FF2B5EF4-FFF2-40B4-BE49-F238E27FC236}">
+                <a16:creationId xmlns:a16="http://schemas.microsoft.com/office/drawing/2014/main" id="{B7E5E122-E8EA-AC85-F211-F5DBD93534F7}"/>
               </a:ext>
             </a:extLst>
           </p:cNvPr>
@@ -15550,77 +15190,39 @@
             <p:ph type="body" sz="quarter" idx="11"/>
           </p:nvPr>
         </p:nvSpPr>
-        <p:spPr>
-          <a:xfrm>
-            <a:off x="456271" y="259556"/>
-            <a:ext cx="8231459" cy="479584"/>
-          </a:xfrm>
-        </p:spPr>
+        <p:spPr/>
         <p:txBody>
           <a:bodyPr/>
           <a:lstStyle/>
           <a:p>
             <a:r>
               <a:rPr lang="en-US" dirty="0"/>
-              <a:t>Phase III Children’s Oncology Group Trial AAML0531 </a:t>
-            </a:r>
-          </a:p>
-          <a:p>
-            <a:endParaRPr lang="en-US" dirty="0"/>
-          </a:p>
-        </p:txBody>
-      </p:sp>
-      <p:pic>
-        <p:nvPicPr>
-          <p:cNvPr id="4" name="Picture 3" descr="Graphical user interface, text, application&#10;&#10;Description automatically generated">
-            <a:extLst>
-              <a:ext uri="{FF2B5EF4-FFF2-40B4-BE49-F238E27FC236}">
-                <a16:creationId xmlns:a16="http://schemas.microsoft.com/office/drawing/2014/main" id="{B7069395-D8A8-FF2D-57B2-0E23BF56D9D8}"/>
-              </a:ext>
-            </a:extLst>
-          </p:cNvPr>
-          <p:cNvPicPr>
-            <a:picLocks noChangeAspect="1"/>
-          </p:cNvPicPr>
+              <a:t>Phase III Children’s Oncology Group Trial AAML0531</a:t>
+            </a:r>
+          </a:p>
+        </p:txBody>
+      </p:sp>
+      <p:sp>
+        <p:nvSpPr>
+          <p:cNvPr id="4" name="Rectangle 3">
+            <a:extLst>
+              <a:ext uri="{FF2B5EF4-FFF2-40B4-BE49-F238E27FC236}">
+                <a16:creationId xmlns:a16="http://schemas.microsoft.com/office/drawing/2014/main" id="{9F7CDE27-A913-6B89-C6E8-506DA8E46595}"/>
+              </a:ext>
+            </a:extLst>
+          </p:cNvPr>
+          <p:cNvSpPr/>
           <p:nvPr/>
-        </p:nvPicPr>
-        <p:blipFill>
-          <a:blip r:embed="rId2"/>
-          <a:stretch>
-            <a:fillRect/>
-          </a:stretch>
-        </p:blipFill>
-        <p:spPr>
-          <a:xfrm>
-            <a:off x="960120" y="739140"/>
-            <a:ext cx="7413076" cy="3807494"/>
+        </p:nvSpPr>
+        <p:spPr>
+          <a:xfrm>
+            <a:off x="7703414" y="4866501"/>
+            <a:ext cx="1440586" cy="276999"/>
           </a:xfrm>
           <a:prstGeom prst="rect">
             <a:avLst/>
           </a:prstGeom>
         </p:spPr>
-      </p:pic>
-      <p:sp>
-        <p:nvSpPr>
-          <p:cNvPr id="6" name="Rectangle 5">
-            <a:extLst>
-              <a:ext uri="{FF2B5EF4-FFF2-40B4-BE49-F238E27FC236}">
-                <a16:creationId xmlns:a16="http://schemas.microsoft.com/office/drawing/2014/main" id="{7A3A28D6-FBFA-AE99-1950-CD5074FC86EE}"/>
-              </a:ext>
-            </a:extLst>
-          </p:cNvPr>
-          <p:cNvSpPr/>
-          <p:nvPr/>
-        </p:nvSpPr>
-        <p:spPr>
-          <a:xfrm>
-            <a:off x="7652903" y="4866501"/>
-            <a:ext cx="1440586" cy="276999"/>
-          </a:xfrm>
-          <a:prstGeom prst="rect">
-            <a:avLst/>
-          </a:prstGeom>
-        </p:spPr>
         <p:txBody>
           <a:bodyPr wrap="none">
             <a:spAutoFit/>
@@ -15646,7 +15248,7 @@
     </p:spTree>
     <p:extLst>
       <p:ext uri="{BB962C8B-B14F-4D97-AF65-F5344CB8AC3E}">
-        <p14:creationId xmlns:p14="http://schemas.microsoft.com/office/powerpoint/2010/main" val="2234843455"/>
+        <p14:creationId xmlns:p14="http://schemas.microsoft.com/office/powerpoint/2010/main" val="1439031967"/>
       </p:ext>
     </p:extLst>
   </p:cSld>
@@ -15691,7 +15293,7 @@
         </p:nvSpPr>
         <p:spPr>
           <a:xfrm>
-            <a:off x="456271" y="259556"/>
+            <a:off x="456270" y="19764"/>
             <a:ext cx="8231459" cy="479584"/>
           </a:xfrm>
         </p:spPr>
@@ -15711,10 +15313,10 @@
       </p:sp>
       <p:pic>
         <p:nvPicPr>
-          <p:cNvPr id="3" name="Picture 2" descr="Graphical user interface, text, application, email&#10;&#10;Description automatically generated">
-            <a:extLst>
-              <a:ext uri="{FF2B5EF4-FFF2-40B4-BE49-F238E27FC236}">
-                <a16:creationId xmlns:a16="http://schemas.microsoft.com/office/drawing/2014/main" id="{84E00F5E-360C-35BB-1229-DFB67E471A7E}"/>
+          <p:cNvPr id="3" name="Picture 2" descr="Table&#10;&#10;Description automatically generated">
+            <a:extLst>
+              <a:ext uri="{FF2B5EF4-FFF2-40B4-BE49-F238E27FC236}">
+                <a16:creationId xmlns:a16="http://schemas.microsoft.com/office/drawing/2014/main" id="{D11E52B9-C0E3-B44E-6C8B-114EAA59B8BE}"/>
               </a:ext>
             </a:extLst>
           </p:cNvPr>
@@ -15731,8 +15333,8 @@
         </p:blipFill>
         <p:spPr>
           <a:xfrm>
-            <a:off x="815340" y="748403"/>
-            <a:ext cx="7513320" cy="3432511"/>
+            <a:off x="890863" y="365624"/>
+            <a:ext cx="7544478" cy="4412251"/>
           </a:xfrm>
           <a:prstGeom prst="rect">
             <a:avLst/>
@@ -15741,10 +15343,10 @@
       </p:pic>
       <p:sp>
         <p:nvSpPr>
-          <p:cNvPr id="6" name="Rectangle 5">
-            <a:extLst>
-              <a:ext uri="{FF2B5EF4-FFF2-40B4-BE49-F238E27FC236}">
-                <a16:creationId xmlns:a16="http://schemas.microsoft.com/office/drawing/2014/main" id="{948F3512-774B-3F47-B697-E5E49846E255}"/>
+          <p:cNvPr id="4" name="Rectangle 3">
+            <a:extLst>
+              <a:ext uri="{FF2B5EF4-FFF2-40B4-BE49-F238E27FC236}">
+                <a16:creationId xmlns:a16="http://schemas.microsoft.com/office/drawing/2014/main" id="{1A39FDC0-D9E5-17F3-58B8-017591CF166F}"/>
               </a:ext>
             </a:extLst>
           </p:cNvPr>
@@ -15753,7 +15355,7 @@
         </p:nvSpPr>
         <p:spPr>
           <a:xfrm>
-            <a:off x="7759939" y="4866501"/>
+            <a:off x="7715048" y="4866501"/>
             <a:ext cx="1440586" cy="276999"/>
           </a:xfrm>
           <a:prstGeom prst="rect">
@@ -15785,7 +15387,7 @@
     </p:spTree>
     <p:extLst>
       <p:ext uri="{BB962C8B-B14F-4D97-AF65-F5344CB8AC3E}">
-        <p14:creationId xmlns:p14="http://schemas.microsoft.com/office/powerpoint/2010/main" val="3759481275"/>
+        <p14:creationId xmlns:p14="http://schemas.microsoft.com/office/powerpoint/2010/main" val="3113929802"/>
       </p:ext>
     </p:extLst>
   </p:cSld>
@@ -15850,6 +15452,284 @@
       </p:sp>
       <p:pic>
         <p:nvPicPr>
+          <p:cNvPr id="4" name="Picture 3" descr="Graphical user interface, text, application&#10;&#10;Description automatically generated">
+            <a:extLst>
+              <a:ext uri="{FF2B5EF4-FFF2-40B4-BE49-F238E27FC236}">
+                <a16:creationId xmlns:a16="http://schemas.microsoft.com/office/drawing/2014/main" id="{B7069395-D8A8-FF2D-57B2-0E23BF56D9D8}"/>
+              </a:ext>
+            </a:extLst>
+          </p:cNvPr>
+          <p:cNvPicPr>
+            <a:picLocks noChangeAspect="1"/>
+          </p:cNvPicPr>
+          <p:nvPr/>
+        </p:nvPicPr>
+        <p:blipFill>
+          <a:blip r:embed="rId2"/>
+          <a:stretch>
+            <a:fillRect/>
+          </a:stretch>
+        </p:blipFill>
+        <p:spPr>
+          <a:xfrm>
+            <a:off x="960120" y="739140"/>
+            <a:ext cx="7413076" cy="3807494"/>
+          </a:xfrm>
+          <a:prstGeom prst="rect">
+            <a:avLst/>
+          </a:prstGeom>
+        </p:spPr>
+      </p:pic>
+      <p:sp>
+        <p:nvSpPr>
+          <p:cNvPr id="6" name="Rectangle 5">
+            <a:extLst>
+              <a:ext uri="{FF2B5EF4-FFF2-40B4-BE49-F238E27FC236}">
+                <a16:creationId xmlns:a16="http://schemas.microsoft.com/office/drawing/2014/main" id="{7A3A28D6-FBFA-AE99-1950-CD5074FC86EE}"/>
+              </a:ext>
+            </a:extLst>
+          </p:cNvPr>
+          <p:cNvSpPr/>
+          <p:nvPr/>
+        </p:nvSpPr>
+        <p:spPr>
+          <a:xfrm>
+            <a:off x="7652903" y="4866501"/>
+            <a:ext cx="1440586" cy="276999"/>
+          </a:xfrm>
+          <a:prstGeom prst="rect">
+            <a:avLst/>
+          </a:prstGeom>
+        </p:spPr>
+        <p:txBody>
+          <a:bodyPr wrap="none">
+            <a:spAutoFit/>
+          </a:bodyPr>
+          <a:lstStyle/>
+          <a:p>
+            <a:pPr algn="r"/>
+            <a:r>
+              <a:rPr lang="en-US" sz="1200" dirty="0"/>
+              <a:t>(</a:t>
+            </a:r>
+            <a:r>
+              <a:rPr lang="en-US" sz="1200" dirty="0" err="1"/>
+              <a:t>Gamis</a:t>
+            </a:r>
+            <a:r>
+              <a:rPr lang="en-US" sz="1200" dirty="0"/>
+              <a:t>, et al., 2014)</a:t>
+            </a:r>
+          </a:p>
+        </p:txBody>
+      </p:sp>
+    </p:spTree>
+    <p:extLst>
+      <p:ext uri="{BB962C8B-B14F-4D97-AF65-F5344CB8AC3E}">
+        <p14:creationId xmlns:p14="http://schemas.microsoft.com/office/powerpoint/2010/main" val="2234843455"/>
+      </p:ext>
+    </p:extLst>
+  </p:cSld>
+  <p:clrMapOvr>
+    <a:masterClrMapping/>
+  </p:clrMapOvr>
+</p:sld>
+</file>
+
+<file path=ppt/slides/slide45.xml><?xml version="1.0" encoding="utf-8"?>
+<p:sld xmlns:a="http://schemas.openxmlformats.org/drawingml/2006/main" xmlns:r="http://schemas.openxmlformats.org/officeDocument/2006/relationships" xmlns:p="http://schemas.openxmlformats.org/presentationml/2006/main">
+  <p:cSld>
+    <p:spTree>
+      <p:nvGrpSpPr>
+        <p:cNvPr id="1" name=""/>
+        <p:cNvGrpSpPr/>
+        <p:nvPr/>
+      </p:nvGrpSpPr>
+      <p:grpSpPr>
+        <a:xfrm>
+          <a:off x="0" y="0"/>
+          <a:ext cx="0" cy="0"/>
+          <a:chOff x="0" y="0"/>
+          <a:chExt cx="0" cy="0"/>
+        </a:xfrm>
+      </p:grpSpPr>
+      <p:sp>
+        <p:nvSpPr>
+          <p:cNvPr id="5" name="Text Placeholder 4">
+            <a:extLst>
+              <a:ext uri="{FF2B5EF4-FFF2-40B4-BE49-F238E27FC236}">
+                <a16:creationId xmlns:a16="http://schemas.microsoft.com/office/drawing/2014/main" id="{8EE35CCD-5E6E-9EDB-33D2-4D88C23F7438}"/>
+              </a:ext>
+            </a:extLst>
+          </p:cNvPr>
+          <p:cNvSpPr>
+            <a:spLocks noGrp="1"/>
+          </p:cNvSpPr>
+          <p:nvPr>
+            <p:ph type="body" sz="quarter" idx="11"/>
+          </p:nvPr>
+        </p:nvSpPr>
+        <p:spPr>
+          <a:xfrm>
+            <a:off x="456271" y="259556"/>
+            <a:ext cx="8231459" cy="479584"/>
+          </a:xfrm>
+        </p:spPr>
+        <p:txBody>
+          <a:bodyPr/>
+          <a:lstStyle/>
+          <a:p>
+            <a:r>
+              <a:rPr lang="en-US" dirty="0"/>
+              <a:t>Phase III Children’s Oncology Group Trial AAML0531 </a:t>
+            </a:r>
+          </a:p>
+          <a:p>
+            <a:endParaRPr lang="en-US" dirty="0"/>
+          </a:p>
+        </p:txBody>
+      </p:sp>
+      <p:pic>
+        <p:nvPicPr>
+          <p:cNvPr id="3" name="Picture 2" descr="Graphical user interface, text, application, email&#10;&#10;Description automatically generated">
+            <a:extLst>
+              <a:ext uri="{FF2B5EF4-FFF2-40B4-BE49-F238E27FC236}">
+                <a16:creationId xmlns:a16="http://schemas.microsoft.com/office/drawing/2014/main" id="{84E00F5E-360C-35BB-1229-DFB67E471A7E}"/>
+              </a:ext>
+            </a:extLst>
+          </p:cNvPr>
+          <p:cNvPicPr>
+            <a:picLocks noChangeAspect="1"/>
+          </p:cNvPicPr>
+          <p:nvPr/>
+        </p:nvPicPr>
+        <p:blipFill>
+          <a:blip r:embed="rId2"/>
+          <a:stretch>
+            <a:fillRect/>
+          </a:stretch>
+        </p:blipFill>
+        <p:spPr>
+          <a:xfrm>
+            <a:off x="815340" y="748403"/>
+            <a:ext cx="7513320" cy="3432511"/>
+          </a:xfrm>
+          <a:prstGeom prst="rect">
+            <a:avLst/>
+          </a:prstGeom>
+        </p:spPr>
+      </p:pic>
+      <p:sp>
+        <p:nvSpPr>
+          <p:cNvPr id="6" name="Rectangle 5">
+            <a:extLst>
+              <a:ext uri="{FF2B5EF4-FFF2-40B4-BE49-F238E27FC236}">
+                <a16:creationId xmlns:a16="http://schemas.microsoft.com/office/drawing/2014/main" id="{948F3512-774B-3F47-B697-E5E49846E255}"/>
+              </a:ext>
+            </a:extLst>
+          </p:cNvPr>
+          <p:cNvSpPr/>
+          <p:nvPr/>
+        </p:nvSpPr>
+        <p:spPr>
+          <a:xfrm>
+            <a:off x="7759939" y="4866501"/>
+            <a:ext cx="1440586" cy="276999"/>
+          </a:xfrm>
+          <a:prstGeom prst="rect">
+            <a:avLst/>
+          </a:prstGeom>
+        </p:spPr>
+        <p:txBody>
+          <a:bodyPr wrap="none">
+            <a:spAutoFit/>
+          </a:bodyPr>
+          <a:lstStyle/>
+          <a:p>
+            <a:pPr algn="r"/>
+            <a:r>
+              <a:rPr lang="en-US" sz="1200" dirty="0"/>
+              <a:t>(</a:t>
+            </a:r>
+            <a:r>
+              <a:rPr lang="en-US" sz="1200" dirty="0" err="1"/>
+              <a:t>Gamis</a:t>
+            </a:r>
+            <a:r>
+              <a:rPr lang="en-US" sz="1200" dirty="0"/>
+              <a:t>, et al., 2014)</a:t>
+            </a:r>
+          </a:p>
+        </p:txBody>
+      </p:sp>
+    </p:spTree>
+    <p:extLst>
+      <p:ext uri="{BB962C8B-B14F-4D97-AF65-F5344CB8AC3E}">
+        <p14:creationId xmlns:p14="http://schemas.microsoft.com/office/powerpoint/2010/main" val="3759481275"/>
+      </p:ext>
+    </p:extLst>
+  </p:cSld>
+  <p:clrMapOvr>
+    <a:masterClrMapping/>
+  </p:clrMapOvr>
+</p:sld>
+</file>
+
+<file path=ppt/slides/slide46.xml><?xml version="1.0" encoding="utf-8"?>
+<p:sld xmlns:a="http://schemas.openxmlformats.org/drawingml/2006/main" xmlns:r="http://schemas.openxmlformats.org/officeDocument/2006/relationships" xmlns:p="http://schemas.openxmlformats.org/presentationml/2006/main">
+  <p:cSld>
+    <p:spTree>
+      <p:nvGrpSpPr>
+        <p:cNvPr id="1" name=""/>
+        <p:cNvGrpSpPr/>
+        <p:nvPr/>
+      </p:nvGrpSpPr>
+      <p:grpSpPr>
+        <a:xfrm>
+          <a:off x="0" y="0"/>
+          <a:ext cx="0" cy="0"/>
+          <a:chOff x="0" y="0"/>
+          <a:chExt cx="0" cy="0"/>
+        </a:xfrm>
+      </p:grpSpPr>
+      <p:sp>
+        <p:nvSpPr>
+          <p:cNvPr id="5" name="Text Placeholder 4">
+            <a:extLst>
+              <a:ext uri="{FF2B5EF4-FFF2-40B4-BE49-F238E27FC236}">
+                <a16:creationId xmlns:a16="http://schemas.microsoft.com/office/drawing/2014/main" id="{8EE35CCD-5E6E-9EDB-33D2-4D88C23F7438}"/>
+              </a:ext>
+            </a:extLst>
+          </p:cNvPr>
+          <p:cNvSpPr>
+            <a:spLocks noGrp="1"/>
+          </p:cNvSpPr>
+          <p:nvPr>
+            <p:ph type="body" sz="quarter" idx="11"/>
+          </p:nvPr>
+        </p:nvSpPr>
+        <p:spPr>
+          <a:xfrm>
+            <a:off x="456271" y="259556"/>
+            <a:ext cx="8231459" cy="479584"/>
+          </a:xfrm>
+        </p:spPr>
+        <p:txBody>
+          <a:bodyPr/>
+          <a:lstStyle/>
+          <a:p>
+            <a:r>
+              <a:rPr lang="en-US" dirty="0"/>
+              <a:t>Phase III Children’s Oncology Group Trial AAML0531 </a:t>
+            </a:r>
+          </a:p>
+          <a:p>
+            <a:endParaRPr lang="en-US" dirty="0"/>
+          </a:p>
+        </p:txBody>
+      </p:sp>
+      <p:pic>
+        <p:nvPicPr>
           <p:cNvPr id="6" name="Picture 5" descr="Chart, line chart&#10;&#10;Description automatically generated">
             <a:extLst>
               <a:ext uri="{FF2B5EF4-FFF2-40B4-BE49-F238E27FC236}">
@@ -15934,7 +15814,7 @@
 </p:sld>
 </file>
 
-<file path=ppt/slides/slide45.xml><?xml version="1.0" encoding="utf-8"?>
+<file path=ppt/slides/slide47.xml><?xml version="1.0" encoding="utf-8"?>
 <p:sld xmlns:a="http://schemas.openxmlformats.org/drawingml/2006/main" xmlns:r="http://schemas.openxmlformats.org/officeDocument/2006/relationships" xmlns:p="http://schemas.openxmlformats.org/presentationml/2006/main">
   <p:cSld>
     <p:spTree>
@@ -16413,7 +16293,19 @@
                 </a:r>
                 <a:r>
                   <a:rPr lang="en-US" dirty="0"/>
-                  <a:t>, pivotal efficacy trial, we randomly assigned persons </a:t>
+                  <a:t>, pivotal efficacy trial, we </a:t>
+                </a:r>
+                <a:r>
+                  <a:rPr lang="en-US" b="1" dirty="0">
+                    <a:solidFill>
+                      <a:srgbClr val="990000"/>
+                    </a:solidFill>
+                  </a:rPr>
+                  <a:t>randomly assigned </a:t>
+                </a:r>
+                <a:r>
+                  <a:rPr lang="en-US" dirty="0"/>
+                  <a:t>persons </a:t>
                 </a:r>
                 <a:r>
                   <a:rPr lang="en-US" b="1" dirty="0">
@@ -17849,7 +17741,7 @@
         <p:spPr>
           <a:xfrm>
             <a:off x="5372051" y="188697"/>
-            <a:ext cx="3479641" cy="1754326"/>
+            <a:ext cx="3479641" cy="1477328"/>
           </a:xfrm>
           <a:prstGeom prst="rect">
             <a:avLst/>
@@ -17886,20 +17778,6 @@
                 </a:solidFill>
               </a:rPr>
               <a:t>Should reflect patients who will be treated with the drug if the drug is approved</a:t>
-            </a:r>
-          </a:p>
-          <a:p>
-            <a:pPr marL="285750" indent="-285750">
-              <a:buFont typeface="Arial" panose="020B0604020202020204" pitchFamily="34" charset="0"/>
-              <a:buChar char="•"/>
-            </a:pPr>
-            <a:r>
-              <a:rPr lang="en-US" dirty="0">
-                <a:solidFill>
-                  <a:srgbClr val="0070C0"/>
-                </a:solidFill>
-              </a:rPr>
-              <a:t>“16 years of age or older"</a:t>
             </a:r>
           </a:p>
         </p:txBody>
@@ -17922,7 +17800,13 @@
   <p:cSld>
     <p:spTree>
       <p:nvGrpSpPr>
-        <p:cNvPr id="1" name=""/>
+        <p:cNvPr id="1" name="">
+          <a:extLst>
+            <a:ext uri="{FF2B5EF4-FFF2-40B4-BE49-F238E27FC236}">
+              <a16:creationId xmlns:a16="http://schemas.microsoft.com/office/drawing/2014/main" id="{43435A6E-CDE4-ED7E-ED96-ABA31E585A1A}"/>
+            </a:ext>
+          </a:extLst>
+        </p:cNvPr>
         <p:cNvGrpSpPr/>
         <p:nvPr/>
       </p:nvGrpSpPr>
@@ -17936,60 +17820,10 @@
       </p:grpSpPr>
       <p:sp>
         <p:nvSpPr>
-          <p:cNvPr id="2" name="Text Placeholder 1">
-            <a:extLst>
-              <a:ext uri="{FF2B5EF4-FFF2-40B4-BE49-F238E27FC236}">
-                <a16:creationId xmlns:a16="http://schemas.microsoft.com/office/drawing/2014/main" id="{3DE51B2F-CED1-1EDF-E61D-3CD762261A07}"/>
-              </a:ext>
-            </a:extLst>
-          </p:cNvPr>
-          <p:cNvSpPr>
-            <a:spLocks noGrp="1"/>
-          </p:cNvSpPr>
-          <p:nvPr>
-            <p:ph type="body" sz="quarter" idx="10"/>
-          </p:nvPr>
-        </p:nvSpPr>
-        <p:spPr>
-          <a:xfrm>
-            <a:off x="456271" y="1131757"/>
-            <a:ext cx="8231459" cy="3414843"/>
-          </a:xfrm>
-        </p:spPr>
-        <p:txBody>
-          <a:bodyPr/>
-          <a:lstStyle/>
-          <a:p>
-            <a:pPr marL="285750" indent="-285750">
-              <a:buFont typeface="Arial" panose="020B0604020202020204" pitchFamily="34" charset="0"/>
-              <a:buChar char="•"/>
-            </a:pPr>
-            <a:r>
-              <a:rPr lang="en-US" dirty="0"/>
-              <a:t>Recall the first age group that was approved to receive the Pfizer vaccine…</a:t>
-            </a:r>
-          </a:p>
-          <a:p>
-            <a:pPr marL="285750" indent="-285750">
-              <a:buFont typeface="Arial" panose="020B0604020202020204" pitchFamily="34" charset="0"/>
-              <a:buChar char="•"/>
-            </a:pPr>
-            <a:r>
-              <a:rPr lang="en-US" dirty="0"/>
-              <a:t>Why would we limit who can receive the vaccine? </a:t>
-            </a:r>
-          </a:p>
-          <a:p>
-            <a:endParaRPr lang="en-US" dirty="0"/>
-          </a:p>
-        </p:txBody>
-      </p:sp>
-      <p:sp>
-        <p:nvSpPr>
           <p:cNvPr id="3" name="Text Placeholder 2">
             <a:extLst>
               <a:ext uri="{FF2B5EF4-FFF2-40B4-BE49-F238E27FC236}">
-                <a16:creationId xmlns:a16="http://schemas.microsoft.com/office/drawing/2014/main" id="{59BBA4F2-6034-306B-0C36-5A6EB741585A}"/>
+                <a16:creationId xmlns:a16="http://schemas.microsoft.com/office/drawing/2014/main" id="{DCF293BF-E1AB-745B-1B92-83CB2086984B}"/>
               </a:ext>
             </a:extLst>
           </p:cNvPr>
@@ -18000,25 +17834,661 @@
             <p:ph type="body" sz="quarter" idx="11"/>
           </p:nvPr>
         </p:nvSpPr>
-        <p:spPr/>
+        <p:spPr>
+          <a:xfrm>
+            <a:off x="456271" y="101600"/>
+            <a:ext cx="8231459" cy="990600"/>
+          </a:xfrm>
+        </p:spPr>
         <p:txBody>
           <a:bodyPr/>
           <a:lstStyle/>
           <a:p>
             <a:r>
               <a:rPr lang="en-US" dirty="0"/>
-              <a:t>Safety and Efficacy of the BNT162b2 mRNA Covid-19 Vaccine</a:t>
-            </a:r>
-          </a:p>
-          <a:p>
-            <a:endParaRPr lang="en-US" dirty="0"/>
+              <a:t>Randomized Control Trial</a:t>
+            </a:r>
+          </a:p>
+        </p:txBody>
+      </p:sp>
+      <p:sp>
+        <p:nvSpPr>
+          <p:cNvPr id="4" name="Rounded Rectangle 3">
+            <a:extLst>
+              <a:ext uri="{FF2B5EF4-FFF2-40B4-BE49-F238E27FC236}">
+                <a16:creationId xmlns:a16="http://schemas.microsoft.com/office/drawing/2014/main" id="{26547286-B0D5-E436-2D69-74B733E9974F}"/>
+              </a:ext>
+            </a:extLst>
+          </p:cNvPr>
+          <p:cNvSpPr/>
+          <p:nvPr/>
+        </p:nvSpPr>
+        <p:spPr>
+          <a:xfrm>
+            <a:off x="3204308" y="695569"/>
+            <a:ext cx="2000738" cy="609600"/>
+          </a:xfrm>
+          <a:prstGeom prst="roundRect">
+            <a:avLst/>
+          </a:prstGeom>
+          <a:solidFill>
+            <a:srgbClr val="0070C0"/>
+          </a:solidFill>
+        </p:spPr>
+        <p:style>
+          <a:lnRef idx="2">
+            <a:schemeClr val="accent1">
+              <a:shade val="50000"/>
+            </a:schemeClr>
+          </a:lnRef>
+          <a:fillRef idx="1">
+            <a:schemeClr val="accent1"/>
+          </a:fillRef>
+          <a:effectRef idx="0">
+            <a:schemeClr val="accent1"/>
+          </a:effectRef>
+          <a:fontRef idx="minor">
+            <a:schemeClr val="lt1"/>
+          </a:fontRef>
+        </p:style>
+        <p:txBody>
+          <a:bodyPr rtlCol="0" anchor="ctr"/>
+          <a:lstStyle/>
+          <a:p>
+            <a:pPr algn="ctr"/>
+            <a:r>
+              <a:rPr lang="en-US" dirty="0"/>
+              <a:t>Patients assessed for eligibility</a:t>
+            </a:r>
+          </a:p>
+        </p:txBody>
+      </p:sp>
+      <p:sp>
+        <p:nvSpPr>
+          <p:cNvPr id="5" name="Rounded Rectangle 4">
+            <a:extLst>
+              <a:ext uri="{FF2B5EF4-FFF2-40B4-BE49-F238E27FC236}">
+                <a16:creationId xmlns:a16="http://schemas.microsoft.com/office/drawing/2014/main" id="{25B497C4-7600-E919-4CD4-E38B85DDE308}"/>
+              </a:ext>
+            </a:extLst>
+          </p:cNvPr>
+          <p:cNvSpPr/>
+          <p:nvPr/>
+        </p:nvSpPr>
+        <p:spPr>
+          <a:xfrm>
+            <a:off x="3204308" y="1591013"/>
+            <a:ext cx="2000738" cy="609600"/>
+          </a:xfrm>
+          <a:prstGeom prst="roundRect">
+            <a:avLst/>
+          </a:prstGeom>
+          <a:solidFill>
+            <a:srgbClr val="990000"/>
+          </a:solidFill>
+        </p:spPr>
+        <p:style>
+          <a:lnRef idx="2">
+            <a:schemeClr val="accent1">
+              <a:shade val="50000"/>
+            </a:schemeClr>
+          </a:lnRef>
+          <a:fillRef idx="1">
+            <a:schemeClr val="accent1"/>
+          </a:fillRef>
+          <a:effectRef idx="0">
+            <a:schemeClr val="accent1"/>
+          </a:effectRef>
+          <a:fontRef idx="minor">
+            <a:schemeClr val="lt1"/>
+          </a:fontRef>
+        </p:style>
+        <p:txBody>
+          <a:bodyPr rtlCol="0" anchor="ctr"/>
+          <a:lstStyle/>
+          <a:p>
+            <a:pPr algn="ctr"/>
+            <a:r>
+              <a:rPr lang="en-US" dirty="0"/>
+              <a:t>Eligible patients are enrolled</a:t>
+            </a:r>
+          </a:p>
+        </p:txBody>
+      </p:sp>
+      <p:sp>
+        <p:nvSpPr>
+          <p:cNvPr id="7" name="Rounded Rectangle 6">
+            <a:extLst>
+              <a:ext uri="{FF2B5EF4-FFF2-40B4-BE49-F238E27FC236}">
+                <a16:creationId xmlns:a16="http://schemas.microsoft.com/office/drawing/2014/main" id="{CB417A46-AF65-E582-AB47-BAE79571FABF}"/>
+              </a:ext>
+            </a:extLst>
+          </p:cNvPr>
+          <p:cNvSpPr/>
+          <p:nvPr/>
+        </p:nvSpPr>
+        <p:spPr>
+          <a:xfrm>
+            <a:off x="4806460" y="2485291"/>
+            <a:ext cx="2532185" cy="794820"/>
+          </a:xfrm>
+          <a:prstGeom prst="roundRect">
+            <a:avLst/>
+          </a:prstGeom>
+          <a:solidFill>
+            <a:srgbClr val="990000"/>
+          </a:solidFill>
+        </p:spPr>
+        <p:style>
+          <a:lnRef idx="2">
+            <a:schemeClr val="accent1">
+              <a:shade val="50000"/>
+            </a:schemeClr>
+          </a:lnRef>
+          <a:fillRef idx="1">
+            <a:schemeClr val="accent1"/>
+          </a:fillRef>
+          <a:effectRef idx="0">
+            <a:schemeClr val="accent1"/>
+          </a:effectRef>
+          <a:fontRef idx="minor">
+            <a:schemeClr val="lt1"/>
+          </a:fontRef>
+        </p:style>
+        <p:txBody>
+          <a:bodyPr rtlCol="0" anchor="ctr"/>
+          <a:lstStyle/>
+          <a:p>
+            <a:pPr algn="ctr"/>
+            <a:r>
+              <a:rPr lang="en-US" dirty="0"/>
+              <a:t>Control Arm</a:t>
+            </a:r>
+          </a:p>
+          <a:p>
+            <a:pPr algn="ctr"/>
+            <a:r>
+              <a:rPr lang="en-US" dirty="0"/>
+              <a:t> (standard of care or placebo)</a:t>
+            </a:r>
+          </a:p>
+        </p:txBody>
+      </p:sp>
+      <p:sp>
+        <p:nvSpPr>
+          <p:cNvPr id="8" name="TextBox 7">
+            <a:extLst>
+              <a:ext uri="{FF2B5EF4-FFF2-40B4-BE49-F238E27FC236}">
+                <a16:creationId xmlns:a16="http://schemas.microsoft.com/office/drawing/2014/main" id="{064A1C85-955D-7DB3-051A-659F4B8FC5BE}"/>
+              </a:ext>
+            </a:extLst>
+          </p:cNvPr>
+          <p:cNvSpPr txBox="1"/>
+          <p:nvPr/>
+        </p:nvSpPr>
+        <p:spPr>
+          <a:xfrm>
+            <a:off x="3477846" y="2485291"/>
+            <a:ext cx="1453662" cy="646331"/>
+          </a:xfrm>
+          <a:prstGeom prst="rect">
+            <a:avLst/>
+          </a:prstGeom>
+          <a:noFill/>
+        </p:spPr>
+        <p:txBody>
+          <a:bodyPr wrap="square" rtlCol="0">
+            <a:spAutoFit/>
+          </a:bodyPr>
+          <a:lstStyle/>
+          <a:p>
+            <a:r>
+              <a:rPr lang="en-US" dirty="0"/>
+              <a:t>Patients are randomized </a:t>
+            </a:r>
+          </a:p>
+        </p:txBody>
+      </p:sp>
+      <p:sp>
+        <p:nvSpPr>
+          <p:cNvPr id="9" name="Rounded Rectangle 8">
+            <a:extLst>
+              <a:ext uri="{FF2B5EF4-FFF2-40B4-BE49-F238E27FC236}">
+                <a16:creationId xmlns:a16="http://schemas.microsoft.com/office/drawing/2014/main" id="{0CD0BEE4-3E42-F019-E236-AE9A1DB1DFDC}"/>
+              </a:ext>
+            </a:extLst>
+          </p:cNvPr>
+          <p:cNvSpPr/>
+          <p:nvPr/>
+        </p:nvSpPr>
+        <p:spPr>
+          <a:xfrm>
+            <a:off x="945661" y="2486956"/>
+            <a:ext cx="2532185" cy="794820"/>
+          </a:xfrm>
+          <a:prstGeom prst="roundRect">
+            <a:avLst/>
+          </a:prstGeom>
+          <a:solidFill>
+            <a:srgbClr val="990000"/>
+          </a:solidFill>
+        </p:spPr>
+        <p:style>
+          <a:lnRef idx="2">
+            <a:schemeClr val="accent1">
+              <a:shade val="50000"/>
+            </a:schemeClr>
+          </a:lnRef>
+          <a:fillRef idx="1">
+            <a:schemeClr val="accent1"/>
+          </a:fillRef>
+          <a:effectRef idx="0">
+            <a:schemeClr val="accent1"/>
+          </a:effectRef>
+          <a:fontRef idx="minor">
+            <a:schemeClr val="lt1"/>
+          </a:fontRef>
+        </p:style>
+        <p:txBody>
+          <a:bodyPr rtlCol="0" anchor="ctr"/>
+          <a:lstStyle/>
+          <a:p>
+            <a:pPr algn="ctr"/>
+            <a:r>
+              <a:rPr lang="en-US" dirty="0"/>
+              <a:t>Treatment/</a:t>
+            </a:r>
+          </a:p>
+          <a:p>
+            <a:pPr algn="ctr"/>
+            <a:r>
+              <a:rPr lang="en-US" dirty="0"/>
+              <a:t>Experimental Arm</a:t>
+            </a:r>
+          </a:p>
+        </p:txBody>
+      </p:sp>
+      <p:sp>
+        <p:nvSpPr>
+          <p:cNvPr id="10" name="Rounded Rectangle 9">
+            <a:extLst>
+              <a:ext uri="{FF2B5EF4-FFF2-40B4-BE49-F238E27FC236}">
+                <a16:creationId xmlns:a16="http://schemas.microsoft.com/office/drawing/2014/main" id="{4746F7DE-5BA3-6BCA-B549-9E025808A2C8}"/>
+              </a:ext>
+            </a:extLst>
+          </p:cNvPr>
+          <p:cNvSpPr/>
+          <p:nvPr/>
+        </p:nvSpPr>
+        <p:spPr>
+          <a:xfrm>
+            <a:off x="914400" y="3721100"/>
+            <a:ext cx="2563446" cy="726831"/>
+          </a:xfrm>
+          <a:prstGeom prst="roundRect">
+            <a:avLst/>
+          </a:prstGeom>
+          <a:solidFill>
+            <a:srgbClr val="990000"/>
+          </a:solidFill>
+        </p:spPr>
+        <p:style>
+          <a:lnRef idx="2">
+            <a:schemeClr val="accent1">
+              <a:shade val="50000"/>
+            </a:schemeClr>
+          </a:lnRef>
+          <a:fillRef idx="1">
+            <a:schemeClr val="accent1"/>
+          </a:fillRef>
+          <a:effectRef idx="0">
+            <a:schemeClr val="accent1"/>
+          </a:effectRef>
+          <a:fontRef idx="minor">
+            <a:schemeClr val="lt1"/>
+          </a:fontRef>
+        </p:style>
+        <p:txBody>
+          <a:bodyPr rtlCol="0" anchor="ctr"/>
+          <a:lstStyle/>
+          <a:p>
+            <a:pPr algn="ctr"/>
+            <a:r>
+              <a:rPr lang="en-US" dirty="0"/>
+              <a:t>Outcomes Assessed</a:t>
+            </a:r>
+          </a:p>
+        </p:txBody>
+      </p:sp>
+      <p:sp>
+        <p:nvSpPr>
+          <p:cNvPr id="11" name="Rounded Rectangle 10">
+            <a:extLst>
+              <a:ext uri="{FF2B5EF4-FFF2-40B4-BE49-F238E27FC236}">
+                <a16:creationId xmlns:a16="http://schemas.microsoft.com/office/drawing/2014/main" id="{C1691E32-FC66-B1DD-FD94-3F548103044A}"/>
+              </a:ext>
+            </a:extLst>
+          </p:cNvPr>
+          <p:cNvSpPr/>
+          <p:nvPr/>
+        </p:nvSpPr>
+        <p:spPr>
+          <a:xfrm>
+            <a:off x="4806460" y="3721099"/>
+            <a:ext cx="2563446" cy="726831"/>
+          </a:xfrm>
+          <a:prstGeom prst="roundRect">
+            <a:avLst/>
+          </a:prstGeom>
+          <a:solidFill>
+            <a:srgbClr val="990000"/>
+          </a:solidFill>
+        </p:spPr>
+        <p:style>
+          <a:lnRef idx="2">
+            <a:schemeClr val="accent1">
+              <a:shade val="50000"/>
+            </a:schemeClr>
+          </a:lnRef>
+          <a:fillRef idx="1">
+            <a:schemeClr val="accent1"/>
+          </a:fillRef>
+          <a:effectRef idx="0">
+            <a:schemeClr val="accent1"/>
+          </a:effectRef>
+          <a:fontRef idx="minor">
+            <a:schemeClr val="lt1"/>
+          </a:fontRef>
+        </p:style>
+        <p:txBody>
+          <a:bodyPr rtlCol="0" anchor="ctr"/>
+          <a:lstStyle/>
+          <a:p>
+            <a:pPr algn="ctr"/>
+            <a:r>
+              <a:rPr lang="en-US" dirty="0"/>
+              <a:t>Outcomes Assessed</a:t>
+            </a:r>
+          </a:p>
+        </p:txBody>
+      </p:sp>
+      <p:cxnSp>
+        <p:nvCxnSpPr>
+          <p:cNvPr id="14" name="Straight Arrow Connector 13">
+            <a:extLst>
+              <a:ext uri="{FF2B5EF4-FFF2-40B4-BE49-F238E27FC236}">
+                <a16:creationId xmlns:a16="http://schemas.microsoft.com/office/drawing/2014/main" id="{E787B387-69B7-7D84-E8E1-0A82F487FF9F}"/>
+              </a:ext>
+            </a:extLst>
+          </p:cNvPr>
+          <p:cNvCxnSpPr/>
+          <p:nvPr/>
+        </p:nvCxnSpPr>
+        <p:spPr>
+          <a:xfrm>
+            <a:off x="4204677" y="1359877"/>
+            <a:ext cx="0" cy="156308"/>
+          </a:xfrm>
+          <a:prstGeom prst="straightConnector1">
+            <a:avLst/>
+          </a:prstGeom>
+          <a:ln>
+            <a:tailEnd type="triangle"/>
+          </a:ln>
+        </p:spPr>
+        <p:style>
+          <a:lnRef idx="1">
+            <a:schemeClr val="accent1"/>
+          </a:lnRef>
+          <a:fillRef idx="0">
+            <a:schemeClr val="accent1"/>
+          </a:fillRef>
+          <a:effectRef idx="0">
+            <a:schemeClr val="accent1"/>
+          </a:effectRef>
+          <a:fontRef idx="minor">
+            <a:schemeClr val="tx1"/>
+          </a:fontRef>
+        </p:style>
+      </p:cxnSp>
+      <p:cxnSp>
+        <p:nvCxnSpPr>
+          <p:cNvPr id="15" name="Straight Arrow Connector 14">
+            <a:extLst>
+              <a:ext uri="{FF2B5EF4-FFF2-40B4-BE49-F238E27FC236}">
+                <a16:creationId xmlns:a16="http://schemas.microsoft.com/office/drawing/2014/main" id="{6F3DB9F2-7CF9-2694-8752-86146059054F}"/>
+              </a:ext>
+            </a:extLst>
+          </p:cNvPr>
+          <p:cNvCxnSpPr>
+            <a:cxnSpLocks/>
+          </p:cNvCxnSpPr>
+          <p:nvPr/>
+        </p:nvCxnSpPr>
+        <p:spPr>
+          <a:xfrm flipH="1">
+            <a:off x="3806092" y="2309443"/>
+            <a:ext cx="277448" cy="175848"/>
+          </a:xfrm>
+          <a:prstGeom prst="straightConnector1">
+            <a:avLst/>
+          </a:prstGeom>
+          <a:ln>
+            <a:tailEnd type="triangle"/>
+          </a:ln>
+        </p:spPr>
+        <p:style>
+          <a:lnRef idx="1">
+            <a:schemeClr val="accent1"/>
+          </a:lnRef>
+          <a:fillRef idx="0">
+            <a:schemeClr val="accent1"/>
+          </a:fillRef>
+          <a:effectRef idx="0">
+            <a:schemeClr val="accent1"/>
+          </a:effectRef>
+          <a:fontRef idx="minor">
+            <a:schemeClr val="tx1"/>
+          </a:fontRef>
+        </p:style>
+      </p:cxnSp>
+      <p:cxnSp>
+        <p:nvCxnSpPr>
+          <p:cNvPr id="16" name="Straight Arrow Connector 15">
+            <a:extLst>
+              <a:ext uri="{FF2B5EF4-FFF2-40B4-BE49-F238E27FC236}">
+                <a16:creationId xmlns:a16="http://schemas.microsoft.com/office/drawing/2014/main" id="{0E60A0B8-FBA3-7B10-E0BF-E33CD05D32F5}"/>
+              </a:ext>
+            </a:extLst>
+          </p:cNvPr>
+          <p:cNvCxnSpPr>
+            <a:cxnSpLocks/>
+          </p:cNvCxnSpPr>
+          <p:nvPr/>
+        </p:nvCxnSpPr>
+        <p:spPr>
+          <a:xfrm>
+            <a:off x="4204677" y="2309443"/>
+            <a:ext cx="367323" cy="175848"/>
+          </a:xfrm>
+          <a:prstGeom prst="straightConnector1">
+            <a:avLst/>
+          </a:prstGeom>
+          <a:ln>
+            <a:tailEnd type="triangle"/>
+          </a:ln>
+        </p:spPr>
+        <p:style>
+          <a:lnRef idx="1">
+            <a:schemeClr val="accent1"/>
+          </a:lnRef>
+          <a:fillRef idx="0">
+            <a:schemeClr val="accent1"/>
+          </a:fillRef>
+          <a:effectRef idx="0">
+            <a:schemeClr val="accent1"/>
+          </a:effectRef>
+          <a:fontRef idx="minor">
+            <a:schemeClr val="tx1"/>
+          </a:fontRef>
+        </p:style>
+      </p:cxnSp>
+      <p:cxnSp>
+        <p:nvCxnSpPr>
+          <p:cNvPr id="19" name="Straight Arrow Connector 18">
+            <a:extLst>
+              <a:ext uri="{FF2B5EF4-FFF2-40B4-BE49-F238E27FC236}">
+                <a16:creationId xmlns:a16="http://schemas.microsoft.com/office/drawing/2014/main" id="{EC0A2B68-85D0-2C8D-AD33-BE37AD44E4C7}"/>
+              </a:ext>
+            </a:extLst>
+          </p:cNvPr>
+          <p:cNvCxnSpPr>
+            <a:cxnSpLocks/>
+          </p:cNvCxnSpPr>
+          <p:nvPr/>
+        </p:nvCxnSpPr>
+        <p:spPr>
+          <a:xfrm>
+            <a:off x="2086709" y="3392271"/>
+            <a:ext cx="0" cy="234067"/>
+          </a:xfrm>
+          <a:prstGeom prst="straightConnector1">
+            <a:avLst/>
+          </a:prstGeom>
+          <a:ln>
+            <a:tailEnd type="triangle"/>
+          </a:ln>
+        </p:spPr>
+        <p:style>
+          <a:lnRef idx="1">
+            <a:schemeClr val="accent1"/>
+          </a:lnRef>
+          <a:fillRef idx="0">
+            <a:schemeClr val="accent1"/>
+          </a:fillRef>
+          <a:effectRef idx="0">
+            <a:schemeClr val="accent1"/>
+          </a:effectRef>
+          <a:fontRef idx="minor">
+            <a:schemeClr val="tx1"/>
+          </a:fontRef>
+        </p:style>
+      </p:cxnSp>
+      <p:cxnSp>
+        <p:nvCxnSpPr>
+          <p:cNvPr id="21" name="Straight Arrow Connector 20">
+            <a:extLst>
+              <a:ext uri="{FF2B5EF4-FFF2-40B4-BE49-F238E27FC236}">
+                <a16:creationId xmlns:a16="http://schemas.microsoft.com/office/drawing/2014/main" id="{D22793FE-0E77-B18C-8B1C-6EFB068D75D9}"/>
+              </a:ext>
+            </a:extLst>
+          </p:cNvPr>
+          <p:cNvCxnSpPr>
+            <a:cxnSpLocks/>
+          </p:cNvCxnSpPr>
+          <p:nvPr/>
+        </p:nvCxnSpPr>
+        <p:spPr>
+          <a:xfrm>
+            <a:off x="6072552" y="3392271"/>
+            <a:ext cx="0" cy="234067"/>
+          </a:xfrm>
+          <a:prstGeom prst="straightConnector1">
+            <a:avLst/>
+          </a:prstGeom>
+          <a:ln>
+            <a:tailEnd type="triangle"/>
+          </a:ln>
+        </p:spPr>
+        <p:style>
+          <a:lnRef idx="1">
+            <a:schemeClr val="accent1"/>
+          </a:lnRef>
+          <a:fillRef idx="0">
+            <a:schemeClr val="accent1"/>
+          </a:fillRef>
+          <a:effectRef idx="0">
+            <a:schemeClr val="accent1"/>
+          </a:effectRef>
+          <a:fontRef idx="minor">
+            <a:schemeClr val="tx1"/>
+          </a:fontRef>
+        </p:style>
+      </p:cxnSp>
+      <p:sp>
+        <p:nvSpPr>
+          <p:cNvPr id="2" name="Rectangle 1">
+            <a:extLst>
+              <a:ext uri="{FF2B5EF4-FFF2-40B4-BE49-F238E27FC236}">
+                <a16:creationId xmlns:a16="http://schemas.microsoft.com/office/drawing/2014/main" id="{F91D3EDB-5AB7-C5D7-D8BC-B8F84094657C}"/>
+              </a:ext>
+            </a:extLst>
+          </p:cNvPr>
+          <p:cNvSpPr/>
+          <p:nvPr/>
+        </p:nvSpPr>
+        <p:spPr>
+          <a:xfrm>
+            <a:off x="5372051" y="188697"/>
+            <a:ext cx="3479641" cy="1754326"/>
+          </a:xfrm>
+          <a:prstGeom prst="rect">
+            <a:avLst/>
+          </a:prstGeom>
+        </p:spPr>
+        <p:txBody>
+          <a:bodyPr wrap="square">
+            <a:spAutoFit/>
+          </a:bodyPr>
+          <a:lstStyle/>
+          <a:p>
+            <a:pPr marL="285750" indent="-285750">
+              <a:buFont typeface="Arial" panose="020B0604020202020204" pitchFamily="34" charset="0"/>
+              <a:buChar char="•"/>
+            </a:pPr>
+            <a:r>
+              <a:rPr lang="en-US" dirty="0">
+                <a:solidFill>
+                  <a:srgbClr val="0070C0"/>
+                </a:solidFill>
+              </a:rPr>
+              <a:t>Determines the population that we will be sampling from</a:t>
+            </a:r>
+          </a:p>
+          <a:p>
+            <a:pPr marL="285750" indent="-285750">
+              <a:buFont typeface="Arial" panose="020B0604020202020204" pitchFamily="34" charset="0"/>
+              <a:buChar char="•"/>
+            </a:pPr>
+            <a:r>
+              <a:rPr lang="en-US" dirty="0">
+                <a:solidFill>
+                  <a:srgbClr val="0070C0"/>
+                </a:solidFill>
+              </a:rPr>
+              <a:t>Should reflect patients who will be treated with the drug if the drug is approved</a:t>
+            </a:r>
+          </a:p>
+          <a:p>
+            <a:pPr marL="285750" indent="-285750">
+              <a:buFont typeface="Arial" panose="020B0604020202020204" pitchFamily="34" charset="0"/>
+              <a:buChar char="•"/>
+            </a:pPr>
+            <a:r>
+              <a:rPr lang="en-US" dirty="0">
+                <a:solidFill>
+                  <a:srgbClr val="0070C0"/>
+                </a:solidFill>
+              </a:rPr>
+              <a:t>“16 years of age or older"</a:t>
+            </a:r>
           </a:p>
         </p:txBody>
       </p:sp>
     </p:spTree>
     <p:extLst>
       <p:ext uri="{BB962C8B-B14F-4D97-AF65-F5344CB8AC3E}">
-        <p14:creationId xmlns:p14="http://schemas.microsoft.com/office/powerpoint/2010/main" val="2178431929"/>
+        <p14:creationId xmlns:p14="http://schemas.microsoft.com/office/powerpoint/2010/main" val="2505726542"/>
       </p:ext>
     </p:extLst>
   </p:cSld>
